--- a/ENSA_Module_9.pptx
+++ b/ENSA_Module_9.pptx
@@ -245,523 +245,83 @@
 </p:cmAuthorLst>
 </file>
 
-<file path=ppt/revisionInfo.xml><?xml version="1.0" encoding="utf-8"?>
-<p1510:revInfo xmlns:a="http://schemas.openxmlformats.org/drawingml/2006/main" xmlns:r="http://schemas.openxmlformats.org/officeDocument/2006/relationships" xmlns:p1510="http://schemas.microsoft.com/office/powerpoint/2015/10/main">
-  <p1510:revLst>
-    <p1510:client id="{A09C97D1-3A89-734D-B47E-33FA2A6D6742}" v="1" dt="2025-10-15T07:17:59.140"/>
-  </p1510:revLst>
-</p1510:revInfo>
-</file>
-
 <file path=ppt/changesInfos/changesInfo1.xml><?xml version="1.0" encoding="utf-8"?>
 <pc:chgInfo xmlns:a="http://schemas.openxmlformats.org/drawingml/2006/main" xmlns:r="http://schemas.openxmlformats.org/officeDocument/2006/relationships" xmlns:ac="http://schemas.microsoft.com/office/drawing/2013/main/command" xmlns:pc="http://schemas.microsoft.com/office/powerpoint/2013/main/command">
   <pc:docChgLst>
-    <pc:chgData name="Július Baráth" userId="e650c4ab-697e-4750-bd58-c1531aabce95" providerId="ADAL" clId="{28E3D678-CD3B-6444-B753-DC137A83732D}"/>
-    <pc:docChg chg="addSld modSld">
-      <pc:chgData name="Július Baráth" userId="e650c4ab-697e-4750-bd58-c1531aabce95" providerId="ADAL" clId="{28E3D678-CD3B-6444-B753-DC137A83732D}" dt="2020-11-23T12:33:26.886" v="0"/>
-      <pc:docMkLst>
-        <pc:docMk/>
-      </pc:docMkLst>
-      <pc:sldChg chg="add">
-        <pc:chgData name="Július Baráth" userId="e650c4ab-697e-4750-bd58-c1531aabce95" providerId="ADAL" clId="{28E3D678-CD3B-6444-B753-DC137A83732D}" dt="2020-11-23T12:33:26.886" v="0"/>
-        <pc:sldMkLst>
-          <pc:docMk/>
-          <pc:sldMk cId="1129010308" sldId="1167"/>
-        </pc:sldMkLst>
-      </pc:sldChg>
-    </pc:docChg>
-  </pc:docChgLst>
-  <pc:docChgLst>
-    <pc:chgData name="Július Baráth" userId="e650c4ab-697e-4750-bd58-c1531aabce95" providerId="ADAL" clId="{53B88A5B-3F4B-534C-94BD-79FBE7728BCC}"/>
+    <pc:chgData name="Baráth, Július" userId="aebde9b9-dccc-4475-a9ac-c05e78323d7a" providerId="ADAL" clId="{4A0811C8-ED2F-505E-B787-C8270CED5046}"/>
     <pc:docChg chg="custSel modSld">
-      <pc:chgData name="Július Baráth" userId="e650c4ab-697e-4750-bd58-c1531aabce95" providerId="ADAL" clId="{53B88A5B-3F4B-534C-94BD-79FBE7728BCC}" dt="2022-10-27T07:17:48.438" v="3" actId="33524"/>
+      <pc:chgData name="Baráth, Július" userId="aebde9b9-dccc-4475-a9ac-c05e78323d7a" providerId="ADAL" clId="{4A0811C8-ED2F-505E-B787-C8270CED5046}" dt="2026-10-20T05:35:53.651" v="103"/>
       <pc:docMkLst>
         <pc:docMk/>
       </pc:docMkLst>
       <pc:sldChg chg="modSp mod">
-        <pc:chgData name="Július Baráth" userId="e650c4ab-697e-4750-bd58-c1531aabce95" providerId="ADAL" clId="{53B88A5B-3F4B-534C-94BD-79FBE7728BCC}" dt="2022-10-27T06:54:56.582" v="1" actId="20577"/>
+        <pc:chgData name="Baráth, Július" userId="aebde9b9-dccc-4475-a9ac-c05e78323d7a" providerId="ADAL" clId="{4A0811C8-ED2F-505E-B787-C8270CED5046}" dt="2026-10-20T05:01:24.408" v="7" actId="115"/>
         <pc:sldMkLst>
           <pc:docMk/>
-          <pc:sldMk cId="901583653" sldId="1127"/>
-        </pc:sldMkLst>
-      </pc:sldChg>
-      <pc:sldChg chg="modSp mod">
-        <pc:chgData name="Július Baráth" userId="e650c4ab-697e-4750-bd58-c1531aabce95" providerId="ADAL" clId="{53B88A5B-3F4B-534C-94BD-79FBE7728BCC}" dt="2022-10-27T07:16:44.364" v="2" actId="33524"/>
-        <pc:sldMkLst>
-          <pc:docMk/>
-          <pc:sldMk cId="652960713" sldId="1152"/>
-        </pc:sldMkLst>
-      </pc:sldChg>
-      <pc:sldChg chg="modSp mod">
-        <pc:chgData name="Július Baráth" userId="e650c4ab-697e-4750-bd58-c1531aabce95" providerId="ADAL" clId="{53B88A5B-3F4B-534C-94BD-79FBE7728BCC}" dt="2022-10-27T07:17:48.438" v="3" actId="33524"/>
-        <pc:sldMkLst>
-          <pc:docMk/>
-          <pc:sldMk cId="3352533696" sldId="1153"/>
-        </pc:sldMkLst>
-      </pc:sldChg>
-    </pc:docChg>
-  </pc:docChgLst>
-  <pc:docChgLst>
-    <pc:chgData name="Baráth, Július" userId="aebde9b9-dccc-4475-a9ac-c05e78323d7a" providerId="ADAL" clId="{4A0811C8-ED2F-505E-B787-C8270CED5046}"/>
-    <pc:docChg chg="modSld">
-      <pc:chgData name="Baráth, Július" userId="aebde9b9-dccc-4475-a9ac-c05e78323d7a" providerId="ADAL" clId="{4A0811C8-ED2F-505E-B787-C8270CED5046}" dt="2025-10-15T07:17:59.139" v="6"/>
-      <pc:docMkLst>
-        <pc:docMk/>
-      </pc:docMkLst>
-      <pc:sldChg chg="modSp mod">
-        <pc:chgData name="Baráth, Július" userId="aebde9b9-dccc-4475-a9ac-c05e78323d7a" providerId="ADAL" clId="{4A0811C8-ED2F-505E-B787-C8270CED5046}" dt="2025-10-15T07:17:59.139" v="6"/>
-        <pc:sldMkLst>
-          <pc:docMk/>
-          <pc:sldMk cId="1989389863" sldId="876"/>
+          <pc:sldMk cId="3291496679" sldId="1121"/>
         </pc:sldMkLst>
         <pc:spChg chg="mod">
-          <ac:chgData name="Baráth, Július" userId="aebde9b9-dccc-4475-a9ac-c05e78323d7a" providerId="ADAL" clId="{4A0811C8-ED2F-505E-B787-C8270CED5046}" dt="2025-10-15T07:17:59.139" v="6"/>
+          <ac:chgData name="Baráth, Július" userId="aebde9b9-dccc-4475-a9ac-c05e78323d7a" providerId="ADAL" clId="{4A0811C8-ED2F-505E-B787-C8270CED5046}" dt="2026-10-20T05:01:24.408" v="7" actId="115"/>
           <ac:spMkLst>
             <pc:docMk/>
-            <pc:sldMk cId="1989389863" sldId="876"/>
-            <ac:spMk id="6" creationId="{00000000-0000-0000-0000-000000000000}"/>
+            <pc:sldMk cId="3291496679" sldId="1121"/>
+            <ac:spMk id="4" creationId="{50693879-5816-3444-9D50-A12F1F37F5DE}"/>
           </ac:spMkLst>
         </pc:spChg>
       </pc:sldChg>
-    </pc:docChg>
-  </pc:docChgLst>
-  <pc:docChgLst>
-    <pc:chgData name="Július Baráth" userId="e650c4ab-697e-4750-bd58-c1531aabce95" providerId="ADAL" clId="{B09D5C1D-89D8-9949-98A9-6F0F7F5E9FC5}"/>
-    <pc:docChg chg="custSel delSld modSld">
-      <pc:chgData name="Július Baráth" userId="e650c4ab-697e-4750-bd58-c1531aabce95" providerId="ADAL" clId="{B09D5C1D-89D8-9949-98A9-6F0F7F5E9FC5}" dt="2021-10-04T14:07:54.073" v="200" actId="1076"/>
-      <pc:docMkLst>
-        <pc:docMk/>
-      </pc:docMkLst>
-      <pc:sldChg chg="addSp modSp mod">
-        <pc:chgData name="Július Baráth" userId="e650c4ab-697e-4750-bd58-c1531aabce95" providerId="ADAL" clId="{B09D5C1D-89D8-9949-98A9-6F0F7F5E9FC5}" dt="2021-10-04T13:44:15.156" v="163" actId="1076"/>
-        <pc:sldMkLst>
-          <pc:docMk/>
-          <pc:sldMk cId="468390410" sldId="976"/>
-        </pc:sldMkLst>
-      </pc:sldChg>
-      <pc:sldChg chg="modSp mod">
-        <pc:chgData name="Július Baráth" userId="e650c4ab-697e-4750-bd58-c1531aabce95" providerId="ADAL" clId="{B09D5C1D-89D8-9949-98A9-6F0F7F5E9FC5}" dt="2021-10-04T06:46:00.313" v="13" actId="27636"/>
-        <pc:sldMkLst>
-          <pc:docMk/>
-          <pc:sldMk cId="2391972634" sldId="978"/>
-        </pc:sldMkLst>
-      </pc:sldChg>
-      <pc:sldChg chg="modSp mod">
-        <pc:chgData name="Július Baráth" userId="e650c4ab-697e-4750-bd58-c1531aabce95" providerId="ADAL" clId="{B09D5C1D-89D8-9949-98A9-6F0F7F5E9FC5}" dt="2021-10-04T13:28:01.304" v="145" actId="14100"/>
-        <pc:sldMkLst>
-          <pc:docMk/>
-          <pc:sldMk cId="2188684822" sldId="1124"/>
-        </pc:sldMkLst>
-      </pc:sldChg>
-      <pc:sldChg chg="modSp mod">
-        <pc:chgData name="Július Baráth" userId="e650c4ab-697e-4750-bd58-c1531aabce95" providerId="ADAL" clId="{B09D5C1D-89D8-9949-98A9-6F0F7F5E9FC5}" dt="2021-10-04T06:18:19.677" v="1" actId="20577"/>
-        <pc:sldMkLst>
-          <pc:docMk/>
-          <pc:sldMk cId="901583653" sldId="1127"/>
-        </pc:sldMkLst>
-      </pc:sldChg>
-      <pc:sldChg chg="modSp mod">
-        <pc:chgData name="Július Baráth" userId="e650c4ab-697e-4750-bd58-c1531aabce95" providerId="ADAL" clId="{B09D5C1D-89D8-9949-98A9-6F0F7F5E9FC5}" dt="2021-10-04T06:18:36.044" v="3" actId="20577"/>
+      <pc:sldChg chg="addSp delSp modSp mod">
+        <pc:chgData name="Baráth, Július" userId="aebde9b9-dccc-4475-a9ac-c05e78323d7a" providerId="ADAL" clId="{4A0811C8-ED2F-505E-B787-C8270CED5046}" dt="2026-10-20T05:11:34.365" v="82" actId="113"/>
         <pc:sldMkLst>
           <pc:docMk/>
           <pc:sldMk cId="3527491998" sldId="1128"/>
         </pc:sldMkLst>
+        <pc:spChg chg="add del mod">
+          <ac:chgData name="Baráth, Július" userId="aebde9b9-dccc-4475-a9ac-c05e78323d7a" providerId="ADAL" clId="{4A0811C8-ED2F-505E-B787-C8270CED5046}" dt="2026-10-20T05:10:12.975" v="25"/>
+          <ac:spMkLst>
+            <pc:docMk/>
+            <pc:sldMk cId="3527491998" sldId="1128"/>
+            <ac:spMk id="2" creationId="{00877879-2A59-195A-DEB4-14947EE277D6}"/>
+          </ac:spMkLst>
+        </pc:spChg>
+        <pc:graphicFrameChg chg="add mod modGraphic">
+          <ac:chgData name="Baráth, Július" userId="aebde9b9-dccc-4475-a9ac-c05e78323d7a" providerId="ADAL" clId="{4A0811C8-ED2F-505E-B787-C8270CED5046}" dt="2026-10-20T05:11:34.365" v="82" actId="113"/>
+          <ac:graphicFrameMkLst>
+            <pc:docMk/>
+            <pc:sldMk cId="3527491998" sldId="1128"/>
+            <ac:graphicFrameMk id="5" creationId="{377E5E56-F50E-7078-5180-C34BB8A89EBC}"/>
+          </ac:graphicFrameMkLst>
+        </pc:graphicFrameChg>
+        <pc:graphicFrameChg chg="mod">
+          <ac:chgData name="Baráth, Július" userId="aebde9b9-dccc-4475-a9ac-c05e78323d7a" providerId="ADAL" clId="{4A0811C8-ED2F-505E-B787-C8270CED5046}" dt="2026-10-20T05:09:20.333" v="8" actId="1076"/>
+          <ac:graphicFrameMkLst>
+            <pc:docMk/>
+            <pc:sldMk cId="3527491998" sldId="1128"/>
+            <ac:graphicFrameMk id="6" creationId="{6271B857-75B2-401C-A2CE-5F060B5F156B}"/>
+          </ac:graphicFrameMkLst>
+        </pc:graphicFrameChg>
       </pc:sldChg>
-      <pc:sldChg chg="addSp modSp mod">
-        <pc:chgData name="Július Baráth" userId="e650c4ab-697e-4750-bd58-c1531aabce95" providerId="ADAL" clId="{B09D5C1D-89D8-9949-98A9-6F0F7F5E9FC5}" dt="2021-10-04T13:40:42.180" v="153" actId="20577"/>
-        <pc:sldMkLst>
-          <pc:docMk/>
-          <pc:sldMk cId="3484242113" sldId="1135"/>
-        </pc:sldMkLst>
-      </pc:sldChg>
-      <pc:sldChg chg="modSp mod">
-        <pc:chgData name="Július Baráth" userId="e650c4ab-697e-4750-bd58-c1531aabce95" providerId="ADAL" clId="{B09D5C1D-89D8-9949-98A9-6F0F7F5E9FC5}" dt="2021-10-04T06:30:28.202" v="6" actId="113"/>
-        <pc:sldMkLst>
-          <pc:docMk/>
-          <pc:sldMk cId="433083118" sldId="1136"/>
-        </pc:sldMkLst>
-      </pc:sldChg>
-      <pc:sldChg chg="modSp mod">
-        <pc:chgData name="Július Baráth" userId="e650c4ab-697e-4750-bd58-c1531aabce95" providerId="ADAL" clId="{B09D5C1D-89D8-9949-98A9-6F0F7F5E9FC5}" dt="2021-10-04T06:47:01.136" v="16" actId="113"/>
-        <pc:sldMkLst>
-          <pc:docMk/>
-          <pc:sldMk cId="2085486042" sldId="1141"/>
-        </pc:sldMkLst>
-      </pc:sldChg>
-      <pc:sldChg chg="modSp mod">
-        <pc:chgData name="Július Baráth" userId="e650c4ab-697e-4750-bd58-c1531aabce95" providerId="ADAL" clId="{B09D5C1D-89D8-9949-98A9-6F0F7F5E9FC5}" dt="2021-10-04T13:47:01.048" v="164" actId="115"/>
-        <pc:sldMkLst>
-          <pc:docMk/>
-          <pc:sldMk cId="4025687586" sldId="1144"/>
-        </pc:sldMkLst>
-      </pc:sldChg>
-      <pc:sldChg chg="modSp mod">
-        <pc:chgData name="Július Baráth" userId="e650c4ab-697e-4750-bd58-c1531aabce95" providerId="ADAL" clId="{B09D5C1D-89D8-9949-98A9-6F0F7F5E9FC5}" dt="2021-10-04T06:50:44.348" v="19" actId="113"/>
-        <pc:sldMkLst>
-          <pc:docMk/>
-          <pc:sldMk cId="2598511836" sldId="1145"/>
-        </pc:sldMkLst>
-      </pc:sldChg>
-      <pc:sldChg chg="modSp mod">
-        <pc:chgData name="Július Baráth" userId="e650c4ab-697e-4750-bd58-c1531aabce95" providerId="ADAL" clId="{B09D5C1D-89D8-9949-98A9-6F0F7F5E9FC5}" dt="2021-10-04T06:54:29.765" v="23" actId="113"/>
-        <pc:sldMkLst>
-          <pc:docMk/>
-          <pc:sldMk cId="2241698843" sldId="1150"/>
-        </pc:sldMkLst>
-      </pc:sldChg>
-      <pc:sldChg chg="modSp mod">
-        <pc:chgData name="Július Baráth" userId="e650c4ab-697e-4750-bd58-c1531aabce95" providerId="ADAL" clId="{B09D5C1D-89D8-9949-98A9-6F0F7F5E9FC5}" dt="2021-10-04T06:57:53.986" v="25" actId="113"/>
-        <pc:sldMkLst>
-          <pc:docMk/>
-          <pc:sldMk cId="3352533696" sldId="1153"/>
-        </pc:sldMkLst>
-      </pc:sldChg>
-      <pc:sldChg chg="addSp modSp mod">
-        <pc:chgData name="Július Baráth" userId="e650c4ab-697e-4750-bd58-c1531aabce95" providerId="ADAL" clId="{B09D5C1D-89D8-9949-98A9-6F0F7F5E9FC5}" dt="2021-10-04T13:57:30.643" v="197" actId="20577"/>
-        <pc:sldMkLst>
-          <pc:docMk/>
-          <pc:sldMk cId="2994021777" sldId="1154"/>
-        </pc:sldMkLst>
-      </pc:sldChg>
-      <pc:sldChg chg="addSp modSp mod">
-        <pc:chgData name="Július Baráth" userId="e650c4ab-697e-4750-bd58-c1531aabce95" providerId="ADAL" clId="{B09D5C1D-89D8-9949-98A9-6F0F7F5E9FC5}" dt="2021-10-04T13:56:52.977" v="182" actId="20577"/>
+      <pc:sldChg chg="addSp delSp modSp mod">
+        <pc:chgData name="Baráth, Július" userId="aebde9b9-dccc-4475-a9ac-c05e78323d7a" providerId="ADAL" clId="{4A0811C8-ED2F-505E-B787-C8270CED5046}" dt="2026-10-20T05:35:53.651" v="103"/>
         <pc:sldMkLst>
           <pc:docMk/>
           <pc:sldMk cId="1566858976" sldId="1155"/>
         </pc:sldMkLst>
-      </pc:sldChg>
-      <pc:sldChg chg="modSp mod">
-        <pc:chgData name="Július Baráth" userId="e650c4ab-697e-4750-bd58-c1531aabce95" providerId="ADAL" clId="{B09D5C1D-89D8-9949-98A9-6F0F7F5E9FC5}" dt="2021-10-04T14:04:21.249" v="199" actId="113"/>
-        <pc:sldMkLst>
-          <pc:docMk/>
-          <pc:sldMk cId="222951955" sldId="1158"/>
-        </pc:sldMkLst>
-      </pc:sldChg>
-      <pc:sldChg chg="modSp mod">
-        <pc:chgData name="Július Baráth" userId="e650c4ab-697e-4750-bd58-c1531aabce95" providerId="ADAL" clId="{B09D5C1D-89D8-9949-98A9-6F0F7F5E9FC5}" dt="2021-10-04T07:05:47.546" v="26" actId="113"/>
-        <pc:sldMkLst>
-          <pc:docMk/>
-          <pc:sldMk cId="1086627490" sldId="1159"/>
-        </pc:sldMkLst>
-      </pc:sldChg>
-      <pc:sldChg chg="modSp mod">
-        <pc:chgData name="Július Baráth" userId="e650c4ab-697e-4750-bd58-c1531aabce95" providerId="ADAL" clId="{B09D5C1D-89D8-9949-98A9-6F0F7F5E9FC5}" dt="2021-10-04T14:07:54.073" v="200" actId="1076"/>
-        <pc:sldMkLst>
-          <pc:docMk/>
-          <pc:sldMk cId="1527679653" sldId="1160"/>
-        </pc:sldMkLst>
-      </pc:sldChg>
-      <pc:sldChg chg="modSp mod">
-        <pc:chgData name="Július Baráth" userId="e650c4ab-697e-4750-bd58-c1531aabce95" providerId="ADAL" clId="{B09D5C1D-89D8-9949-98A9-6F0F7F5E9FC5}" dt="2021-10-04T07:14:32.694" v="38" actId="113"/>
-        <pc:sldMkLst>
-          <pc:docMk/>
-          <pc:sldMk cId="2811445479" sldId="1164"/>
-        </pc:sldMkLst>
-      </pc:sldChg>
-      <pc:sldChg chg="modSp mod">
-        <pc:chgData name="Július Baráth" userId="e650c4ab-697e-4750-bd58-c1531aabce95" providerId="ADAL" clId="{B09D5C1D-89D8-9949-98A9-6F0F7F5E9FC5}" dt="2021-10-04T07:14:52.683" v="47" actId="113"/>
-        <pc:sldMkLst>
-          <pc:docMk/>
-          <pc:sldMk cId="2773976484" sldId="1165"/>
-        </pc:sldMkLst>
-      </pc:sldChg>
-      <pc:sldChg chg="del">
-        <pc:chgData name="Július Baráth" userId="e650c4ab-697e-4750-bd58-c1531aabce95" providerId="ADAL" clId="{B09D5C1D-89D8-9949-98A9-6F0F7F5E9FC5}" dt="2021-10-04T06:45:08.120" v="7" actId="2696"/>
-        <pc:sldMkLst>
-          <pc:docMk/>
-          <pc:sldMk cId="1129010308" sldId="1167"/>
-        </pc:sldMkLst>
-      </pc:sldChg>
-    </pc:docChg>
-  </pc:docChgLst>
-  <pc:docChgLst>
-    <pc:chgData name="Július Baráth" userId="e650c4ab-697e-4750-bd58-c1531aabce95" providerId="ADAL" clId="{24387BCB-2D28-F946-BFEB-DEB6FABDF981}"/>
-    <pc:docChg chg="undo custSel addSld delSld modSld">
-      <pc:chgData name="Július Baráth" userId="e650c4ab-697e-4750-bd58-c1531aabce95" providerId="ADAL" clId="{24387BCB-2D28-F946-BFEB-DEB6FABDF981}" dt="2020-10-08T09:06:40.446" v="137" actId="115"/>
-      <pc:docMkLst>
-        <pc:docMk/>
-      </pc:docMkLst>
-      <pc:sldChg chg="del">
-        <pc:chgData name="Július Baráth" userId="e650c4ab-697e-4750-bd58-c1531aabce95" providerId="ADAL" clId="{24387BCB-2D28-F946-BFEB-DEB6FABDF981}" dt="2020-09-16T09:38:46.645" v="0" actId="2696"/>
-        <pc:sldMkLst>
-          <pc:docMk/>
-          <pc:sldMk cId="343650477" sldId="513"/>
-        </pc:sldMkLst>
-      </pc:sldChg>
-      <pc:sldChg chg="del">
-        <pc:chgData name="Július Baráth" userId="e650c4ab-697e-4750-bd58-c1531aabce95" providerId="ADAL" clId="{24387BCB-2D28-F946-BFEB-DEB6FABDF981}" dt="2020-09-16T09:38:46.655" v="1" actId="2696"/>
-        <pc:sldMkLst>
-          <pc:docMk/>
-          <pc:sldMk cId="3599581950" sldId="730"/>
-        </pc:sldMkLst>
-      </pc:sldChg>
-      <pc:sldChg chg="del">
-        <pc:chgData name="Július Baráth" userId="e650c4ab-697e-4750-bd58-c1531aabce95" providerId="ADAL" clId="{24387BCB-2D28-F946-BFEB-DEB6FABDF981}" dt="2020-09-16T09:38:46.727" v="8" actId="2696"/>
-        <pc:sldMkLst>
-          <pc:docMk/>
-          <pc:sldMk cId="2145273728" sldId="763"/>
-        </pc:sldMkLst>
-      </pc:sldChg>
-      <pc:sldChg chg="del">
-        <pc:chgData name="Július Baráth" userId="e650c4ab-697e-4750-bd58-c1531aabce95" providerId="ADAL" clId="{24387BCB-2D28-F946-BFEB-DEB6FABDF981}" dt="2020-09-16T09:39:40.990" v="15" actId="2696"/>
-        <pc:sldMkLst>
-          <pc:docMk/>
-          <pc:sldMk cId="3271745509" sldId="874"/>
-        </pc:sldMkLst>
-      </pc:sldChg>
-      <pc:sldChg chg="del">
-        <pc:chgData name="Július Baráth" userId="e650c4ab-697e-4750-bd58-c1531aabce95" providerId="ADAL" clId="{24387BCB-2D28-F946-BFEB-DEB6FABDF981}" dt="2020-09-16T09:39:40.972" v="13" actId="2696"/>
-        <pc:sldMkLst>
-          <pc:docMk/>
-          <pc:sldMk cId="410599242" sldId="957"/>
-        </pc:sldMkLst>
-      </pc:sldChg>
-      <pc:sldChg chg="add">
-        <pc:chgData name="Július Baráth" userId="e650c4ab-697e-4750-bd58-c1531aabce95" providerId="ADAL" clId="{24387BCB-2D28-F946-BFEB-DEB6FABDF981}" dt="2020-09-16T11:06:16.215" v="43"/>
-        <pc:sldMkLst>
-          <pc:docMk/>
-          <pc:sldMk cId="468390410" sldId="976"/>
-        </pc:sldMkLst>
-      </pc:sldChg>
-      <pc:sldChg chg="add">
-        <pc:chgData name="Július Baráth" userId="e650c4ab-697e-4750-bd58-c1531aabce95" providerId="ADAL" clId="{24387BCB-2D28-F946-BFEB-DEB6FABDF981}" dt="2020-09-16T11:09:35.375" v="45"/>
-        <pc:sldMkLst>
-          <pc:docMk/>
-          <pc:sldMk cId="3787637319" sldId="977"/>
-        </pc:sldMkLst>
-      </pc:sldChg>
-      <pc:sldChg chg="add">
-        <pc:chgData name="Július Baráth" userId="e650c4ab-697e-4750-bd58-c1531aabce95" providerId="ADAL" clId="{24387BCB-2D28-F946-BFEB-DEB6FABDF981}" dt="2020-09-16T11:03:58.563" v="37"/>
-        <pc:sldMkLst>
-          <pc:docMk/>
-          <pc:sldMk cId="2391972634" sldId="978"/>
-        </pc:sldMkLst>
-      </pc:sldChg>
-      <pc:sldChg chg="del">
-        <pc:chgData name="Július Baráth" userId="e650c4ab-697e-4750-bd58-c1531aabce95" providerId="ADAL" clId="{24387BCB-2D28-F946-BFEB-DEB6FABDF981}" dt="2020-09-16T09:38:46.706" v="6" actId="2696"/>
-        <pc:sldMkLst>
-          <pc:docMk/>
-          <pc:sldMk cId="2109317603" sldId="1052"/>
-        </pc:sldMkLst>
-      </pc:sldChg>
-      <pc:sldChg chg="del">
-        <pc:chgData name="Július Baráth" userId="e650c4ab-697e-4750-bd58-c1531aabce95" providerId="ADAL" clId="{24387BCB-2D28-F946-BFEB-DEB6FABDF981}" dt="2020-09-16T09:38:50.489" v="9" actId="2696"/>
-        <pc:sldMkLst>
-          <pc:docMk/>
-          <pc:sldMk cId="1671064827" sldId="1054"/>
-        </pc:sldMkLst>
-      </pc:sldChg>
-      <pc:sldChg chg="del">
-        <pc:chgData name="Július Baráth" userId="e650c4ab-697e-4750-bd58-c1531aabce95" providerId="ADAL" clId="{24387BCB-2D28-F946-BFEB-DEB6FABDF981}" dt="2020-09-16T09:38:46.715" v="7" actId="2696"/>
-        <pc:sldMkLst>
-          <pc:docMk/>
-          <pc:sldMk cId="1129576059" sldId="1069"/>
-        </pc:sldMkLst>
-      </pc:sldChg>
-      <pc:sldChg chg="del">
-        <pc:chgData name="Július Baráth" userId="e650c4ab-697e-4750-bd58-c1531aabce95" providerId="ADAL" clId="{24387BCB-2D28-F946-BFEB-DEB6FABDF981}" dt="2020-09-16T09:38:46.696" v="5" actId="2696"/>
-        <pc:sldMkLst>
-          <pc:docMk/>
-          <pc:sldMk cId="1736058053" sldId="1071"/>
-        </pc:sldMkLst>
-      </pc:sldChg>
-      <pc:sldChg chg="del">
-        <pc:chgData name="Július Baráth" userId="e650c4ab-697e-4750-bd58-c1531aabce95" providerId="ADAL" clId="{24387BCB-2D28-F946-BFEB-DEB6FABDF981}" dt="2020-09-16T09:39:40.997" v="16" actId="2696"/>
-        <pc:sldMkLst>
-          <pc:docMk/>
-          <pc:sldMk cId="409109726" sldId="1089"/>
-        </pc:sldMkLst>
-      </pc:sldChg>
-      <pc:sldChg chg="del">
-        <pc:chgData name="Július Baráth" userId="e650c4ab-697e-4750-bd58-c1531aabce95" providerId="ADAL" clId="{24387BCB-2D28-F946-BFEB-DEB6FABDF981}" dt="2020-09-16T09:38:46.673" v="3" actId="2696"/>
-        <pc:sldMkLst>
-          <pc:docMk/>
-          <pc:sldMk cId="3292883496" sldId="1119"/>
-        </pc:sldMkLst>
-      </pc:sldChg>
-      <pc:sldChg chg="modSp mod">
-        <pc:chgData name="Július Baráth" userId="e650c4ab-697e-4750-bd58-c1531aabce95" providerId="ADAL" clId="{24387BCB-2D28-F946-BFEB-DEB6FABDF981}" dt="2020-09-16T09:56:20.364" v="22"/>
-        <pc:sldMkLst>
-          <pc:docMk/>
-          <pc:sldMk cId="1645249626" sldId="1122"/>
-        </pc:sldMkLst>
-      </pc:sldChg>
-      <pc:sldChg chg="add del">
-        <pc:chgData name="Július Baráth" userId="e650c4ab-697e-4750-bd58-c1531aabce95" providerId="ADAL" clId="{24387BCB-2D28-F946-BFEB-DEB6FABDF981}" dt="2020-09-16T09:39:06.971" v="12" actId="2696"/>
-        <pc:sldMkLst>
-          <pc:docMk/>
-          <pc:sldMk cId="3615187467" sldId="1125"/>
-        </pc:sldMkLst>
-      </pc:sldChg>
-      <pc:sldChg chg="del">
-        <pc:chgData name="Július Baráth" userId="e650c4ab-697e-4750-bd58-c1531aabce95" providerId="ADAL" clId="{24387BCB-2D28-F946-BFEB-DEB6FABDF981}" dt="2020-10-08T08:23:33.279" v="98" actId="2696"/>
-        <pc:sldMkLst>
-          <pc:docMk/>
-          <pc:sldMk cId="3406457835" sldId="1132"/>
-        </pc:sldMkLst>
-      </pc:sldChg>
-      <pc:sldChg chg="modSp mod">
-        <pc:chgData name="Július Baráth" userId="e650c4ab-697e-4750-bd58-c1531aabce95" providerId="ADAL" clId="{24387BCB-2D28-F946-BFEB-DEB6FABDF981}" dt="2020-09-16T10:49:55.740" v="23" actId="115"/>
-        <pc:sldMkLst>
-          <pc:docMk/>
-          <pc:sldMk cId="4258890030" sldId="1134"/>
-        </pc:sldMkLst>
-      </pc:sldChg>
-      <pc:sldChg chg="addSp modSp mod">
-        <pc:chgData name="Július Baráth" userId="e650c4ab-697e-4750-bd58-c1531aabce95" providerId="ADAL" clId="{24387BCB-2D28-F946-BFEB-DEB6FABDF981}" dt="2020-09-16T11:10:49.290" v="47" actId="1076"/>
-        <pc:sldMkLst>
-          <pc:docMk/>
-          <pc:sldMk cId="3484242113" sldId="1135"/>
-        </pc:sldMkLst>
-      </pc:sldChg>
-      <pc:sldChg chg="modSp mod">
-        <pc:chgData name="Július Baráth" userId="e650c4ab-697e-4750-bd58-c1531aabce95" providerId="ADAL" clId="{24387BCB-2D28-F946-BFEB-DEB6FABDF981}" dt="2020-09-16T11:02:34.054" v="36" actId="14100"/>
-        <pc:sldMkLst>
-          <pc:docMk/>
-          <pc:sldMk cId="2389373141" sldId="1138"/>
-        </pc:sldMkLst>
-      </pc:sldChg>
-      <pc:sldChg chg="del">
-        <pc:chgData name="Július Baráth" userId="e650c4ab-697e-4750-bd58-c1531aabce95" providerId="ADAL" clId="{24387BCB-2D28-F946-BFEB-DEB6FABDF981}" dt="2020-09-16T11:04:25.196" v="38" actId="2696"/>
-        <pc:sldMkLst>
-          <pc:docMk/>
-          <pc:sldMk cId="3377970714" sldId="1140"/>
-        </pc:sldMkLst>
-      </pc:sldChg>
-      <pc:sldChg chg="modSp mod">
-        <pc:chgData name="Július Baráth" userId="e650c4ab-697e-4750-bd58-c1531aabce95" providerId="ADAL" clId="{24387BCB-2D28-F946-BFEB-DEB6FABDF981}" dt="2020-09-16T11:05:09.157" v="42"/>
-        <pc:sldMkLst>
-          <pc:docMk/>
-          <pc:sldMk cId="2085486042" sldId="1141"/>
-        </pc:sldMkLst>
-      </pc:sldChg>
-      <pc:sldChg chg="modSp mod">
-        <pc:chgData name="Július Baráth" userId="e650c4ab-697e-4750-bd58-c1531aabce95" providerId="ADAL" clId="{24387BCB-2D28-F946-BFEB-DEB6FABDF981}" dt="2020-10-08T08:45:50.894" v="100" actId="115"/>
-        <pc:sldMkLst>
-          <pc:docMk/>
-          <pc:sldMk cId="4025687586" sldId="1144"/>
-        </pc:sldMkLst>
-      </pc:sldChg>
-      <pc:sldChg chg="modSp mod">
-        <pc:chgData name="Július Baráth" userId="e650c4ab-697e-4750-bd58-c1531aabce95" providerId="ADAL" clId="{24387BCB-2D28-F946-BFEB-DEB6FABDF981}" dt="2020-10-08T08:48:58.384" v="102" actId="115"/>
-        <pc:sldMkLst>
-          <pc:docMk/>
-          <pc:sldMk cId="2235905646" sldId="1147"/>
-        </pc:sldMkLst>
-      </pc:sldChg>
-      <pc:sldChg chg="del">
-        <pc:chgData name="Július Baráth" userId="e650c4ab-697e-4750-bd58-c1531aabce95" providerId="ADAL" clId="{24387BCB-2D28-F946-BFEB-DEB6FABDF981}" dt="2020-09-16T11:07:31.314" v="44" actId="2696"/>
-        <pc:sldMkLst>
-          <pc:docMk/>
-          <pc:sldMk cId="2278513672" sldId="1149"/>
-        </pc:sldMkLst>
-      </pc:sldChg>
-      <pc:sldChg chg="modSp mod">
-        <pc:chgData name="Július Baráth" userId="e650c4ab-697e-4750-bd58-c1531aabce95" providerId="ADAL" clId="{24387BCB-2D28-F946-BFEB-DEB6FABDF981}" dt="2020-10-08T08:50:27.982" v="103" actId="113"/>
-        <pc:sldMkLst>
-          <pc:docMk/>
-          <pc:sldMk cId="2241698843" sldId="1150"/>
-        </pc:sldMkLst>
-      </pc:sldChg>
-      <pc:sldChg chg="modNotesTx">
-        <pc:chgData name="Július Baráth" userId="e650c4ab-697e-4750-bd58-c1531aabce95" providerId="ADAL" clId="{24387BCB-2D28-F946-BFEB-DEB6FABDF981}" dt="2020-10-08T08:55:22.198" v="108" actId="20577"/>
-        <pc:sldMkLst>
-          <pc:docMk/>
-          <pc:sldMk cId="3409231566" sldId="1151"/>
-        </pc:sldMkLst>
-      </pc:sldChg>
-      <pc:sldChg chg="addSp modSp mod">
-        <pc:chgData name="Július Baráth" userId="e650c4ab-697e-4750-bd58-c1531aabce95" providerId="ADAL" clId="{24387BCB-2D28-F946-BFEB-DEB6FABDF981}" dt="2020-09-16T12:02:32.249" v="96" actId="14100"/>
-        <pc:sldMkLst>
-          <pc:docMk/>
-          <pc:sldMk cId="3352533696" sldId="1153"/>
-        </pc:sldMkLst>
-      </pc:sldChg>
-      <pc:sldChg chg="addSp delSp modSp mod">
-        <pc:chgData name="Július Baráth" userId="e650c4ab-697e-4750-bd58-c1531aabce95" providerId="ADAL" clId="{24387BCB-2D28-F946-BFEB-DEB6FABDF981}" dt="2020-10-08T09:04:19.899" v="136" actId="1076"/>
-        <pc:sldMkLst>
-          <pc:docMk/>
-          <pc:sldMk cId="1566858976" sldId="1155"/>
-        </pc:sldMkLst>
-      </pc:sldChg>
-      <pc:sldChg chg="modSp mod">
-        <pc:chgData name="Július Baráth" userId="e650c4ab-697e-4750-bd58-c1531aabce95" providerId="ADAL" clId="{24387BCB-2D28-F946-BFEB-DEB6FABDF981}" dt="2020-10-08T09:06:40.446" v="137" actId="115"/>
-        <pc:sldMkLst>
-          <pc:docMk/>
-          <pc:sldMk cId="388443573" sldId="1162"/>
-        </pc:sldMkLst>
-      </pc:sldChg>
-      <pc:sldChg chg="del">
-        <pc:chgData name="Július Baráth" userId="e650c4ab-697e-4750-bd58-c1531aabce95" providerId="ADAL" clId="{24387BCB-2D28-F946-BFEB-DEB6FABDF981}" dt="2020-09-16T09:39:41.005" v="17" actId="2696"/>
-        <pc:sldMkLst>
-          <pc:docMk/>
-          <pc:sldMk cId="483377838" sldId="1167"/>
-        </pc:sldMkLst>
-      </pc:sldChg>
-      <pc:sldChg chg="addSp delSp modSp add del mod">
-        <pc:chgData name="Július Baráth" userId="e650c4ab-697e-4750-bd58-c1531aabce95" providerId="ADAL" clId="{24387BCB-2D28-F946-BFEB-DEB6FABDF981}" dt="2020-09-16T12:24:22.062" v="97" actId="2696"/>
-        <pc:sldMkLst>
-          <pc:docMk/>
-          <pc:sldMk cId="3680437772" sldId="1167"/>
-        </pc:sldMkLst>
-      </pc:sldChg>
-      <pc:sldChg chg="del">
-        <pc:chgData name="Július Baráth" userId="e650c4ab-697e-4750-bd58-c1531aabce95" providerId="ADAL" clId="{24387BCB-2D28-F946-BFEB-DEB6FABDF981}" dt="2020-09-16T09:39:40.981" v="14" actId="2696"/>
-        <pc:sldMkLst>
-          <pc:docMk/>
-          <pc:sldMk cId="682769739" sldId="1168"/>
-        </pc:sldMkLst>
-      </pc:sldChg>
-      <pc:sldChg chg="del">
-        <pc:chgData name="Július Baráth" userId="e650c4ab-697e-4750-bd58-c1531aabce95" providerId="ADAL" clId="{24387BCB-2D28-F946-BFEB-DEB6FABDF981}" dt="2020-09-16T09:39:41.013" v="18" actId="2696"/>
-        <pc:sldMkLst>
-          <pc:docMk/>
-          <pc:sldMk cId="2543171566" sldId="1169"/>
-        </pc:sldMkLst>
-      </pc:sldChg>
-      <pc:sldChg chg="del">
-        <pc:chgData name="Július Baráth" userId="e650c4ab-697e-4750-bd58-c1531aabce95" providerId="ADAL" clId="{24387BCB-2D28-F946-BFEB-DEB6FABDF981}" dt="2020-09-16T09:38:46.663" v="2" actId="2696"/>
-        <pc:sldMkLst>
-          <pc:docMk/>
-          <pc:sldMk cId="122153960" sldId="1272"/>
-        </pc:sldMkLst>
-      </pc:sldChg>
-      <pc:sldChg chg="del">
-        <pc:chgData name="Július Baráth" userId="e650c4ab-697e-4750-bd58-c1531aabce95" providerId="ADAL" clId="{24387BCB-2D28-F946-BFEB-DEB6FABDF981}" dt="2020-09-16T09:38:46.684" v="4" actId="2696"/>
-        <pc:sldMkLst>
-          <pc:docMk/>
-          <pc:sldMk cId="3054383092" sldId="1273"/>
-        </pc:sldMkLst>
-      </pc:sldChg>
-    </pc:docChg>
-  </pc:docChgLst>
-  <pc:docChgLst>
-    <pc:chgData name="Baráth, Július" userId="aebde9b9-dccc-4475-a9ac-c05e78323d7a" providerId="ADAL" clId="{E8D6A86D-3D3B-FC4A-8E4C-270C61346B31}"/>
-    <pc:docChg chg="addSld modSld">
-      <pc:chgData name="Baráth, Július" userId="aebde9b9-dccc-4475-a9ac-c05e78323d7a" providerId="ADAL" clId="{E8D6A86D-3D3B-FC4A-8E4C-270C61346B31}" dt="2024-10-03T10:57:49.444" v="12"/>
-      <pc:docMkLst>
-        <pc:docMk/>
-      </pc:docMkLst>
-      <pc:sldChg chg="addSp delSp modSp new">
-        <pc:chgData name="Baráth, Július" userId="aebde9b9-dccc-4475-a9ac-c05e78323d7a" providerId="ADAL" clId="{E8D6A86D-3D3B-FC4A-8E4C-270C61346B31}" dt="2024-10-03T10:54:33.367" v="4"/>
-        <pc:sldMkLst>
-          <pc:docMk/>
-          <pc:sldMk cId="29343809" sldId="1167"/>
-        </pc:sldMkLst>
-      </pc:sldChg>
-      <pc:sldChg chg="addSp delSp modSp new">
-        <pc:chgData name="Baráth, Július" userId="aebde9b9-dccc-4475-a9ac-c05e78323d7a" providerId="ADAL" clId="{E8D6A86D-3D3B-FC4A-8E4C-270C61346B31}" dt="2024-10-03T10:55:57.885" v="8"/>
-        <pc:sldMkLst>
-          <pc:docMk/>
-          <pc:sldMk cId="657713917" sldId="1168"/>
-        </pc:sldMkLst>
-      </pc:sldChg>
-      <pc:sldChg chg="addSp delSp modSp new">
-        <pc:chgData name="Baráth, Július" userId="aebde9b9-dccc-4475-a9ac-c05e78323d7a" providerId="ADAL" clId="{E8D6A86D-3D3B-FC4A-8E4C-270C61346B31}" dt="2024-10-03T10:57:49.444" v="12"/>
-        <pc:sldMkLst>
-          <pc:docMk/>
-          <pc:sldMk cId="2809903025" sldId="1169"/>
-        </pc:sldMkLst>
+        <pc:spChg chg="add del mod">
+          <ac:chgData name="Baráth, Július" userId="aebde9b9-dccc-4475-a9ac-c05e78323d7a" providerId="ADAL" clId="{4A0811C8-ED2F-505E-B787-C8270CED5046}" dt="2026-10-20T05:35:53.651" v="103"/>
+          <ac:spMkLst>
+            <pc:docMk/>
+            <pc:sldMk cId="1566858976" sldId="1155"/>
+            <ac:spMk id="7" creationId="{ED9567E8-F8CD-6ED9-83BF-DF8BA9E834B5}"/>
+          </ac:spMkLst>
+        </pc:spChg>
+        <pc:graphicFrameChg chg="add mod modGraphic">
+          <ac:chgData name="Baráth, Július" userId="aebde9b9-dccc-4475-a9ac-c05e78323d7a" providerId="ADAL" clId="{4A0811C8-ED2F-505E-B787-C8270CED5046}" dt="2026-10-20T05:35:45.165" v="101" actId="14100"/>
+          <ac:graphicFrameMkLst>
+            <pc:docMk/>
+            <pc:sldMk cId="1566858976" sldId="1155"/>
+            <ac:graphicFrameMk id="8" creationId="{30F9716F-6786-419A-8579-620C72D96BD8}"/>
+          </ac:graphicFrameMkLst>
+        </pc:graphicFrameChg>
       </pc:sldChg>
     </pc:docChg>
   </pc:docChgLst>
@@ -850,7 +410,7 @@
           <a:p>
             <a:fld id="{136337D9-3022-3D41-8D8A-BDF2F3B0DD8E}" type="datetimeFigureOut">
               <a:rPr lang="en-US" smtClean="0"/>
-              <a:t>10/15/25</a:t>
+              <a:t>10/20/26</a:t>
             </a:fld>
             <a:endParaRPr lang="en-US" dirty="0"/>
           </a:p>
@@ -1288,10 +848,7 @@
             </a:r>
           </a:p>
           <a:p>
-            <a:r>
-              <a:rPr lang="en-US" dirty="0"/>
-              <a:t>9.2.2 – Network Traffic Trends</a:t>
-            </a:r>
+            <a:endParaRPr lang="en-US" dirty="0"/>
           </a:p>
         </p:txBody>
       </p:sp>
@@ -1302,7 +859,7 @@
             <a:spLocks noGrp="1"/>
           </p:cNvSpPr>
           <p:nvPr>
-            <p:ph type="sldNum" sz="quarter" idx="5"/>
+            <p:ph type="sldNum" sz="quarter" idx="10"/>
           </p:nvPr>
         </p:nvSpPr>
         <p:spPr/>
@@ -1312,7 +869,7 @@
           <a:p>
             <a:fld id="{5641018C-6CAF-B84E-B92C-ECB119457FBA}" type="slidenum">
               <a:rPr lang="en-US" smtClean="0"/>
-              <a:t>11</a:t>
+              <a:t>10</a:t>
             </a:fld>
             <a:endParaRPr lang="en-US" dirty="0"/>
           </a:p>
@@ -1321,7 +878,7 @@
     </p:spTree>
     <p:extLst>
       <p:ext uri="{BB962C8B-B14F-4D97-AF65-F5344CB8AC3E}">
-        <p14:creationId xmlns:p14="http://schemas.microsoft.com/office/powerpoint/2010/main" val="3580400407"/>
+        <p14:creationId xmlns:p14="http://schemas.microsoft.com/office/powerpoint/2010/main" val="3963291078"/>
       </p:ext>
     </p:extLst>
   </p:cSld>
@@ -1389,7 +946,7 @@
           <a:p>
             <a:r>
               <a:rPr lang="en-US" dirty="0"/>
-              <a:t>9.2.3 – Voice</a:t>
+              <a:t>9.2.2 – Network Traffic Trends</a:t>
             </a:r>
           </a:p>
         </p:txBody>
@@ -1411,7 +968,7 @@
           <a:p>
             <a:fld id="{5641018C-6CAF-B84E-B92C-ECB119457FBA}" type="slidenum">
               <a:rPr lang="en-US" smtClean="0"/>
-              <a:t>12</a:t>
+              <a:t>11</a:t>
             </a:fld>
             <a:endParaRPr lang="en-US" dirty="0"/>
           </a:p>
@@ -1420,7 +977,7 @@
     </p:spTree>
     <p:extLst>
       <p:ext uri="{BB962C8B-B14F-4D97-AF65-F5344CB8AC3E}">
-        <p14:creationId xmlns:p14="http://schemas.microsoft.com/office/powerpoint/2010/main" val="2153935122"/>
+        <p14:creationId xmlns:p14="http://schemas.microsoft.com/office/powerpoint/2010/main" val="3580400407"/>
       </p:ext>
     </p:extLst>
   </p:cSld>
@@ -1488,7 +1045,7 @@
           <a:p>
             <a:r>
               <a:rPr lang="en-US" dirty="0"/>
-              <a:t>9.2.4 – Video</a:t>
+              <a:t>9.2.3 – Voice</a:t>
             </a:r>
           </a:p>
         </p:txBody>
@@ -1510,7 +1067,7 @@
           <a:p>
             <a:fld id="{5641018C-6CAF-B84E-B92C-ECB119457FBA}" type="slidenum">
               <a:rPr lang="en-US" smtClean="0"/>
-              <a:t>13</a:t>
+              <a:t>12</a:t>
             </a:fld>
             <a:endParaRPr lang="en-US" dirty="0"/>
           </a:p>
@@ -1519,7 +1076,7 @@
     </p:spTree>
     <p:extLst>
       <p:ext uri="{BB962C8B-B14F-4D97-AF65-F5344CB8AC3E}">
-        <p14:creationId xmlns:p14="http://schemas.microsoft.com/office/powerpoint/2010/main" val="2233476880"/>
+        <p14:creationId xmlns:p14="http://schemas.microsoft.com/office/powerpoint/2010/main" val="2153935122"/>
       </p:ext>
     </p:extLst>
   </p:cSld>
@@ -1587,7 +1144,7 @@
           <a:p>
             <a:r>
               <a:rPr lang="en-US" dirty="0"/>
-              <a:t>9.2.5 – Data</a:t>
+              <a:t>9.2.4 – Video</a:t>
             </a:r>
           </a:p>
         </p:txBody>
@@ -1609,7 +1166,7 @@
           <a:p>
             <a:fld id="{5641018C-6CAF-B84E-B92C-ECB119457FBA}" type="slidenum">
               <a:rPr lang="en-US" smtClean="0"/>
-              <a:t>14</a:t>
+              <a:t>13</a:t>
             </a:fld>
             <a:endParaRPr lang="en-US" dirty="0"/>
           </a:p>
@@ -1618,7 +1175,7 @@
     </p:spTree>
     <p:extLst>
       <p:ext uri="{BB962C8B-B14F-4D97-AF65-F5344CB8AC3E}">
-        <p14:creationId xmlns:p14="http://schemas.microsoft.com/office/powerpoint/2010/main" val="1648383880"/>
+        <p14:creationId xmlns:p14="http://schemas.microsoft.com/office/powerpoint/2010/main" val="2233476880"/>
       </p:ext>
     </p:extLst>
   </p:cSld>
@@ -1686,13 +1243,7 @@
           <a:p>
             <a:r>
               <a:rPr lang="en-US" dirty="0"/>
-              <a:t>9.2.5 – Data (Cont.)</a:t>
-            </a:r>
-          </a:p>
-          <a:p>
-            <a:r>
-              <a:rPr lang="en-US" dirty="0"/>
-              <a:t>9.2.6 – Check Your Understanding – Traffic Characteristics</a:t>
+              <a:t>9.2.5 – Data</a:t>
             </a:r>
           </a:p>
         </p:txBody>
@@ -1714,7 +1265,7 @@
           <a:p>
             <a:fld id="{5641018C-6CAF-B84E-B92C-ECB119457FBA}" type="slidenum">
               <a:rPr lang="en-US" smtClean="0"/>
-              <a:t>15</a:t>
+              <a:t>14</a:t>
             </a:fld>
             <a:endParaRPr lang="en-US" dirty="0"/>
           </a:p>
@@ -1723,7 +1274,7 @@
     </p:spTree>
     <p:extLst>
       <p:ext uri="{BB962C8B-B14F-4D97-AF65-F5344CB8AC3E}">
-        <p14:creationId xmlns:p14="http://schemas.microsoft.com/office/powerpoint/2010/main" val="2782055884"/>
+        <p14:creationId xmlns:p14="http://schemas.microsoft.com/office/powerpoint/2010/main" val="1648383880"/>
       </p:ext>
     </p:extLst>
   </p:cSld>
@@ -1785,11 +1336,20 @@
           <a:p>
             <a:r>
               <a:rPr lang="en-US" dirty="0"/>
-              <a:t>9.3 – Queuing Algorithms</a:t>
-            </a:r>
-          </a:p>
-          <a:p>
-            <a:endParaRPr lang="en-US" dirty="0"/>
+              <a:t>9.2 – Traffic Characteristics</a:t>
+            </a:r>
+          </a:p>
+          <a:p>
+            <a:r>
+              <a:rPr lang="en-US" dirty="0"/>
+              <a:t>9.2.5 – Data (Cont.)</a:t>
+            </a:r>
+          </a:p>
+          <a:p>
+            <a:r>
+              <a:rPr lang="en-US" dirty="0"/>
+              <a:t>9.2.6 – Check Your Understanding – Traffic Characteristics</a:t>
+            </a:r>
           </a:p>
         </p:txBody>
       </p:sp>
@@ -1800,7 +1360,7 @@
             <a:spLocks noGrp="1"/>
           </p:cNvSpPr>
           <p:nvPr>
-            <p:ph type="sldNum" sz="quarter" idx="10"/>
+            <p:ph type="sldNum" sz="quarter" idx="5"/>
           </p:nvPr>
         </p:nvSpPr>
         <p:spPr/>
@@ -1810,7 +1370,7 @@
           <a:p>
             <a:fld id="{5641018C-6CAF-B84E-B92C-ECB119457FBA}" type="slidenum">
               <a:rPr lang="en-US" smtClean="0"/>
-              <a:t>16</a:t>
+              <a:t>15</a:t>
             </a:fld>
             <a:endParaRPr lang="en-US" dirty="0"/>
           </a:p>
@@ -1819,7 +1379,7 @@
     </p:spTree>
     <p:extLst>
       <p:ext uri="{BB962C8B-B14F-4D97-AF65-F5344CB8AC3E}">
-        <p14:creationId xmlns:p14="http://schemas.microsoft.com/office/powerpoint/2010/main" val="3160292220"/>
+        <p14:creationId xmlns:p14="http://schemas.microsoft.com/office/powerpoint/2010/main" val="2782055884"/>
       </p:ext>
     </p:extLst>
   </p:cSld>
@@ -1885,10 +1445,7 @@
             </a:r>
           </a:p>
           <a:p>
-            <a:r>
-              <a:rPr lang="en-US" dirty="0"/>
-              <a:t>9.3.2 – Queuing Overview</a:t>
-            </a:r>
+            <a:endParaRPr lang="en-US" dirty="0"/>
           </a:p>
         </p:txBody>
       </p:sp>
@@ -1899,7 +1456,7 @@
             <a:spLocks noGrp="1"/>
           </p:cNvSpPr>
           <p:nvPr>
-            <p:ph type="sldNum" sz="quarter" idx="5"/>
+            <p:ph type="sldNum" sz="quarter" idx="10"/>
           </p:nvPr>
         </p:nvSpPr>
         <p:spPr/>
@@ -1909,7 +1466,7 @@
           <a:p>
             <a:fld id="{5641018C-6CAF-B84E-B92C-ECB119457FBA}" type="slidenum">
               <a:rPr lang="en-US" smtClean="0"/>
-              <a:t>17</a:t>
+              <a:t>16</a:t>
             </a:fld>
             <a:endParaRPr lang="en-US" dirty="0"/>
           </a:p>
@@ -1918,7 +1475,7 @@
     </p:spTree>
     <p:extLst>
       <p:ext uri="{BB962C8B-B14F-4D97-AF65-F5344CB8AC3E}">
-        <p14:creationId xmlns:p14="http://schemas.microsoft.com/office/powerpoint/2010/main" val="3390435788"/>
+        <p14:creationId xmlns:p14="http://schemas.microsoft.com/office/powerpoint/2010/main" val="3160292220"/>
       </p:ext>
     </p:extLst>
   </p:cSld>
@@ -1986,7 +1543,7 @@
           <a:p>
             <a:r>
               <a:rPr lang="en-US" dirty="0"/>
-              <a:t>9.3.3 – First in First Out</a:t>
+              <a:t>9.3.2 – Queuing Overview</a:t>
             </a:r>
           </a:p>
         </p:txBody>
@@ -2008,7 +1565,7 @@
           <a:p>
             <a:fld id="{5641018C-6CAF-B84E-B92C-ECB119457FBA}" type="slidenum">
               <a:rPr lang="en-US" smtClean="0"/>
-              <a:t>18</a:t>
+              <a:t>17</a:t>
             </a:fld>
             <a:endParaRPr lang="en-US" dirty="0"/>
           </a:p>
@@ -2017,7 +1574,7 @@
     </p:spTree>
     <p:extLst>
       <p:ext uri="{BB962C8B-B14F-4D97-AF65-F5344CB8AC3E}">
-        <p14:creationId xmlns:p14="http://schemas.microsoft.com/office/powerpoint/2010/main" val="1186243192"/>
+        <p14:creationId xmlns:p14="http://schemas.microsoft.com/office/powerpoint/2010/main" val="3390435788"/>
       </p:ext>
     </p:extLst>
   </p:cSld>
@@ -2085,7 +1642,7 @@
           <a:p>
             <a:r>
               <a:rPr lang="en-US" dirty="0"/>
-              <a:t>9.3.4 – Weighted Fair Queuing (WFQ)</a:t>
+              <a:t>9.3.3 – First in First Out</a:t>
             </a:r>
           </a:p>
         </p:txBody>
@@ -2107,7 +1664,7 @@
           <a:p>
             <a:fld id="{5641018C-6CAF-B84E-B92C-ECB119457FBA}" type="slidenum">
               <a:rPr lang="en-US" smtClean="0"/>
-              <a:t>19</a:t>
+              <a:t>18</a:t>
             </a:fld>
             <a:endParaRPr lang="en-US" dirty="0"/>
           </a:p>
@@ -2116,7 +1673,7 @@
     </p:spTree>
     <p:extLst>
       <p:ext uri="{BB962C8B-B14F-4D97-AF65-F5344CB8AC3E}">
-        <p14:creationId xmlns:p14="http://schemas.microsoft.com/office/powerpoint/2010/main" val="2430727491"/>
+        <p14:creationId xmlns:p14="http://schemas.microsoft.com/office/powerpoint/2010/main" val="1186243192"/>
       </p:ext>
     </p:extLst>
   </p:cSld>
@@ -2184,7 +1741,7 @@
           <a:p>
             <a:r>
               <a:rPr lang="en-US" dirty="0"/>
-              <a:t>9.3.5 – Class-Based Weighted Fair Queuing (CBWFQ)</a:t>
+              <a:t>9.3.4 – Weighted Fair Queuing (WFQ)</a:t>
             </a:r>
           </a:p>
         </p:txBody>
@@ -2206,7 +1763,7 @@
           <a:p>
             <a:fld id="{5641018C-6CAF-B84E-B92C-ECB119457FBA}" type="slidenum">
               <a:rPr lang="en-US" smtClean="0"/>
-              <a:t>20</a:t>
+              <a:t>19</a:t>
             </a:fld>
             <a:endParaRPr lang="en-US" dirty="0"/>
           </a:p>
@@ -2215,7 +1772,7 @@
     </p:spTree>
     <p:extLst>
       <p:ext uri="{BB962C8B-B14F-4D97-AF65-F5344CB8AC3E}">
-        <p14:creationId xmlns:p14="http://schemas.microsoft.com/office/powerpoint/2010/main" val="2183907954"/>
+        <p14:creationId xmlns:p14="http://schemas.microsoft.com/office/powerpoint/2010/main" val="2430727491"/>
       </p:ext>
     </p:extLst>
   </p:cSld>
@@ -2553,7 +2110,7 @@
           <a:p>
             <a:r>
               <a:rPr lang="en-US" dirty="0"/>
-              <a:t>9.3.5 – Class-Based Weighted Fair Queuing (CBWFQ) (Cont.)</a:t>
+              <a:t>9.3.5 – Class-Based Weighted Fair Queuing (CBWFQ)</a:t>
             </a:r>
           </a:p>
         </p:txBody>
@@ -2575,6 +2132,105 @@
           <a:p>
             <a:fld id="{5641018C-6CAF-B84E-B92C-ECB119457FBA}" type="slidenum">
               <a:rPr lang="en-US" smtClean="0"/>
+              <a:t>20</a:t>
+            </a:fld>
+            <a:endParaRPr lang="en-US" dirty="0"/>
+          </a:p>
+        </p:txBody>
+      </p:sp>
+    </p:spTree>
+    <p:extLst>
+      <p:ext uri="{BB962C8B-B14F-4D97-AF65-F5344CB8AC3E}">
+        <p14:creationId xmlns:p14="http://schemas.microsoft.com/office/powerpoint/2010/main" val="2183907954"/>
+      </p:ext>
+    </p:extLst>
+  </p:cSld>
+  <p:clrMapOvr>
+    <a:masterClrMapping/>
+  </p:clrMapOvr>
+</p:notes>
+</file>
+
+<file path=ppt/notesSlides/notesSlide21.xml><?xml version="1.0" encoding="utf-8"?>
+<p:notes xmlns:a="http://schemas.openxmlformats.org/drawingml/2006/main" xmlns:r="http://schemas.openxmlformats.org/officeDocument/2006/relationships" xmlns:p="http://schemas.openxmlformats.org/presentationml/2006/main">
+  <p:cSld>
+    <p:spTree>
+      <p:nvGrpSpPr>
+        <p:cNvPr id="1" name=""/>
+        <p:cNvGrpSpPr/>
+        <p:nvPr/>
+      </p:nvGrpSpPr>
+      <p:grpSpPr>
+        <a:xfrm>
+          <a:off x="0" y="0"/>
+          <a:ext cx="0" cy="0"/>
+          <a:chOff x="0" y="0"/>
+          <a:chExt cx="0" cy="0"/>
+        </a:xfrm>
+      </p:grpSpPr>
+      <p:sp>
+        <p:nvSpPr>
+          <p:cNvPr id="2" name="Slide Image Placeholder 1"/>
+          <p:cNvSpPr>
+            <a:spLocks noGrp="1" noRot="1" noChangeAspect="1"/>
+          </p:cNvSpPr>
+          <p:nvPr>
+            <p:ph type="sldImg"/>
+          </p:nvPr>
+        </p:nvSpPr>
+        <p:spPr/>
+      </p:sp>
+      <p:sp>
+        <p:nvSpPr>
+          <p:cNvPr id="3" name="Notes Placeholder 2"/>
+          <p:cNvSpPr>
+            <a:spLocks noGrp="1"/>
+          </p:cNvSpPr>
+          <p:nvPr>
+            <p:ph type="body" idx="1"/>
+          </p:nvPr>
+        </p:nvSpPr>
+        <p:spPr/>
+        <p:txBody>
+          <a:bodyPr/>
+          <a:lstStyle/>
+          <a:p>
+            <a:r>
+              <a:rPr lang="en-US" dirty="0"/>
+              <a:t>9 - QoS Concepts</a:t>
+            </a:r>
+          </a:p>
+          <a:p>
+            <a:r>
+              <a:rPr lang="en-US" dirty="0"/>
+              <a:t>9.3 – Queuing Algorithms</a:t>
+            </a:r>
+          </a:p>
+          <a:p>
+            <a:r>
+              <a:rPr lang="en-US" dirty="0"/>
+              <a:t>9.3.5 – Class-Based Weighted Fair Queuing (CBWFQ) (Cont.)</a:t>
+            </a:r>
+          </a:p>
+        </p:txBody>
+      </p:sp>
+      <p:sp>
+        <p:nvSpPr>
+          <p:cNvPr id="4" name="Slide Number Placeholder 3"/>
+          <p:cNvSpPr>
+            <a:spLocks noGrp="1"/>
+          </p:cNvSpPr>
+          <p:nvPr>
+            <p:ph type="sldNum" sz="quarter" idx="5"/>
+          </p:nvPr>
+        </p:nvSpPr>
+        <p:spPr/>
+        <p:txBody>
+          <a:bodyPr/>
+          <a:lstStyle/>
+          <a:p>
+            <a:fld id="{5641018C-6CAF-B84E-B92C-ECB119457FBA}" type="slidenum">
+              <a:rPr lang="en-US" smtClean="0"/>
               <a:t>21</a:t>
             </a:fld>
             <a:endParaRPr lang="en-US" dirty="0"/>
@@ -2594,7 +2250,7 @@
 </p:notes>
 </file>
 
-<file path=ppt/notesSlides/notesSlide21.xml><?xml version="1.0" encoding="utf-8"?>
+<file path=ppt/notesSlides/notesSlide22.xml><?xml version="1.0" encoding="utf-8"?>
 <p:notes xmlns:a="http://schemas.openxmlformats.org/drawingml/2006/main" xmlns:r="http://schemas.openxmlformats.org/officeDocument/2006/relationships" xmlns:p="http://schemas.openxmlformats.org/presentationml/2006/main">
   <p:cSld>
     <p:spTree>
@@ -2669,111 +2325,6 @@
     <p:extLst>
       <p:ext uri="{BB962C8B-B14F-4D97-AF65-F5344CB8AC3E}">
         <p14:creationId xmlns:p14="http://schemas.microsoft.com/office/powerpoint/2010/main" val="1100947445"/>
-      </p:ext>
-    </p:extLst>
-  </p:cSld>
-  <p:clrMapOvr>
-    <a:masterClrMapping/>
-  </p:clrMapOvr>
-</p:notes>
-</file>
-
-<file path=ppt/notesSlides/notesSlide22.xml><?xml version="1.0" encoding="utf-8"?>
-<p:notes xmlns:a="http://schemas.openxmlformats.org/drawingml/2006/main" xmlns:r="http://schemas.openxmlformats.org/officeDocument/2006/relationships" xmlns:p="http://schemas.openxmlformats.org/presentationml/2006/main">
-  <p:cSld>
-    <p:spTree>
-      <p:nvGrpSpPr>
-        <p:cNvPr id="1" name=""/>
-        <p:cNvGrpSpPr/>
-        <p:nvPr/>
-      </p:nvGrpSpPr>
-      <p:grpSpPr>
-        <a:xfrm>
-          <a:off x="0" y="0"/>
-          <a:ext cx="0" cy="0"/>
-          <a:chOff x="0" y="0"/>
-          <a:chExt cx="0" cy="0"/>
-        </a:xfrm>
-      </p:grpSpPr>
-      <p:sp>
-        <p:nvSpPr>
-          <p:cNvPr id="2" name="Slide Image Placeholder 1"/>
-          <p:cNvSpPr>
-            <a:spLocks noGrp="1" noRot="1" noChangeAspect="1"/>
-          </p:cNvSpPr>
-          <p:nvPr>
-            <p:ph type="sldImg"/>
-          </p:nvPr>
-        </p:nvSpPr>
-        <p:spPr/>
-      </p:sp>
-      <p:sp>
-        <p:nvSpPr>
-          <p:cNvPr id="3" name="Notes Placeholder 2"/>
-          <p:cNvSpPr>
-            <a:spLocks noGrp="1"/>
-          </p:cNvSpPr>
-          <p:nvPr>
-            <p:ph type="body" idx="1"/>
-          </p:nvPr>
-        </p:nvSpPr>
-        <p:spPr/>
-        <p:txBody>
-          <a:bodyPr/>
-          <a:lstStyle/>
-          <a:p>
-            <a:r>
-              <a:rPr lang="en-US" dirty="0"/>
-              <a:t>9 - QoS Concepts</a:t>
-            </a:r>
-          </a:p>
-          <a:p>
-            <a:r>
-              <a:rPr lang="en-US" dirty="0"/>
-              <a:t>9.3 – Queuing Algorithms</a:t>
-            </a:r>
-          </a:p>
-          <a:p>
-            <a:r>
-              <a:rPr lang="en-US" dirty="0"/>
-              <a:t>9.3.6 – Low Latency Queuing (LLQ)</a:t>
-            </a:r>
-          </a:p>
-          <a:p>
-            <a:r>
-              <a:rPr lang="en-US" dirty="0"/>
-              <a:t>9.3.7 – Check Your Understanding – Queuing Algorithms</a:t>
-            </a:r>
-          </a:p>
-        </p:txBody>
-      </p:sp>
-      <p:sp>
-        <p:nvSpPr>
-          <p:cNvPr id="4" name="Slide Number Placeholder 3"/>
-          <p:cNvSpPr>
-            <a:spLocks noGrp="1"/>
-          </p:cNvSpPr>
-          <p:nvPr>
-            <p:ph type="sldNum" sz="quarter" idx="5"/>
-          </p:nvPr>
-        </p:nvSpPr>
-        <p:spPr/>
-        <p:txBody>
-          <a:bodyPr/>
-          <a:lstStyle/>
-          <a:p>
-            <a:fld id="{5641018C-6CAF-B84E-B92C-ECB119457FBA}" type="slidenum">
-              <a:rPr lang="en-US" smtClean="0"/>
-              <a:t>23</a:t>
-            </a:fld>
-            <a:endParaRPr lang="en-US" dirty="0"/>
-          </a:p>
-        </p:txBody>
-      </p:sp>
-    </p:spTree>
-    <p:extLst>
-      <p:ext uri="{BB962C8B-B14F-4D97-AF65-F5344CB8AC3E}">
-        <p14:creationId xmlns:p14="http://schemas.microsoft.com/office/powerpoint/2010/main" val="3804301436"/>
       </p:ext>
     </p:extLst>
   </p:cSld>
@@ -2835,11 +2386,20 @@
           <a:p>
             <a:r>
               <a:rPr lang="en-US" dirty="0"/>
-              <a:t>9.4 – QoS Models</a:t>
-            </a:r>
-          </a:p>
-          <a:p>
-            <a:endParaRPr lang="en-US" dirty="0"/>
+              <a:t>9.3 – Queuing Algorithms</a:t>
+            </a:r>
+          </a:p>
+          <a:p>
+            <a:r>
+              <a:rPr lang="en-US" dirty="0"/>
+              <a:t>9.3.6 – Low Latency Queuing (LLQ)</a:t>
+            </a:r>
+          </a:p>
+          <a:p>
+            <a:r>
+              <a:rPr lang="en-US" dirty="0"/>
+              <a:t>9.3.7 – Check Your Understanding – Queuing Algorithms</a:t>
+            </a:r>
           </a:p>
         </p:txBody>
       </p:sp>
@@ -2850,7 +2410,7 @@
             <a:spLocks noGrp="1"/>
           </p:cNvSpPr>
           <p:nvPr>
-            <p:ph type="sldNum" sz="quarter" idx="10"/>
+            <p:ph type="sldNum" sz="quarter" idx="5"/>
           </p:nvPr>
         </p:nvSpPr>
         <p:spPr/>
@@ -2860,7 +2420,7 @@
           <a:p>
             <a:fld id="{5641018C-6CAF-B84E-B92C-ECB119457FBA}" type="slidenum">
               <a:rPr lang="en-US" smtClean="0"/>
-              <a:t>26</a:t>
+              <a:t>23</a:t>
             </a:fld>
             <a:endParaRPr lang="en-US" dirty="0"/>
           </a:p>
@@ -2869,7 +2429,7 @@
     </p:spTree>
     <p:extLst>
       <p:ext uri="{BB962C8B-B14F-4D97-AF65-F5344CB8AC3E}">
-        <p14:creationId xmlns:p14="http://schemas.microsoft.com/office/powerpoint/2010/main" val="2973649700"/>
+        <p14:creationId xmlns:p14="http://schemas.microsoft.com/office/powerpoint/2010/main" val="3804301436"/>
       </p:ext>
     </p:extLst>
   </p:cSld>
@@ -2935,10 +2495,7 @@
             </a:r>
           </a:p>
           <a:p>
-            <a:r>
-              <a:rPr lang="en-US" dirty="0"/>
-              <a:t>9.4.2 – Selecting an Appropriate QoS Policy Model</a:t>
-            </a:r>
+            <a:endParaRPr lang="en-US" dirty="0"/>
           </a:p>
         </p:txBody>
       </p:sp>
@@ -2949,7 +2506,7 @@
             <a:spLocks noGrp="1"/>
           </p:cNvSpPr>
           <p:nvPr>
-            <p:ph type="sldNum" sz="quarter" idx="5"/>
+            <p:ph type="sldNum" sz="quarter" idx="10"/>
           </p:nvPr>
         </p:nvSpPr>
         <p:spPr/>
@@ -2959,7 +2516,7 @@
           <a:p>
             <a:fld id="{5641018C-6CAF-B84E-B92C-ECB119457FBA}" type="slidenum">
               <a:rPr lang="en-US" smtClean="0"/>
-              <a:t>27</a:t>
+              <a:t>26</a:t>
             </a:fld>
             <a:endParaRPr lang="en-US" dirty="0"/>
           </a:p>
@@ -2968,7 +2525,7 @@
     </p:spTree>
     <p:extLst>
       <p:ext uri="{BB962C8B-B14F-4D97-AF65-F5344CB8AC3E}">
-        <p14:creationId xmlns:p14="http://schemas.microsoft.com/office/powerpoint/2010/main" val="2883914366"/>
+        <p14:creationId xmlns:p14="http://schemas.microsoft.com/office/powerpoint/2010/main" val="2973649700"/>
       </p:ext>
     </p:extLst>
   </p:cSld>
@@ -3036,7 +2593,7 @@
           <a:p>
             <a:r>
               <a:rPr lang="en-US" dirty="0"/>
-              <a:t>9.4.3 – Best Effort</a:t>
+              <a:t>9.4.2 – Selecting an Appropriate QoS Policy Model</a:t>
             </a:r>
           </a:p>
         </p:txBody>
@@ -3058,7 +2615,7 @@
           <a:p>
             <a:fld id="{5641018C-6CAF-B84E-B92C-ECB119457FBA}" type="slidenum">
               <a:rPr lang="en-US" smtClean="0"/>
-              <a:t>28</a:t>
+              <a:t>27</a:t>
             </a:fld>
             <a:endParaRPr lang="en-US" dirty="0"/>
           </a:p>
@@ -3067,7 +2624,7 @@
     </p:spTree>
     <p:extLst>
       <p:ext uri="{BB962C8B-B14F-4D97-AF65-F5344CB8AC3E}">
-        <p14:creationId xmlns:p14="http://schemas.microsoft.com/office/powerpoint/2010/main" val="2608915306"/>
+        <p14:creationId xmlns:p14="http://schemas.microsoft.com/office/powerpoint/2010/main" val="2883914366"/>
       </p:ext>
     </p:extLst>
   </p:cSld>
@@ -3135,7 +2692,7 @@
           <a:p>
             <a:r>
               <a:rPr lang="en-US" dirty="0"/>
-              <a:t>9.4.4 – Integrated Services</a:t>
+              <a:t>9.4.3 – Best Effort</a:t>
             </a:r>
           </a:p>
         </p:txBody>
@@ -3157,7 +2714,7 @@
           <a:p>
             <a:fld id="{5641018C-6CAF-B84E-B92C-ECB119457FBA}" type="slidenum">
               <a:rPr lang="en-US" smtClean="0"/>
-              <a:t>29</a:t>
+              <a:t>28</a:t>
             </a:fld>
             <a:endParaRPr lang="en-US" dirty="0"/>
           </a:p>
@@ -3166,7 +2723,7 @@
     </p:spTree>
     <p:extLst>
       <p:ext uri="{BB962C8B-B14F-4D97-AF65-F5344CB8AC3E}">
-        <p14:creationId xmlns:p14="http://schemas.microsoft.com/office/powerpoint/2010/main" val="2600689115"/>
+        <p14:creationId xmlns:p14="http://schemas.microsoft.com/office/powerpoint/2010/main" val="2608915306"/>
       </p:ext>
     </p:extLst>
   </p:cSld>
@@ -3234,7 +2791,7 @@
           <a:p>
             <a:r>
               <a:rPr lang="en-US" dirty="0"/>
-              <a:t>9.4.4 – Integrated Services (Cont.)</a:t>
+              <a:t>9.4.4 – Integrated Services</a:t>
             </a:r>
           </a:p>
         </p:txBody>
@@ -3256,7 +2813,7 @@
           <a:p>
             <a:fld id="{5641018C-6CAF-B84E-B92C-ECB119457FBA}" type="slidenum">
               <a:rPr lang="en-US" smtClean="0"/>
-              <a:t>30</a:t>
+              <a:t>29</a:t>
             </a:fld>
             <a:endParaRPr lang="en-US" dirty="0"/>
           </a:p>
@@ -3265,7 +2822,7 @@
     </p:spTree>
     <p:extLst>
       <p:ext uri="{BB962C8B-B14F-4D97-AF65-F5344CB8AC3E}">
-        <p14:creationId xmlns:p14="http://schemas.microsoft.com/office/powerpoint/2010/main" val="2132689143"/>
+        <p14:creationId xmlns:p14="http://schemas.microsoft.com/office/powerpoint/2010/main" val="2600689115"/>
       </p:ext>
     </p:extLst>
   </p:cSld>
@@ -3333,7 +2890,7 @@
           <a:p>
             <a:r>
               <a:rPr lang="en-US" dirty="0"/>
-              <a:t>9.4.5 – Differentiated Services</a:t>
+              <a:t>9.4.4 – Integrated Services (Cont.)</a:t>
             </a:r>
           </a:p>
         </p:txBody>
@@ -3355,7 +2912,7 @@
           <a:p>
             <a:fld id="{5641018C-6CAF-B84E-B92C-ECB119457FBA}" type="slidenum">
               <a:rPr lang="en-US" smtClean="0"/>
-              <a:t>31</a:t>
+              <a:t>30</a:t>
             </a:fld>
             <a:endParaRPr lang="en-US" dirty="0"/>
           </a:p>
@@ -3364,7 +2921,7 @@
     </p:spTree>
     <p:extLst>
       <p:ext uri="{BB962C8B-B14F-4D97-AF65-F5344CB8AC3E}">
-        <p14:creationId xmlns:p14="http://schemas.microsoft.com/office/powerpoint/2010/main" val="3480441992"/>
+        <p14:creationId xmlns:p14="http://schemas.microsoft.com/office/powerpoint/2010/main" val="2132689143"/>
       </p:ext>
     </p:extLst>
   </p:cSld>
@@ -3432,13 +2989,7 @@
           <a:p>
             <a:r>
               <a:rPr lang="en-US" dirty="0"/>
-              <a:t>9.4.5 – Differentiated Services (Cont.)</a:t>
-            </a:r>
-          </a:p>
-          <a:p>
-            <a:r>
-              <a:rPr lang="en-US" dirty="0"/>
-              <a:t>9.4.6 – Check Your Understanding – QoS Models</a:t>
+              <a:t>9.4.5 – Differentiated Services</a:t>
             </a:r>
           </a:p>
         </p:txBody>
@@ -3460,7 +3011,7 @@
           <a:p>
             <a:fld id="{5641018C-6CAF-B84E-B92C-ECB119457FBA}" type="slidenum">
               <a:rPr lang="en-US" smtClean="0"/>
-              <a:t>32</a:t>
+              <a:t>31</a:t>
             </a:fld>
             <a:endParaRPr lang="en-US" dirty="0"/>
           </a:p>
@@ -3469,7 +3020,7 @@
     </p:spTree>
     <p:extLst>
       <p:ext uri="{BB962C8B-B14F-4D97-AF65-F5344CB8AC3E}">
-        <p14:creationId xmlns:p14="http://schemas.microsoft.com/office/powerpoint/2010/main" val="3783660030"/>
+        <p14:creationId xmlns:p14="http://schemas.microsoft.com/office/powerpoint/2010/main" val="3480441992"/>
       </p:ext>
     </p:extLst>
   </p:cSld>
@@ -3624,11 +3175,20 @@
           <a:p>
             <a:r>
               <a:rPr lang="en-US" dirty="0"/>
-              <a:t>9.5 – QoS Implementation Techniques</a:t>
-            </a:r>
-          </a:p>
-          <a:p>
-            <a:endParaRPr lang="en-US" dirty="0"/>
+              <a:t>9.4 – QoS Models</a:t>
+            </a:r>
+          </a:p>
+          <a:p>
+            <a:r>
+              <a:rPr lang="en-US" dirty="0"/>
+              <a:t>9.4.5 – Differentiated Services (Cont.)</a:t>
+            </a:r>
+          </a:p>
+          <a:p>
+            <a:r>
+              <a:rPr lang="en-US" dirty="0"/>
+              <a:t>9.4.6 – Check Your Understanding – QoS Models</a:t>
+            </a:r>
           </a:p>
         </p:txBody>
       </p:sp>
@@ -3639,7 +3199,7 @@
             <a:spLocks noGrp="1"/>
           </p:cNvSpPr>
           <p:nvPr>
-            <p:ph type="sldNum" sz="quarter" idx="10"/>
+            <p:ph type="sldNum" sz="quarter" idx="5"/>
           </p:nvPr>
         </p:nvSpPr>
         <p:spPr/>
@@ -3649,7 +3209,7 @@
           <a:p>
             <a:fld id="{5641018C-6CAF-B84E-B92C-ECB119457FBA}" type="slidenum">
               <a:rPr lang="en-US" smtClean="0"/>
-              <a:t>33</a:t>
+              <a:t>32</a:t>
             </a:fld>
             <a:endParaRPr lang="en-US" dirty="0"/>
           </a:p>
@@ -3658,7 +3218,7 @@
     </p:spTree>
     <p:extLst>
       <p:ext uri="{BB962C8B-B14F-4D97-AF65-F5344CB8AC3E}">
-        <p14:creationId xmlns:p14="http://schemas.microsoft.com/office/powerpoint/2010/main" val="1929906837"/>
+        <p14:creationId xmlns:p14="http://schemas.microsoft.com/office/powerpoint/2010/main" val="3783660030"/>
       </p:ext>
     </p:extLst>
   </p:cSld>
@@ -3724,10 +3284,7 @@
             </a:r>
           </a:p>
           <a:p>
-            <a:r>
-              <a:rPr lang="en-US" dirty="0"/>
-              <a:t>9.5.2 – Avoiding Packet Loss</a:t>
-            </a:r>
+            <a:endParaRPr lang="en-US" dirty="0"/>
           </a:p>
         </p:txBody>
       </p:sp>
@@ -3738,7 +3295,7 @@
             <a:spLocks noGrp="1"/>
           </p:cNvSpPr>
           <p:nvPr>
-            <p:ph type="sldNum" sz="quarter" idx="5"/>
+            <p:ph type="sldNum" sz="quarter" idx="10"/>
           </p:nvPr>
         </p:nvSpPr>
         <p:spPr/>
@@ -3748,7 +3305,7 @@
           <a:p>
             <a:fld id="{5641018C-6CAF-B84E-B92C-ECB119457FBA}" type="slidenum">
               <a:rPr lang="en-US" smtClean="0"/>
-              <a:t>34</a:t>
+              <a:t>33</a:t>
             </a:fld>
             <a:endParaRPr lang="en-US" dirty="0"/>
           </a:p>
@@ -3757,7 +3314,7 @@
     </p:spTree>
     <p:extLst>
       <p:ext uri="{BB962C8B-B14F-4D97-AF65-F5344CB8AC3E}">
-        <p14:creationId xmlns:p14="http://schemas.microsoft.com/office/powerpoint/2010/main" val="3335662565"/>
+        <p14:creationId xmlns:p14="http://schemas.microsoft.com/office/powerpoint/2010/main" val="1929906837"/>
       </p:ext>
     </p:extLst>
   </p:cSld>
@@ -3812,1728 +3369,6 @@
           <a:lstStyle/>
           <a:p>
             <a:r>
-              <a:rPr lang="sk-SK" sz="1200" b="0" i="0" kern="1200" dirty="0">
-                <a:solidFill>
-                  <a:schemeClr val="tx1"/>
-                </a:solidFill>
-                <a:effectLst/>
-                <a:latin typeface="+mn-lt"/>
-                <a:ea typeface="+mn-ea"/>
-                <a:cs typeface="+mn-cs"/>
-              </a:rPr>
-              <a:t>WRED (</a:t>
-            </a:r>
-            <a:r>
-              <a:rPr lang="sk-SK" sz="1200" b="0" i="0" kern="1200" dirty="0" err="1">
-                <a:solidFill>
-                  <a:schemeClr val="tx1"/>
-                </a:solidFill>
-                <a:effectLst/>
-                <a:latin typeface="+mn-lt"/>
-                <a:ea typeface="+mn-ea"/>
-                <a:cs typeface="+mn-cs"/>
-              </a:rPr>
-              <a:t>Weighted</a:t>
-            </a:r>
-            <a:r>
-              <a:rPr lang="sk-SK" sz="1200" b="0" i="0" kern="1200" dirty="0">
-                <a:solidFill>
-                  <a:schemeClr val="tx1"/>
-                </a:solidFill>
-                <a:effectLst/>
-                <a:latin typeface="+mn-lt"/>
-                <a:ea typeface="+mn-ea"/>
-                <a:cs typeface="+mn-cs"/>
-              </a:rPr>
-              <a:t> </a:t>
-            </a:r>
-            <a:r>
-              <a:rPr lang="sk-SK" sz="1200" b="0" i="0" kern="1200" dirty="0" err="1">
-                <a:solidFill>
-                  <a:schemeClr val="tx1"/>
-                </a:solidFill>
-                <a:effectLst/>
-                <a:latin typeface="+mn-lt"/>
-                <a:ea typeface="+mn-ea"/>
-                <a:cs typeface="+mn-cs"/>
-              </a:rPr>
-              <a:t>Random</a:t>
-            </a:r>
-            <a:r>
-              <a:rPr lang="sk-SK" sz="1200" b="0" i="0" kern="1200" dirty="0">
-                <a:solidFill>
-                  <a:schemeClr val="tx1"/>
-                </a:solidFill>
-                <a:effectLst/>
-                <a:latin typeface="+mn-lt"/>
-                <a:ea typeface="+mn-ea"/>
-                <a:cs typeface="+mn-cs"/>
-              </a:rPr>
-              <a:t> </a:t>
-            </a:r>
-            <a:r>
-              <a:rPr lang="sk-SK" sz="1200" b="0" i="0" kern="1200" dirty="0" err="1">
-                <a:solidFill>
-                  <a:schemeClr val="tx1"/>
-                </a:solidFill>
-                <a:effectLst/>
-                <a:latin typeface="+mn-lt"/>
-                <a:ea typeface="+mn-ea"/>
-                <a:cs typeface="+mn-cs"/>
-              </a:rPr>
-              <a:t>Early</a:t>
-            </a:r>
-            <a:r>
-              <a:rPr lang="sk-SK" sz="1200" b="0" i="0" kern="1200" dirty="0">
-                <a:solidFill>
-                  <a:schemeClr val="tx1"/>
-                </a:solidFill>
-                <a:effectLst/>
-                <a:latin typeface="+mn-lt"/>
-                <a:ea typeface="+mn-ea"/>
-                <a:cs typeface="+mn-cs"/>
-              </a:rPr>
-              <a:t> </a:t>
-            </a:r>
-            <a:r>
-              <a:rPr lang="sk-SK" sz="1200" b="0" i="0" kern="1200" dirty="0" err="1">
-                <a:solidFill>
-                  <a:schemeClr val="tx1"/>
-                </a:solidFill>
-                <a:effectLst/>
-                <a:latin typeface="+mn-lt"/>
-                <a:ea typeface="+mn-ea"/>
-                <a:cs typeface="+mn-cs"/>
-              </a:rPr>
-              <a:t>Detection</a:t>
-            </a:r>
-            <a:r>
-              <a:rPr lang="sk-SK" sz="1200" b="0" i="0" kern="1200" dirty="0">
-                <a:solidFill>
-                  <a:schemeClr val="tx1"/>
-                </a:solidFill>
-                <a:effectLst/>
-                <a:latin typeface="+mn-lt"/>
-                <a:ea typeface="+mn-ea"/>
-                <a:cs typeface="+mn-cs"/>
-              </a:rPr>
-              <a:t>) </a:t>
-            </a:r>
-            <a:r>
-              <a:rPr lang="sk-SK" sz="1200" b="0" i="0" kern="1200" dirty="0" err="1">
-                <a:solidFill>
-                  <a:schemeClr val="tx1"/>
-                </a:solidFill>
-                <a:effectLst/>
-                <a:latin typeface="+mn-lt"/>
-                <a:ea typeface="+mn-ea"/>
-                <a:cs typeface="+mn-cs"/>
-              </a:rPr>
-              <a:t>makes</a:t>
-            </a:r>
-            <a:r>
-              <a:rPr lang="sk-SK" sz="1200" b="0" i="0" kern="1200" dirty="0">
-                <a:solidFill>
-                  <a:schemeClr val="tx1"/>
-                </a:solidFill>
-                <a:effectLst/>
-                <a:latin typeface="+mn-lt"/>
-                <a:ea typeface="+mn-ea"/>
-                <a:cs typeface="+mn-cs"/>
-              </a:rPr>
-              <a:t> </a:t>
-            </a:r>
-            <a:r>
-              <a:rPr lang="sk-SK" sz="1200" b="0" i="0" kern="1200" dirty="0" err="1">
-                <a:solidFill>
-                  <a:schemeClr val="tx1"/>
-                </a:solidFill>
-                <a:effectLst/>
-                <a:latin typeface="+mn-lt"/>
-                <a:ea typeface="+mn-ea"/>
-                <a:cs typeface="+mn-cs"/>
-              </a:rPr>
-              <a:t>early</a:t>
-            </a:r>
-            <a:r>
-              <a:rPr lang="sk-SK" sz="1200" b="0" i="0" kern="1200" dirty="0">
-                <a:solidFill>
-                  <a:schemeClr val="tx1"/>
-                </a:solidFill>
-                <a:effectLst/>
-                <a:latin typeface="+mn-lt"/>
-                <a:ea typeface="+mn-ea"/>
-                <a:cs typeface="+mn-cs"/>
-              </a:rPr>
-              <a:t> </a:t>
-            </a:r>
-            <a:r>
-              <a:rPr lang="sk-SK" sz="1200" b="0" i="0" kern="1200" dirty="0" err="1">
-                <a:solidFill>
-                  <a:schemeClr val="tx1"/>
-                </a:solidFill>
-                <a:effectLst/>
-                <a:latin typeface="+mn-lt"/>
-                <a:ea typeface="+mn-ea"/>
-                <a:cs typeface="+mn-cs"/>
-              </a:rPr>
-              <a:t>detection</a:t>
-            </a:r>
-            <a:r>
-              <a:rPr lang="sk-SK" sz="1200" b="0" i="0" kern="1200" dirty="0">
-                <a:solidFill>
-                  <a:schemeClr val="tx1"/>
-                </a:solidFill>
-                <a:effectLst/>
-                <a:latin typeface="+mn-lt"/>
-                <a:ea typeface="+mn-ea"/>
-                <a:cs typeface="+mn-cs"/>
-              </a:rPr>
-              <a:t> of </a:t>
-            </a:r>
-            <a:r>
-              <a:rPr lang="sk-SK" sz="1200" b="0" i="0" kern="1200" dirty="0" err="1">
-                <a:solidFill>
-                  <a:schemeClr val="tx1"/>
-                </a:solidFill>
-                <a:effectLst/>
-                <a:latin typeface="+mn-lt"/>
-                <a:ea typeface="+mn-ea"/>
-                <a:cs typeface="+mn-cs"/>
-              </a:rPr>
-              <a:t>congestion</a:t>
-            </a:r>
-            <a:r>
-              <a:rPr lang="sk-SK" sz="1200" b="0" i="0" kern="1200" dirty="0">
-                <a:solidFill>
-                  <a:schemeClr val="tx1"/>
-                </a:solidFill>
-                <a:effectLst/>
-                <a:latin typeface="+mn-lt"/>
-                <a:ea typeface="+mn-ea"/>
-                <a:cs typeface="+mn-cs"/>
-              </a:rPr>
-              <a:t> </a:t>
-            </a:r>
-            <a:r>
-              <a:rPr lang="sk-SK" sz="1200" b="0" i="0" kern="1200" dirty="0" err="1">
-                <a:solidFill>
-                  <a:schemeClr val="tx1"/>
-                </a:solidFill>
-                <a:effectLst/>
-                <a:latin typeface="+mn-lt"/>
-                <a:ea typeface="+mn-ea"/>
-                <a:cs typeface="+mn-cs"/>
-              </a:rPr>
-              <a:t>possible</a:t>
-            </a:r>
-            <a:r>
-              <a:rPr lang="sk-SK" sz="1200" b="0" i="0" kern="1200" dirty="0">
-                <a:solidFill>
-                  <a:schemeClr val="tx1"/>
-                </a:solidFill>
-                <a:effectLst/>
-                <a:latin typeface="+mn-lt"/>
-                <a:ea typeface="+mn-ea"/>
-                <a:cs typeface="+mn-cs"/>
-              </a:rPr>
-              <a:t> and </a:t>
-            </a:r>
-            <a:r>
-              <a:rPr lang="sk-SK" sz="1200" b="0" i="0" kern="1200" dirty="0" err="1">
-                <a:solidFill>
-                  <a:schemeClr val="tx1"/>
-                </a:solidFill>
-                <a:effectLst/>
-                <a:latin typeface="+mn-lt"/>
-                <a:ea typeface="+mn-ea"/>
-                <a:cs typeface="+mn-cs"/>
-              </a:rPr>
-              <a:t>provides</a:t>
-            </a:r>
-            <a:r>
-              <a:rPr lang="sk-SK" sz="1200" b="0" i="0" kern="1200" dirty="0">
-                <a:solidFill>
-                  <a:schemeClr val="tx1"/>
-                </a:solidFill>
-                <a:effectLst/>
-                <a:latin typeface="+mn-lt"/>
-                <a:ea typeface="+mn-ea"/>
-                <a:cs typeface="+mn-cs"/>
-              </a:rPr>
-              <a:t> a </a:t>
-            </a:r>
-            <a:r>
-              <a:rPr lang="sk-SK" sz="1200" b="0" i="0" kern="1200" dirty="0" err="1">
-                <a:solidFill>
-                  <a:schemeClr val="tx1"/>
-                </a:solidFill>
-                <a:effectLst/>
-                <a:latin typeface="+mn-lt"/>
-                <a:ea typeface="+mn-ea"/>
-                <a:cs typeface="+mn-cs"/>
-              </a:rPr>
-              <a:t>means</a:t>
-            </a:r>
-            <a:r>
-              <a:rPr lang="sk-SK" sz="1200" b="0" i="0" kern="1200" dirty="0">
-                <a:solidFill>
-                  <a:schemeClr val="tx1"/>
-                </a:solidFill>
-                <a:effectLst/>
-                <a:latin typeface="+mn-lt"/>
-                <a:ea typeface="+mn-ea"/>
-                <a:cs typeface="+mn-cs"/>
-              </a:rPr>
-              <a:t> </a:t>
-            </a:r>
-            <a:r>
-              <a:rPr lang="sk-SK" sz="1200" b="0" i="0" kern="1200" dirty="0" err="1">
-                <a:solidFill>
-                  <a:schemeClr val="tx1"/>
-                </a:solidFill>
-                <a:effectLst/>
-                <a:latin typeface="+mn-lt"/>
-                <a:ea typeface="+mn-ea"/>
-                <a:cs typeface="+mn-cs"/>
-              </a:rPr>
-              <a:t>for</a:t>
-            </a:r>
-            <a:r>
-              <a:rPr lang="sk-SK" sz="1200" b="0" i="0" kern="1200" dirty="0">
-                <a:solidFill>
-                  <a:schemeClr val="tx1"/>
-                </a:solidFill>
-                <a:effectLst/>
-                <a:latin typeface="+mn-lt"/>
-                <a:ea typeface="+mn-ea"/>
-                <a:cs typeface="+mn-cs"/>
-              </a:rPr>
-              <a:t> </a:t>
-            </a:r>
-            <a:r>
-              <a:rPr lang="sk-SK" sz="1200" b="0" i="0" kern="1200" dirty="0" err="1">
-                <a:solidFill>
-                  <a:schemeClr val="tx1"/>
-                </a:solidFill>
-                <a:effectLst/>
-                <a:latin typeface="+mn-lt"/>
-                <a:ea typeface="+mn-ea"/>
-                <a:cs typeface="+mn-cs"/>
-              </a:rPr>
-              <a:t>handling</a:t>
-            </a:r>
-            <a:r>
-              <a:rPr lang="sk-SK" sz="1200" b="0" i="0" kern="1200" dirty="0">
-                <a:solidFill>
-                  <a:schemeClr val="tx1"/>
-                </a:solidFill>
-                <a:effectLst/>
-                <a:latin typeface="+mn-lt"/>
-                <a:ea typeface="+mn-ea"/>
-                <a:cs typeface="+mn-cs"/>
-              </a:rPr>
-              <a:t> </a:t>
-            </a:r>
-            <a:r>
-              <a:rPr lang="sk-SK" sz="1200" b="0" i="0" kern="1200" dirty="0" err="1">
-                <a:solidFill>
-                  <a:schemeClr val="tx1"/>
-                </a:solidFill>
-                <a:effectLst/>
-                <a:latin typeface="+mn-lt"/>
-                <a:ea typeface="+mn-ea"/>
-                <a:cs typeface="+mn-cs"/>
-              </a:rPr>
-              <a:t>multiple</a:t>
-            </a:r>
-            <a:r>
-              <a:rPr lang="sk-SK" sz="1200" b="0" i="0" kern="1200" dirty="0">
-                <a:solidFill>
-                  <a:schemeClr val="tx1"/>
-                </a:solidFill>
-                <a:effectLst/>
-                <a:latin typeface="+mn-lt"/>
-                <a:ea typeface="+mn-ea"/>
-                <a:cs typeface="+mn-cs"/>
-              </a:rPr>
-              <a:t> </a:t>
-            </a:r>
-            <a:r>
-              <a:rPr lang="sk-SK" sz="1200" b="0" i="0" kern="1200" dirty="0" err="1">
-                <a:solidFill>
-                  <a:schemeClr val="tx1"/>
-                </a:solidFill>
-                <a:effectLst/>
-                <a:latin typeface="+mn-lt"/>
-                <a:ea typeface="+mn-ea"/>
-                <a:cs typeface="+mn-cs"/>
-              </a:rPr>
-              <a:t>classes</a:t>
-            </a:r>
-            <a:r>
-              <a:rPr lang="sk-SK" sz="1200" b="0" i="0" kern="1200" dirty="0">
-                <a:solidFill>
-                  <a:schemeClr val="tx1"/>
-                </a:solidFill>
-                <a:effectLst/>
-                <a:latin typeface="+mn-lt"/>
-                <a:ea typeface="+mn-ea"/>
-                <a:cs typeface="+mn-cs"/>
-              </a:rPr>
-              <a:t> of </a:t>
-            </a:r>
-            <a:r>
-              <a:rPr lang="sk-SK" sz="1200" b="0" i="0" kern="1200" dirty="0" err="1">
-                <a:solidFill>
-                  <a:schemeClr val="tx1"/>
-                </a:solidFill>
-                <a:effectLst/>
-                <a:latin typeface="+mn-lt"/>
-                <a:ea typeface="+mn-ea"/>
-                <a:cs typeface="+mn-cs"/>
-              </a:rPr>
-              <a:t>traffic</a:t>
-            </a:r>
-            <a:r>
-              <a:rPr lang="sk-SK" sz="1200" b="0" i="0" kern="1200" dirty="0">
-                <a:solidFill>
-                  <a:schemeClr val="tx1"/>
-                </a:solidFill>
-                <a:effectLst/>
-                <a:latin typeface="+mn-lt"/>
-                <a:ea typeface="+mn-ea"/>
-                <a:cs typeface="+mn-cs"/>
-              </a:rPr>
-              <a:t>. WRED </a:t>
-            </a:r>
-            <a:r>
-              <a:rPr lang="sk-SK" sz="1200" b="0" i="0" kern="1200" dirty="0" err="1">
-                <a:solidFill>
-                  <a:schemeClr val="tx1"/>
-                </a:solidFill>
-                <a:effectLst/>
-                <a:latin typeface="+mn-lt"/>
-                <a:ea typeface="+mn-ea"/>
-                <a:cs typeface="+mn-cs"/>
-              </a:rPr>
-              <a:t>can</a:t>
-            </a:r>
-            <a:r>
-              <a:rPr lang="sk-SK" sz="1200" b="0" i="0" kern="1200" dirty="0">
-                <a:solidFill>
-                  <a:schemeClr val="tx1"/>
-                </a:solidFill>
-                <a:effectLst/>
-                <a:latin typeface="+mn-lt"/>
-                <a:ea typeface="+mn-ea"/>
-                <a:cs typeface="+mn-cs"/>
-              </a:rPr>
-              <a:t> </a:t>
-            </a:r>
-            <a:r>
-              <a:rPr lang="sk-SK" sz="1200" b="0" i="0" kern="1200" dirty="0" err="1">
-                <a:solidFill>
-                  <a:schemeClr val="tx1"/>
-                </a:solidFill>
-                <a:effectLst/>
-                <a:latin typeface="+mn-lt"/>
-                <a:ea typeface="+mn-ea"/>
-                <a:cs typeface="+mn-cs"/>
-              </a:rPr>
-              <a:t>selectively</a:t>
-            </a:r>
-            <a:r>
-              <a:rPr lang="sk-SK" sz="1200" b="0" i="0" kern="1200" dirty="0">
-                <a:solidFill>
-                  <a:schemeClr val="tx1"/>
-                </a:solidFill>
-                <a:effectLst/>
-                <a:latin typeface="+mn-lt"/>
-                <a:ea typeface="+mn-ea"/>
-                <a:cs typeface="+mn-cs"/>
-              </a:rPr>
-              <a:t> </a:t>
-            </a:r>
-            <a:r>
-              <a:rPr lang="sk-SK" sz="1200" b="0" i="0" kern="1200" dirty="0" err="1">
-                <a:solidFill>
-                  <a:schemeClr val="tx1"/>
-                </a:solidFill>
-                <a:effectLst/>
-                <a:latin typeface="+mn-lt"/>
-                <a:ea typeface="+mn-ea"/>
-                <a:cs typeface="+mn-cs"/>
-              </a:rPr>
-              <a:t>discard</a:t>
-            </a:r>
-            <a:r>
-              <a:rPr lang="sk-SK" sz="1200" b="0" i="0" kern="1200" dirty="0">
-                <a:solidFill>
-                  <a:schemeClr val="tx1"/>
-                </a:solidFill>
-                <a:effectLst/>
-                <a:latin typeface="+mn-lt"/>
-                <a:ea typeface="+mn-ea"/>
-                <a:cs typeface="+mn-cs"/>
-              </a:rPr>
-              <a:t> </a:t>
-            </a:r>
-            <a:r>
-              <a:rPr lang="sk-SK" sz="1200" b="0" i="0" kern="1200" dirty="0" err="1">
-                <a:solidFill>
-                  <a:schemeClr val="tx1"/>
-                </a:solidFill>
-                <a:effectLst/>
-                <a:latin typeface="+mn-lt"/>
-                <a:ea typeface="+mn-ea"/>
-                <a:cs typeface="+mn-cs"/>
-              </a:rPr>
-              <a:t>lower</a:t>
-            </a:r>
-            <a:r>
-              <a:rPr lang="sk-SK" sz="1200" b="0" i="0" kern="1200" dirty="0">
-                <a:solidFill>
-                  <a:schemeClr val="tx1"/>
-                </a:solidFill>
-                <a:effectLst/>
-                <a:latin typeface="+mn-lt"/>
-                <a:ea typeface="+mn-ea"/>
-                <a:cs typeface="+mn-cs"/>
-              </a:rPr>
-              <a:t> priority </a:t>
-            </a:r>
-            <a:r>
-              <a:rPr lang="sk-SK" sz="1200" b="0" i="0" kern="1200" dirty="0" err="1">
-                <a:solidFill>
-                  <a:schemeClr val="tx1"/>
-                </a:solidFill>
-                <a:effectLst/>
-                <a:latin typeface="+mn-lt"/>
-                <a:ea typeface="+mn-ea"/>
-                <a:cs typeface="+mn-cs"/>
-              </a:rPr>
-              <a:t>traffic</a:t>
-            </a:r>
-            <a:r>
-              <a:rPr lang="sk-SK" sz="1200" b="0" i="0" kern="1200" dirty="0">
-                <a:solidFill>
-                  <a:schemeClr val="tx1"/>
-                </a:solidFill>
-                <a:effectLst/>
-                <a:latin typeface="+mn-lt"/>
-                <a:ea typeface="+mn-ea"/>
-                <a:cs typeface="+mn-cs"/>
-              </a:rPr>
-              <a:t> </a:t>
-            </a:r>
-            <a:r>
-              <a:rPr lang="sk-SK" sz="1200" b="0" i="0" kern="1200" dirty="0" err="1">
-                <a:solidFill>
-                  <a:schemeClr val="tx1"/>
-                </a:solidFill>
-                <a:effectLst/>
-                <a:latin typeface="+mn-lt"/>
-                <a:ea typeface="+mn-ea"/>
-                <a:cs typeface="+mn-cs"/>
-              </a:rPr>
-              <a:t>when</a:t>
-            </a:r>
-            <a:r>
-              <a:rPr lang="sk-SK" sz="1200" b="0" i="0" kern="1200" dirty="0">
-                <a:solidFill>
-                  <a:schemeClr val="tx1"/>
-                </a:solidFill>
-                <a:effectLst/>
-                <a:latin typeface="+mn-lt"/>
-                <a:ea typeface="+mn-ea"/>
-                <a:cs typeface="+mn-cs"/>
-              </a:rPr>
-              <a:t> </a:t>
-            </a:r>
-            <a:r>
-              <a:rPr lang="sk-SK" sz="1200" b="0" i="0" kern="1200" dirty="0" err="1">
-                <a:solidFill>
-                  <a:schemeClr val="tx1"/>
-                </a:solidFill>
-                <a:effectLst/>
-                <a:latin typeface="+mn-lt"/>
-                <a:ea typeface="+mn-ea"/>
-                <a:cs typeface="+mn-cs"/>
-              </a:rPr>
-              <a:t>the</a:t>
-            </a:r>
-            <a:r>
-              <a:rPr lang="sk-SK" sz="1200" b="0" i="0" kern="1200" dirty="0">
-                <a:solidFill>
-                  <a:schemeClr val="tx1"/>
-                </a:solidFill>
-                <a:effectLst/>
-                <a:latin typeface="+mn-lt"/>
-                <a:ea typeface="+mn-ea"/>
-                <a:cs typeface="+mn-cs"/>
-              </a:rPr>
-              <a:t> router </a:t>
-            </a:r>
-            <a:r>
-              <a:rPr lang="sk-SK" sz="1200" b="0" i="0" kern="1200" dirty="0" err="1">
-                <a:solidFill>
-                  <a:schemeClr val="tx1"/>
-                </a:solidFill>
-                <a:effectLst/>
-                <a:latin typeface="+mn-lt"/>
-                <a:ea typeface="+mn-ea"/>
-                <a:cs typeface="+mn-cs"/>
-              </a:rPr>
-              <a:t>begins</a:t>
-            </a:r>
-            <a:r>
-              <a:rPr lang="sk-SK" sz="1200" b="0" i="0" kern="1200" dirty="0">
-                <a:solidFill>
-                  <a:schemeClr val="tx1"/>
-                </a:solidFill>
-                <a:effectLst/>
-                <a:latin typeface="+mn-lt"/>
-                <a:ea typeface="+mn-ea"/>
-                <a:cs typeface="+mn-cs"/>
-              </a:rPr>
-              <a:t> to </a:t>
-            </a:r>
-            <a:r>
-              <a:rPr lang="sk-SK" sz="1200" b="0" i="0" kern="1200" dirty="0" err="1">
-                <a:solidFill>
-                  <a:schemeClr val="tx1"/>
-                </a:solidFill>
-                <a:effectLst/>
-                <a:latin typeface="+mn-lt"/>
-                <a:ea typeface="+mn-ea"/>
-                <a:cs typeface="+mn-cs"/>
-              </a:rPr>
-              <a:t>experience</a:t>
-            </a:r>
-            <a:r>
-              <a:rPr lang="sk-SK" sz="1200" b="0" i="0" kern="1200" dirty="0">
-                <a:solidFill>
-                  <a:schemeClr val="tx1"/>
-                </a:solidFill>
-                <a:effectLst/>
-                <a:latin typeface="+mn-lt"/>
-                <a:ea typeface="+mn-ea"/>
-                <a:cs typeface="+mn-cs"/>
-              </a:rPr>
-              <a:t> </a:t>
-            </a:r>
-            <a:r>
-              <a:rPr lang="sk-SK" sz="1200" b="0" i="0" kern="1200" dirty="0" err="1">
-                <a:solidFill>
-                  <a:schemeClr val="tx1"/>
-                </a:solidFill>
-                <a:effectLst/>
-                <a:latin typeface="+mn-lt"/>
-                <a:ea typeface="+mn-ea"/>
-                <a:cs typeface="+mn-cs"/>
-              </a:rPr>
-              <a:t>congestion</a:t>
-            </a:r>
-            <a:r>
-              <a:rPr lang="sk-SK" sz="1200" b="0" i="0" kern="1200" dirty="0">
-                <a:solidFill>
-                  <a:schemeClr val="tx1"/>
-                </a:solidFill>
-                <a:effectLst/>
-                <a:latin typeface="+mn-lt"/>
-                <a:ea typeface="+mn-ea"/>
-                <a:cs typeface="+mn-cs"/>
-              </a:rPr>
-              <a:t> and </a:t>
-            </a:r>
-            <a:r>
-              <a:rPr lang="sk-SK" sz="1200" b="0" i="0" kern="1200" dirty="0" err="1">
-                <a:solidFill>
-                  <a:schemeClr val="tx1"/>
-                </a:solidFill>
-                <a:effectLst/>
-                <a:latin typeface="+mn-lt"/>
-                <a:ea typeface="+mn-ea"/>
-                <a:cs typeface="+mn-cs"/>
-              </a:rPr>
-              <a:t>provide</a:t>
-            </a:r>
-            <a:r>
-              <a:rPr lang="sk-SK" sz="1200" b="0" i="0" kern="1200" dirty="0">
-                <a:solidFill>
-                  <a:schemeClr val="tx1"/>
-                </a:solidFill>
-                <a:effectLst/>
-                <a:latin typeface="+mn-lt"/>
-                <a:ea typeface="+mn-ea"/>
-                <a:cs typeface="+mn-cs"/>
-              </a:rPr>
-              <a:t> </a:t>
-            </a:r>
-            <a:r>
-              <a:rPr lang="sk-SK" sz="1200" b="0" i="0" kern="1200" dirty="0" err="1">
-                <a:solidFill>
-                  <a:schemeClr val="tx1"/>
-                </a:solidFill>
-                <a:effectLst/>
-                <a:latin typeface="+mn-lt"/>
-                <a:ea typeface="+mn-ea"/>
-                <a:cs typeface="+mn-cs"/>
-              </a:rPr>
-              <a:t>differentiated</a:t>
-            </a:r>
-            <a:r>
-              <a:rPr lang="sk-SK" sz="1200" b="0" i="0" kern="1200" dirty="0">
-                <a:solidFill>
-                  <a:schemeClr val="tx1"/>
-                </a:solidFill>
-                <a:effectLst/>
-                <a:latin typeface="+mn-lt"/>
-                <a:ea typeface="+mn-ea"/>
-                <a:cs typeface="+mn-cs"/>
-              </a:rPr>
-              <a:t> </a:t>
-            </a:r>
-            <a:r>
-              <a:rPr lang="sk-SK" sz="1200" b="0" i="0" kern="1200" dirty="0" err="1">
-                <a:solidFill>
-                  <a:schemeClr val="tx1"/>
-                </a:solidFill>
-                <a:effectLst/>
-                <a:latin typeface="+mn-lt"/>
-                <a:ea typeface="+mn-ea"/>
-                <a:cs typeface="+mn-cs"/>
-              </a:rPr>
-              <a:t>performance</a:t>
-            </a:r>
-            <a:r>
-              <a:rPr lang="sk-SK" sz="1200" b="0" i="0" kern="1200" dirty="0">
-                <a:solidFill>
-                  <a:schemeClr val="tx1"/>
-                </a:solidFill>
-                <a:effectLst/>
-                <a:latin typeface="+mn-lt"/>
-                <a:ea typeface="+mn-ea"/>
-                <a:cs typeface="+mn-cs"/>
-              </a:rPr>
-              <a:t> </a:t>
-            </a:r>
-            <a:r>
-              <a:rPr lang="sk-SK" sz="1200" b="0" i="0" kern="1200" dirty="0" err="1">
-                <a:solidFill>
-                  <a:schemeClr val="tx1"/>
-                </a:solidFill>
-                <a:effectLst/>
-                <a:latin typeface="+mn-lt"/>
-                <a:ea typeface="+mn-ea"/>
-                <a:cs typeface="+mn-cs"/>
-              </a:rPr>
-              <a:t>characteristics</a:t>
-            </a:r>
-            <a:r>
-              <a:rPr lang="sk-SK" sz="1200" b="0" i="0" kern="1200" dirty="0">
-                <a:solidFill>
-                  <a:schemeClr val="tx1"/>
-                </a:solidFill>
-                <a:effectLst/>
-                <a:latin typeface="+mn-lt"/>
-                <a:ea typeface="+mn-ea"/>
-                <a:cs typeface="+mn-cs"/>
-              </a:rPr>
-              <a:t> </a:t>
-            </a:r>
-            <a:r>
-              <a:rPr lang="sk-SK" sz="1200" b="0" i="0" kern="1200" dirty="0" err="1">
-                <a:solidFill>
-                  <a:schemeClr val="tx1"/>
-                </a:solidFill>
-                <a:effectLst/>
-                <a:latin typeface="+mn-lt"/>
-                <a:ea typeface="+mn-ea"/>
-                <a:cs typeface="+mn-cs"/>
-              </a:rPr>
-              <a:t>for</a:t>
-            </a:r>
-            <a:r>
-              <a:rPr lang="sk-SK" sz="1200" b="0" i="0" kern="1200" dirty="0">
-                <a:solidFill>
-                  <a:schemeClr val="tx1"/>
-                </a:solidFill>
-                <a:effectLst/>
-                <a:latin typeface="+mn-lt"/>
-                <a:ea typeface="+mn-ea"/>
-                <a:cs typeface="+mn-cs"/>
-              </a:rPr>
-              <a:t> </a:t>
-            </a:r>
-            <a:r>
-              <a:rPr lang="sk-SK" sz="1200" b="0" i="0" kern="1200" dirty="0" err="1">
-                <a:solidFill>
-                  <a:schemeClr val="tx1"/>
-                </a:solidFill>
-                <a:effectLst/>
-                <a:latin typeface="+mn-lt"/>
-                <a:ea typeface="+mn-ea"/>
-                <a:cs typeface="+mn-cs"/>
-              </a:rPr>
-              <a:t>different</a:t>
-            </a:r>
-            <a:r>
-              <a:rPr lang="sk-SK" sz="1200" b="0" i="0" kern="1200" dirty="0">
-                <a:solidFill>
-                  <a:schemeClr val="tx1"/>
-                </a:solidFill>
-                <a:effectLst/>
-                <a:latin typeface="+mn-lt"/>
-                <a:ea typeface="+mn-ea"/>
-                <a:cs typeface="+mn-cs"/>
-              </a:rPr>
-              <a:t> </a:t>
-            </a:r>
-            <a:r>
-              <a:rPr lang="sk-SK" sz="1200" b="0" i="0" kern="1200" dirty="0" err="1">
-                <a:solidFill>
-                  <a:schemeClr val="tx1"/>
-                </a:solidFill>
-                <a:effectLst/>
-                <a:latin typeface="+mn-lt"/>
-                <a:ea typeface="+mn-ea"/>
-                <a:cs typeface="+mn-cs"/>
-              </a:rPr>
-              <a:t>classes</a:t>
-            </a:r>
-            <a:r>
-              <a:rPr lang="sk-SK" sz="1200" b="0" i="0" kern="1200" dirty="0">
-                <a:solidFill>
-                  <a:schemeClr val="tx1"/>
-                </a:solidFill>
-                <a:effectLst/>
-                <a:latin typeface="+mn-lt"/>
-                <a:ea typeface="+mn-ea"/>
-                <a:cs typeface="+mn-cs"/>
-              </a:rPr>
-              <a:t> of </a:t>
-            </a:r>
-            <a:r>
-              <a:rPr lang="sk-SK" sz="1200" b="0" i="0" kern="1200" dirty="0" err="1">
-                <a:solidFill>
-                  <a:schemeClr val="tx1"/>
-                </a:solidFill>
-                <a:effectLst/>
-                <a:latin typeface="+mn-lt"/>
-                <a:ea typeface="+mn-ea"/>
-                <a:cs typeface="+mn-cs"/>
-              </a:rPr>
-              <a:t>service</a:t>
-            </a:r>
-            <a:r>
-              <a:rPr lang="sk-SK" sz="1200" b="0" i="0" kern="1200" dirty="0">
-                <a:solidFill>
-                  <a:schemeClr val="tx1"/>
-                </a:solidFill>
-                <a:effectLst/>
-                <a:latin typeface="+mn-lt"/>
-                <a:ea typeface="+mn-ea"/>
-                <a:cs typeface="+mn-cs"/>
-              </a:rPr>
-              <a:t>. </a:t>
-            </a:r>
-            <a:r>
-              <a:rPr lang="sk-SK" sz="1200" b="0" i="0" kern="1200" dirty="0" err="1">
-                <a:solidFill>
-                  <a:schemeClr val="tx1"/>
-                </a:solidFill>
-                <a:effectLst/>
-                <a:latin typeface="+mn-lt"/>
-                <a:ea typeface="+mn-ea"/>
-                <a:cs typeface="+mn-cs"/>
-              </a:rPr>
-              <a:t>It</a:t>
-            </a:r>
-            <a:r>
-              <a:rPr lang="sk-SK" sz="1200" b="0" i="0" kern="1200" dirty="0">
-                <a:solidFill>
-                  <a:schemeClr val="tx1"/>
-                </a:solidFill>
-                <a:effectLst/>
-                <a:latin typeface="+mn-lt"/>
-                <a:ea typeface="+mn-ea"/>
-                <a:cs typeface="+mn-cs"/>
-              </a:rPr>
-              <a:t> </a:t>
-            </a:r>
-            <a:r>
-              <a:rPr lang="sk-SK" sz="1200" b="0" i="0" kern="1200" dirty="0" err="1">
-                <a:solidFill>
-                  <a:schemeClr val="tx1"/>
-                </a:solidFill>
-                <a:effectLst/>
-                <a:latin typeface="+mn-lt"/>
-                <a:ea typeface="+mn-ea"/>
-                <a:cs typeface="+mn-cs"/>
-              </a:rPr>
-              <a:t>also</a:t>
-            </a:r>
-            <a:r>
-              <a:rPr lang="sk-SK" sz="1200" b="0" i="0" kern="1200" dirty="0">
-                <a:solidFill>
-                  <a:schemeClr val="tx1"/>
-                </a:solidFill>
-                <a:effectLst/>
-                <a:latin typeface="+mn-lt"/>
-                <a:ea typeface="+mn-ea"/>
-                <a:cs typeface="+mn-cs"/>
-              </a:rPr>
-              <a:t> </a:t>
-            </a:r>
-            <a:r>
-              <a:rPr lang="sk-SK" sz="1200" b="0" i="0" kern="1200" dirty="0" err="1">
-                <a:solidFill>
-                  <a:schemeClr val="tx1"/>
-                </a:solidFill>
-                <a:effectLst/>
-                <a:latin typeface="+mn-lt"/>
-                <a:ea typeface="+mn-ea"/>
-                <a:cs typeface="+mn-cs"/>
-              </a:rPr>
-              <a:t>protects</a:t>
-            </a:r>
-            <a:r>
-              <a:rPr lang="sk-SK" sz="1200" b="0" i="0" kern="1200" dirty="0">
-                <a:solidFill>
-                  <a:schemeClr val="tx1"/>
-                </a:solidFill>
-                <a:effectLst/>
-                <a:latin typeface="+mn-lt"/>
-                <a:ea typeface="+mn-ea"/>
-                <a:cs typeface="+mn-cs"/>
-              </a:rPr>
-              <a:t> </a:t>
-            </a:r>
-            <a:r>
-              <a:rPr lang="sk-SK" sz="1200" b="0" i="0" kern="1200" dirty="0" err="1">
-                <a:solidFill>
-                  <a:schemeClr val="tx1"/>
-                </a:solidFill>
-                <a:effectLst/>
-                <a:latin typeface="+mn-lt"/>
-                <a:ea typeface="+mn-ea"/>
-                <a:cs typeface="+mn-cs"/>
-              </a:rPr>
-              <a:t>against</a:t>
-            </a:r>
-            <a:r>
-              <a:rPr lang="sk-SK" sz="1200" b="0" i="0" kern="1200" dirty="0">
-                <a:solidFill>
-                  <a:schemeClr val="tx1"/>
-                </a:solidFill>
-                <a:effectLst/>
-                <a:latin typeface="+mn-lt"/>
-                <a:ea typeface="+mn-ea"/>
-                <a:cs typeface="+mn-cs"/>
-              </a:rPr>
-              <a:t> </a:t>
-            </a:r>
-            <a:r>
-              <a:rPr lang="sk-SK" sz="1200" b="0" i="0" kern="1200" dirty="0" err="1">
-                <a:solidFill>
-                  <a:schemeClr val="tx1"/>
-                </a:solidFill>
-                <a:effectLst/>
-                <a:latin typeface="+mn-lt"/>
-                <a:ea typeface="+mn-ea"/>
-                <a:cs typeface="+mn-cs"/>
-              </a:rPr>
-              <a:t>global</a:t>
-            </a:r>
-            <a:r>
-              <a:rPr lang="sk-SK" sz="1200" b="0" i="0" kern="1200" dirty="0">
-                <a:solidFill>
-                  <a:schemeClr val="tx1"/>
-                </a:solidFill>
-                <a:effectLst/>
-                <a:latin typeface="+mn-lt"/>
-                <a:ea typeface="+mn-ea"/>
-                <a:cs typeface="+mn-cs"/>
-              </a:rPr>
-              <a:t> </a:t>
-            </a:r>
-            <a:r>
-              <a:rPr lang="sk-SK" sz="1200" b="0" i="0" kern="1200" dirty="0" err="1">
-                <a:solidFill>
-                  <a:schemeClr val="tx1"/>
-                </a:solidFill>
-                <a:effectLst/>
-                <a:latin typeface="+mn-lt"/>
-                <a:ea typeface="+mn-ea"/>
-                <a:cs typeface="+mn-cs"/>
-              </a:rPr>
-              <a:t>synchronization</a:t>
-            </a:r>
-            <a:r>
-              <a:rPr lang="sk-SK" sz="1200" b="0" i="0" kern="1200" dirty="0">
-                <a:solidFill>
-                  <a:schemeClr val="tx1"/>
-                </a:solidFill>
-                <a:effectLst/>
-                <a:latin typeface="+mn-lt"/>
-                <a:ea typeface="+mn-ea"/>
-                <a:cs typeface="+mn-cs"/>
-              </a:rPr>
-              <a:t>. </a:t>
-            </a:r>
-            <a:r>
-              <a:rPr lang="sk-SK" sz="1200" b="0" i="0" kern="1200" dirty="0" err="1">
-                <a:solidFill>
-                  <a:schemeClr val="tx1"/>
-                </a:solidFill>
-                <a:effectLst/>
-                <a:latin typeface="+mn-lt"/>
-                <a:ea typeface="+mn-ea"/>
-                <a:cs typeface="+mn-cs"/>
-              </a:rPr>
-              <a:t>Global</a:t>
-            </a:r>
-            <a:r>
-              <a:rPr lang="sk-SK" sz="1200" b="0" i="0" kern="1200" dirty="0">
-                <a:solidFill>
-                  <a:schemeClr val="tx1"/>
-                </a:solidFill>
-                <a:effectLst/>
-                <a:latin typeface="+mn-lt"/>
-                <a:ea typeface="+mn-ea"/>
-                <a:cs typeface="+mn-cs"/>
-              </a:rPr>
-              <a:t> </a:t>
-            </a:r>
-            <a:r>
-              <a:rPr lang="sk-SK" sz="1200" b="0" i="0" kern="1200" dirty="0" err="1">
-                <a:solidFill>
-                  <a:schemeClr val="tx1"/>
-                </a:solidFill>
-                <a:effectLst/>
-                <a:latin typeface="+mn-lt"/>
-                <a:ea typeface="+mn-ea"/>
-                <a:cs typeface="+mn-cs"/>
-              </a:rPr>
-              <a:t>synchronization</a:t>
-            </a:r>
-            <a:r>
-              <a:rPr lang="sk-SK" sz="1200" b="0" i="0" kern="1200" dirty="0">
-                <a:solidFill>
-                  <a:schemeClr val="tx1"/>
-                </a:solidFill>
-                <a:effectLst/>
-                <a:latin typeface="+mn-lt"/>
-                <a:ea typeface="+mn-ea"/>
-                <a:cs typeface="+mn-cs"/>
-              </a:rPr>
-              <a:t> </a:t>
-            </a:r>
-            <a:r>
-              <a:rPr lang="sk-SK" sz="1200" b="0" i="0" kern="1200" dirty="0" err="1">
-                <a:solidFill>
-                  <a:schemeClr val="tx1"/>
-                </a:solidFill>
-                <a:effectLst/>
-                <a:latin typeface="+mn-lt"/>
-                <a:ea typeface="+mn-ea"/>
-                <a:cs typeface="+mn-cs"/>
-              </a:rPr>
-              <a:t>occurs</a:t>
-            </a:r>
-            <a:r>
-              <a:rPr lang="sk-SK" sz="1200" b="0" i="0" kern="1200" dirty="0">
-                <a:solidFill>
-                  <a:schemeClr val="tx1"/>
-                </a:solidFill>
-                <a:effectLst/>
-                <a:latin typeface="+mn-lt"/>
-                <a:ea typeface="+mn-ea"/>
-                <a:cs typeface="+mn-cs"/>
-              </a:rPr>
-              <a:t> as </a:t>
-            </a:r>
-            <a:r>
-              <a:rPr lang="sk-SK" sz="1200" b="0" i="0" kern="1200" dirty="0" err="1">
-                <a:solidFill>
-                  <a:schemeClr val="tx1"/>
-                </a:solidFill>
-                <a:effectLst/>
-                <a:latin typeface="+mn-lt"/>
-                <a:ea typeface="+mn-ea"/>
-                <a:cs typeface="+mn-cs"/>
-              </a:rPr>
-              <a:t>waves</a:t>
-            </a:r>
-            <a:r>
-              <a:rPr lang="sk-SK" sz="1200" b="0" i="0" kern="1200" dirty="0">
-                <a:solidFill>
-                  <a:schemeClr val="tx1"/>
-                </a:solidFill>
-                <a:effectLst/>
-                <a:latin typeface="+mn-lt"/>
-                <a:ea typeface="+mn-ea"/>
-                <a:cs typeface="+mn-cs"/>
-              </a:rPr>
-              <a:t> of </a:t>
-            </a:r>
-            <a:r>
-              <a:rPr lang="sk-SK" sz="1200" b="0" i="0" kern="1200" dirty="0" err="1">
-                <a:solidFill>
-                  <a:schemeClr val="tx1"/>
-                </a:solidFill>
-                <a:effectLst/>
-                <a:latin typeface="+mn-lt"/>
-                <a:ea typeface="+mn-ea"/>
-                <a:cs typeface="+mn-cs"/>
-              </a:rPr>
-              <a:t>congestion</a:t>
-            </a:r>
-            <a:r>
-              <a:rPr lang="sk-SK" sz="1200" b="0" i="0" kern="1200" dirty="0">
-                <a:solidFill>
-                  <a:schemeClr val="tx1"/>
-                </a:solidFill>
-                <a:effectLst/>
-                <a:latin typeface="+mn-lt"/>
-                <a:ea typeface="+mn-ea"/>
-                <a:cs typeface="+mn-cs"/>
-              </a:rPr>
-              <a:t> </a:t>
-            </a:r>
-            <a:r>
-              <a:rPr lang="sk-SK" sz="1200" b="0" i="0" kern="1200" dirty="0" err="1">
-                <a:solidFill>
-                  <a:schemeClr val="tx1"/>
-                </a:solidFill>
-                <a:effectLst/>
-                <a:latin typeface="+mn-lt"/>
-                <a:ea typeface="+mn-ea"/>
-                <a:cs typeface="+mn-cs"/>
-              </a:rPr>
-              <a:t>crest</a:t>
-            </a:r>
-            <a:r>
-              <a:rPr lang="sk-SK" sz="1200" b="0" i="0" kern="1200" dirty="0">
-                <a:solidFill>
-                  <a:schemeClr val="tx1"/>
-                </a:solidFill>
-                <a:effectLst/>
-                <a:latin typeface="+mn-lt"/>
-                <a:ea typeface="+mn-ea"/>
-                <a:cs typeface="+mn-cs"/>
-              </a:rPr>
-              <a:t>, </a:t>
-            </a:r>
-            <a:r>
-              <a:rPr lang="sk-SK" sz="1200" b="0" i="0" kern="1200" dirty="0" err="1">
-                <a:solidFill>
-                  <a:schemeClr val="tx1"/>
-                </a:solidFill>
-                <a:effectLst/>
-                <a:latin typeface="+mn-lt"/>
-                <a:ea typeface="+mn-ea"/>
-                <a:cs typeface="+mn-cs"/>
-              </a:rPr>
-              <a:t>only</a:t>
-            </a:r>
-            <a:r>
-              <a:rPr lang="sk-SK" sz="1200" b="0" i="0" kern="1200" dirty="0">
-                <a:solidFill>
-                  <a:schemeClr val="tx1"/>
-                </a:solidFill>
-                <a:effectLst/>
-                <a:latin typeface="+mn-lt"/>
-                <a:ea typeface="+mn-ea"/>
-                <a:cs typeface="+mn-cs"/>
-              </a:rPr>
-              <a:t> to </a:t>
-            </a:r>
-            <a:r>
-              <a:rPr lang="sk-SK" sz="1200" b="0" i="0" kern="1200" dirty="0" err="1">
-                <a:solidFill>
-                  <a:schemeClr val="tx1"/>
-                </a:solidFill>
-                <a:effectLst/>
-                <a:latin typeface="+mn-lt"/>
-                <a:ea typeface="+mn-ea"/>
-                <a:cs typeface="+mn-cs"/>
-              </a:rPr>
-              <a:t>be</a:t>
-            </a:r>
-            <a:r>
-              <a:rPr lang="sk-SK" sz="1200" b="0" i="0" kern="1200" dirty="0">
-                <a:solidFill>
-                  <a:schemeClr val="tx1"/>
-                </a:solidFill>
-                <a:effectLst/>
-                <a:latin typeface="+mn-lt"/>
-                <a:ea typeface="+mn-ea"/>
-                <a:cs typeface="+mn-cs"/>
-              </a:rPr>
-              <a:t> </a:t>
-            </a:r>
-            <a:r>
-              <a:rPr lang="sk-SK" sz="1200" b="0" i="0" kern="1200" dirty="0" err="1">
-                <a:solidFill>
-                  <a:schemeClr val="tx1"/>
-                </a:solidFill>
-                <a:effectLst/>
-                <a:latin typeface="+mn-lt"/>
-                <a:ea typeface="+mn-ea"/>
-                <a:cs typeface="+mn-cs"/>
-              </a:rPr>
-              <a:t>followed</a:t>
-            </a:r>
-            <a:r>
-              <a:rPr lang="sk-SK" sz="1200" b="0" i="0" kern="1200" dirty="0">
-                <a:solidFill>
-                  <a:schemeClr val="tx1"/>
-                </a:solidFill>
-                <a:effectLst/>
-                <a:latin typeface="+mn-lt"/>
-                <a:ea typeface="+mn-ea"/>
-                <a:cs typeface="+mn-cs"/>
-              </a:rPr>
-              <a:t> by </a:t>
-            </a:r>
-            <a:r>
-              <a:rPr lang="sk-SK" sz="1200" b="0" i="0" kern="1200" dirty="0" err="1">
-                <a:solidFill>
-                  <a:schemeClr val="tx1"/>
-                </a:solidFill>
-                <a:effectLst/>
-                <a:latin typeface="+mn-lt"/>
-                <a:ea typeface="+mn-ea"/>
-                <a:cs typeface="+mn-cs"/>
-              </a:rPr>
-              <a:t>periods</a:t>
-            </a:r>
-            <a:r>
-              <a:rPr lang="sk-SK" sz="1200" b="0" i="0" kern="1200" dirty="0">
-                <a:solidFill>
-                  <a:schemeClr val="tx1"/>
-                </a:solidFill>
-                <a:effectLst/>
-                <a:latin typeface="+mn-lt"/>
-                <a:ea typeface="+mn-ea"/>
-                <a:cs typeface="+mn-cs"/>
-              </a:rPr>
-              <a:t> of </a:t>
-            </a:r>
-            <a:r>
-              <a:rPr lang="sk-SK" sz="1200" b="0" i="0" kern="1200" dirty="0" err="1">
-                <a:solidFill>
-                  <a:schemeClr val="tx1"/>
-                </a:solidFill>
-                <a:effectLst/>
-                <a:latin typeface="+mn-lt"/>
-                <a:ea typeface="+mn-ea"/>
-                <a:cs typeface="+mn-cs"/>
-              </a:rPr>
-              <a:t>time</a:t>
-            </a:r>
-            <a:r>
-              <a:rPr lang="sk-SK" sz="1200" b="0" i="0" kern="1200" dirty="0">
-                <a:solidFill>
-                  <a:schemeClr val="tx1"/>
-                </a:solidFill>
-                <a:effectLst/>
-                <a:latin typeface="+mn-lt"/>
-                <a:ea typeface="+mn-ea"/>
-                <a:cs typeface="+mn-cs"/>
-              </a:rPr>
-              <a:t> </a:t>
-            </a:r>
-            <a:r>
-              <a:rPr lang="sk-SK" sz="1200" b="0" i="0" kern="1200" dirty="0" err="1">
-                <a:solidFill>
-                  <a:schemeClr val="tx1"/>
-                </a:solidFill>
-                <a:effectLst/>
-                <a:latin typeface="+mn-lt"/>
-                <a:ea typeface="+mn-ea"/>
-                <a:cs typeface="+mn-cs"/>
-              </a:rPr>
-              <a:t>during</a:t>
-            </a:r>
-            <a:r>
-              <a:rPr lang="sk-SK" sz="1200" b="0" i="0" kern="1200" dirty="0">
-                <a:solidFill>
-                  <a:schemeClr val="tx1"/>
-                </a:solidFill>
-                <a:effectLst/>
-                <a:latin typeface="+mn-lt"/>
-                <a:ea typeface="+mn-ea"/>
-                <a:cs typeface="+mn-cs"/>
-              </a:rPr>
-              <a:t> </a:t>
-            </a:r>
-            <a:r>
-              <a:rPr lang="sk-SK" sz="1200" b="0" i="0" kern="1200" dirty="0" err="1">
-                <a:solidFill>
-                  <a:schemeClr val="tx1"/>
-                </a:solidFill>
-                <a:effectLst/>
-                <a:latin typeface="+mn-lt"/>
-                <a:ea typeface="+mn-ea"/>
-                <a:cs typeface="+mn-cs"/>
-              </a:rPr>
-              <a:t>which</a:t>
-            </a:r>
-            <a:r>
-              <a:rPr lang="sk-SK" sz="1200" b="0" i="0" kern="1200" dirty="0">
-                <a:solidFill>
-                  <a:schemeClr val="tx1"/>
-                </a:solidFill>
-                <a:effectLst/>
-                <a:latin typeface="+mn-lt"/>
-                <a:ea typeface="+mn-ea"/>
-                <a:cs typeface="+mn-cs"/>
-              </a:rPr>
-              <a:t> </a:t>
-            </a:r>
-            <a:r>
-              <a:rPr lang="sk-SK" sz="1200" b="0" i="0" kern="1200" dirty="0" err="1">
-                <a:solidFill>
-                  <a:schemeClr val="tx1"/>
-                </a:solidFill>
-                <a:effectLst/>
-                <a:latin typeface="+mn-lt"/>
-                <a:ea typeface="+mn-ea"/>
-                <a:cs typeface="+mn-cs"/>
-              </a:rPr>
-              <a:t>the</a:t>
-            </a:r>
-            <a:r>
-              <a:rPr lang="sk-SK" sz="1200" b="0" i="0" kern="1200" dirty="0">
-                <a:solidFill>
-                  <a:schemeClr val="tx1"/>
-                </a:solidFill>
-                <a:effectLst/>
-                <a:latin typeface="+mn-lt"/>
-                <a:ea typeface="+mn-ea"/>
-                <a:cs typeface="+mn-cs"/>
-              </a:rPr>
-              <a:t> </a:t>
-            </a:r>
-            <a:r>
-              <a:rPr lang="sk-SK" sz="1200" b="0" i="0" kern="1200" dirty="0" err="1">
-                <a:solidFill>
-                  <a:schemeClr val="tx1"/>
-                </a:solidFill>
-                <a:effectLst/>
-                <a:latin typeface="+mn-lt"/>
-                <a:ea typeface="+mn-ea"/>
-                <a:cs typeface="+mn-cs"/>
-              </a:rPr>
-              <a:t>transmission</a:t>
-            </a:r>
-            <a:r>
-              <a:rPr lang="sk-SK" sz="1200" b="0" i="0" kern="1200" dirty="0">
-                <a:solidFill>
-                  <a:schemeClr val="tx1"/>
-                </a:solidFill>
-                <a:effectLst/>
-                <a:latin typeface="+mn-lt"/>
-                <a:ea typeface="+mn-ea"/>
-                <a:cs typeface="+mn-cs"/>
-              </a:rPr>
-              <a:t> </a:t>
-            </a:r>
-            <a:r>
-              <a:rPr lang="sk-SK" sz="1200" b="0" i="0" kern="1200" dirty="0" err="1">
-                <a:solidFill>
-                  <a:schemeClr val="tx1"/>
-                </a:solidFill>
-                <a:effectLst/>
-                <a:latin typeface="+mn-lt"/>
-                <a:ea typeface="+mn-ea"/>
-                <a:cs typeface="+mn-cs"/>
-              </a:rPr>
-              <a:t>link</a:t>
-            </a:r>
-            <a:r>
-              <a:rPr lang="sk-SK" sz="1200" b="0" i="0" kern="1200" dirty="0">
-                <a:solidFill>
-                  <a:schemeClr val="tx1"/>
-                </a:solidFill>
-                <a:effectLst/>
-                <a:latin typeface="+mn-lt"/>
-                <a:ea typeface="+mn-ea"/>
-                <a:cs typeface="+mn-cs"/>
-              </a:rPr>
-              <a:t> </a:t>
-            </a:r>
-            <a:r>
-              <a:rPr lang="sk-SK" sz="1200" b="0" i="0" kern="1200" dirty="0" err="1">
-                <a:solidFill>
-                  <a:schemeClr val="tx1"/>
-                </a:solidFill>
-                <a:effectLst/>
-                <a:latin typeface="+mn-lt"/>
-                <a:ea typeface="+mn-ea"/>
-                <a:cs typeface="+mn-cs"/>
-              </a:rPr>
-              <a:t>is</a:t>
-            </a:r>
-            <a:r>
-              <a:rPr lang="sk-SK" sz="1200" b="0" i="0" kern="1200" dirty="0">
-                <a:solidFill>
-                  <a:schemeClr val="tx1"/>
-                </a:solidFill>
-                <a:effectLst/>
-                <a:latin typeface="+mn-lt"/>
-                <a:ea typeface="+mn-ea"/>
-                <a:cs typeface="+mn-cs"/>
-              </a:rPr>
-              <a:t> </a:t>
-            </a:r>
-            <a:r>
-              <a:rPr lang="sk-SK" sz="1200" b="0" i="0" kern="1200" dirty="0" err="1">
-                <a:solidFill>
-                  <a:schemeClr val="tx1"/>
-                </a:solidFill>
-                <a:effectLst/>
-                <a:latin typeface="+mn-lt"/>
-                <a:ea typeface="+mn-ea"/>
-                <a:cs typeface="+mn-cs"/>
-              </a:rPr>
-              <a:t>not</a:t>
-            </a:r>
-            <a:r>
-              <a:rPr lang="sk-SK" sz="1200" b="0" i="0" kern="1200" dirty="0">
-                <a:solidFill>
-                  <a:schemeClr val="tx1"/>
-                </a:solidFill>
-                <a:effectLst/>
-                <a:latin typeface="+mn-lt"/>
-                <a:ea typeface="+mn-ea"/>
-                <a:cs typeface="+mn-cs"/>
-              </a:rPr>
-              <a:t> </a:t>
-            </a:r>
-            <a:r>
-              <a:rPr lang="sk-SK" sz="1200" b="0" i="0" kern="1200" dirty="0" err="1">
-                <a:solidFill>
-                  <a:schemeClr val="tx1"/>
-                </a:solidFill>
-                <a:effectLst/>
-                <a:latin typeface="+mn-lt"/>
-                <a:ea typeface="+mn-ea"/>
-                <a:cs typeface="+mn-cs"/>
-              </a:rPr>
-              <a:t>used</a:t>
-            </a:r>
-            <a:r>
-              <a:rPr lang="sk-SK" sz="1200" b="0" i="0" kern="1200" dirty="0">
-                <a:solidFill>
-                  <a:schemeClr val="tx1"/>
-                </a:solidFill>
-                <a:effectLst/>
-                <a:latin typeface="+mn-lt"/>
-                <a:ea typeface="+mn-ea"/>
-                <a:cs typeface="+mn-cs"/>
-              </a:rPr>
-              <a:t> to </a:t>
-            </a:r>
-            <a:r>
-              <a:rPr lang="sk-SK" sz="1200" b="0" i="0" kern="1200" dirty="0" err="1">
-                <a:solidFill>
-                  <a:schemeClr val="tx1"/>
-                </a:solidFill>
-                <a:effectLst/>
-                <a:latin typeface="+mn-lt"/>
-                <a:ea typeface="+mn-ea"/>
-                <a:cs typeface="+mn-cs"/>
-              </a:rPr>
-              <a:t>capacity</a:t>
-            </a:r>
-            <a:r>
-              <a:rPr lang="sk-SK" sz="1200" b="0" i="0" kern="1200" dirty="0">
-                <a:solidFill>
-                  <a:schemeClr val="tx1"/>
-                </a:solidFill>
-                <a:effectLst/>
-                <a:latin typeface="+mn-lt"/>
-                <a:ea typeface="+mn-ea"/>
-                <a:cs typeface="+mn-cs"/>
-              </a:rPr>
-              <a:t>. </a:t>
-            </a:r>
-            <a:r>
-              <a:rPr lang="sk-SK" sz="1200" b="0" i="0" kern="1200" dirty="0" err="1">
-                <a:solidFill>
-                  <a:schemeClr val="tx1"/>
-                </a:solidFill>
-                <a:effectLst/>
-                <a:latin typeface="+mn-lt"/>
-                <a:ea typeface="+mn-ea"/>
-                <a:cs typeface="+mn-cs"/>
-              </a:rPr>
-              <a:t>For</a:t>
-            </a:r>
-            <a:r>
-              <a:rPr lang="sk-SK" sz="1200" b="0" i="0" kern="1200" dirty="0">
-                <a:solidFill>
-                  <a:schemeClr val="tx1"/>
-                </a:solidFill>
-                <a:effectLst/>
-                <a:latin typeface="+mn-lt"/>
-                <a:ea typeface="+mn-ea"/>
-                <a:cs typeface="+mn-cs"/>
-              </a:rPr>
-              <a:t> </a:t>
-            </a:r>
-            <a:r>
-              <a:rPr lang="sk-SK" sz="1200" b="0" i="0" kern="1200" dirty="0" err="1">
-                <a:solidFill>
-                  <a:schemeClr val="tx1"/>
-                </a:solidFill>
-                <a:effectLst/>
-                <a:latin typeface="+mn-lt"/>
-                <a:ea typeface="+mn-ea"/>
-                <a:cs typeface="+mn-cs"/>
-              </a:rPr>
-              <a:t>these</a:t>
-            </a:r>
-            <a:r>
-              <a:rPr lang="sk-SK" sz="1200" b="0" i="0" kern="1200" dirty="0">
-                <a:solidFill>
-                  <a:schemeClr val="tx1"/>
-                </a:solidFill>
-                <a:effectLst/>
-                <a:latin typeface="+mn-lt"/>
-                <a:ea typeface="+mn-ea"/>
-                <a:cs typeface="+mn-cs"/>
-              </a:rPr>
-              <a:t> </a:t>
-            </a:r>
-            <a:r>
-              <a:rPr lang="sk-SK" sz="1200" b="0" i="0" kern="1200" dirty="0" err="1">
-                <a:solidFill>
-                  <a:schemeClr val="tx1"/>
-                </a:solidFill>
-                <a:effectLst/>
-                <a:latin typeface="+mn-lt"/>
-                <a:ea typeface="+mn-ea"/>
-                <a:cs typeface="+mn-cs"/>
-              </a:rPr>
-              <a:t>reasons</a:t>
-            </a:r>
-            <a:r>
-              <a:rPr lang="sk-SK" sz="1200" b="0" i="0" kern="1200" dirty="0">
-                <a:solidFill>
-                  <a:schemeClr val="tx1"/>
-                </a:solidFill>
-                <a:effectLst/>
-                <a:latin typeface="+mn-lt"/>
-                <a:ea typeface="+mn-ea"/>
-                <a:cs typeface="+mn-cs"/>
-              </a:rPr>
-              <a:t>, WRED </a:t>
-            </a:r>
-            <a:r>
-              <a:rPr lang="sk-SK" sz="1200" b="0" i="0" kern="1200" dirty="0" err="1">
-                <a:solidFill>
-                  <a:schemeClr val="tx1"/>
-                </a:solidFill>
-                <a:effectLst/>
-                <a:latin typeface="+mn-lt"/>
-                <a:ea typeface="+mn-ea"/>
-                <a:cs typeface="+mn-cs"/>
-              </a:rPr>
-              <a:t>is</a:t>
-            </a:r>
-            <a:r>
-              <a:rPr lang="sk-SK" sz="1200" b="0" i="0" kern="1200" dirty="0">
-                <a:solidFill>
-                  <a:schemeClr val="tx1"/>
-                </a:solidFill>
-                <a:effectLst/>
-                <a:latin typeface="+mn-lt"/>
-                <a:ea typeface="+mn-ea"/>
-                <a:cs typeface="+mn-cs"/>
-              </a:rPr>
-              <a:t> </a:t>
-            </a:r>
-            <a:r>
-              <a:rPr lang="sk-SK" sz="1200" b="0" i="0" kern="1200" dirty="0" err="1">
-                <a:solidFill>
-                  <a:schemeClr val="tx1"/>
-                </a:solidFill>
-                <a:effectLst/>
-                <a:latin typeface="+mn-lt"/>
-                <a:ea typeface="+mn-ea"/>
-                <a:cs typeface="+mn-cs"/>
-              </a:rPr>
-              <a:t>useful</a:t>
-            </a:r>
-            <a:r>
-              <a:rPr lang="sk-SK" sz="1200" b="0" i="0" kern="1200" dirty="0">
-                <a:solidFill>
-                  <a:schemeClr val="tx1"/>
-                </a:solidFill>
-                <a:effectLst/>
-                <a:latin typeface="+mn-lt"/>
-                <a:ea typeface="+mn-ea"/>
-                <a:cs typeface="+mn-cs"/>
-              </a:rPr>
-              <a:t> on </a:t>
-            </a:r>
-            <a:r>
-              <a:rPr lang="sk-SK" sz="1200" b="0" i="0" kern="1200" dirty="0" err="1">
-                <a:solidFill>
-                  <a:schemeClr val="tx1"/>
-                </a:solidFill>
-                <a:effectLst/>
-                <a:latin typeface="+mn-lt"/>
-                <a:ea typeface="+mn-ea"/>
-                <a:cs typeface="+mn-cs"/>
-              </a:rPr>
-              <a:t>any</a:t>
-            </a:r>
-            <a:r>
-              <a:rPr lang="sk-SK" sz="1200" b="0" i="0" kern="1200" dirty="0">
-                <a:solidFill>
-                  <a:schemeClr val="tx1"/>
-                </a:solidFill>
-                <a:effectLst/>
-                <a:latin typeface="+mn-lt"/>
-                <a:ea typeface="+mn-ea"/>
-                <a:cs typeface="+mn-cs"/>
-              </a:rPr>
-              <a:t> output interface or router </a:t>
-            </a:r>
-            <a:r>
-              <a:rPr lang="sk-SK" sz="1200" b="0" i="0" kern="1200" dirty="0" err="1">
-                <a:solidFill>
-                  <a:schemeClr val="tx1"/>
-                </a:solidFill>
-                <a:effectLst/>
-                <a:latin typeface="+mn-lt"/>
-                <a:ea typeface="+mn-ea"/>
-                <a:cs typeface="+mn-cs"/>
-              </a:rPr>
-              <a:t>where</a:t>
-            </a:r>
-            <a:r>
-              <a:rPr lang="sk-SK" sz="1200" b="0" i="0" kern="1200" dirty="0">
-                <a:solidFill>
-                  <a:schemeClr val="tx1"/>
-                </a:solidFill>
-                <a:effectLst/>
-                <a:latin typeface="+mn-lt"/>
-                <a:ea typeface="+mn-ea"/>
-                <a:cs typeface="+mn-cs"/>
-              </a:rPr>
-              <a:t> </a:t>
-            </a:r>
-            <a:r>
-              <a:rPr lang="sk-SK" sz="1200" b="0" i="0" kern="1200" dirty="0" err="1">
-                <a:solidFill>
-                  <a:schemeClr val="tx1"/>
-                </a:solidFill>
-                <a:effectLst/>
-                <a:latin typeface="+mn-lt"/>
-                <a:ea typeface="+mn-ea"/>
-                <a:cs typeface="+mn-cs"/>
-              </a:rPr>
-              <a:t>congestion</a:t>
-            </a:r>
-            <a:r>
-              <a:rPr lang="sk-SK" sz="1200" b="0" i="0" kern="1200" dirty="0">
-                <a:solidFill>
-                  <a:schemeClr val="tx1"/>
-                </a:solidFill>
-                <a:effectLst/>
-                <a:latin typeface="+mn-lt"/>
-                <a:ea typeface="+mn-ea"/>
-                <a:cs typeface="+mn-cs"/>
-              </a:rPr>
-              <a:t> </a:t>
-            </a:r>
-            <a:r>
-              <a:rPr lang="sk-SK" sz="1200" b="0" i="0" kern="1200" dirty="0" err="1">
-                <a:solidFill>
-                  <a:schemeClr val="tx1"/>
-                </a:solidFill>
-                <a:effectLst/>
-                <a:latin typeface="+mn-lt"/>
-                <a:ea typeface="+mn-ea"/>
-                <a:cs typeface="+mn-cs"/>
-              </a:rPr>
-              <a:t>is</a:t>
-            </a:r>
-            <a:r>
-              <a:rPr lang="sk-SK" sz="1200" b="0" i="0" kern="1200" dirty="0">
-                <a:solidFill>
-                  <a:schemeClr val="tx1"/>
-                </a:solidFill>
-                <a:effectLst/>
-                <a:latin typeface="+mn-lt"/>
-                <a:ea typeface="+mn-ea"/>
-                <a:cs typeface="+mn-cs"/>
-              </a:rPr>
-              <a:t> </a:t>
-            </a:r>
-            <a:r>
-              <a:rPr lang="sk-SK" sz="1200" b="0" i="0" kern="1200" dirty="0" err="1">
-                <a:solidFill>
-                  <a:schemeClr val="tx1"/>
-                </a:solidFill>
-                <a:effectLst/>
-                <a:latin typeface="+mn-lt"/>
-                <a:ea typeface="+mn-ea"/>
-                <a:cs typeface="+mn-cs"/>
-              </a:rPr>
-              <a:t>expected</a:t>
-            </a:r>
-            <a:r>
-              <a:rPr lang="sk-SK" sz="1200" b="0" i="0" kern="1200" dirty="0">
-                <a:solidFill>
-                  <a:schemeClr val="tx1"/>
-                </a:solidFill>
-                <a:effectLst/>
-                <a:latin typeface="+mn-lt"/>
-                <a:ea typeface="+mn-ea"/>
-                <a:cs typeface="+mn-cs"/>
-              </a:rPr>
-              <a:t> to </a:t>
-            </a:r>
-            <a:r>
-              <a:rPr lang="sk-SK" sz="1200" b="0" i="0" kern="1200" dirty="0" err="1">
-                <a:solidFill>
-                  <a:schemeClr val="tx1"/>
-                </a:solidFill>
-                <a:effectLst/>
-                <a:latin typeface="+mn-lt"/>
-                <a:ea typeface="+mn-ea"/>
-                <a:cs typeface="+mn-cs"/>
-              </a:rPr>
-              <a:t>occur</a:t>
-            </a:r>
-            <a:r>
-              <a:rPr lang="sk-SK" sz="1200" b="0" i="0" kern="1200" dirty="0">
-                <a:solidFill>
-                  <a:schemeClr val="tx1"/>
-                </a:solidFill>
-                <a:effectLst/>
-                <a:latin typeface="+mn-lt"/>
-                <a:ea typeface="+mn-ea"/>
-                <a:cs typeface="+mn-cs"/>
-              </a:rPr>
-              <a:t>.</a:t>
-            </a:r>
-            <a:endParaRPr lang="en-US" dirty="0"/>
-          </a:p>
-          <a:p>
-            <a:endParaRPr lang="en-US" dirty="0"/>
-          </a:p>
-          <a:p>
-            <a:r>
               <a:rPr lang="en-US" dirty="0"/>
               <a:t>9 - QoS Concepts</a:t>
             </a:r>
@@ -5547,7 +3382,7 @@
           <a:p>
             <a:r>
               <a:rPr lang="en-US" dirty="0"/>
-              <a:t>9.5.3 – QoS Tools</a:t>
+              <a:t>9.5.2 – Avoiding Packet Loss</a:t>
             </a:r>
           </a:p>
         </p:txBody>
@@ -5569,7 +3404,7 @@
           <a:p>
             <a:fld id="{5641018C-6CAF-B84E-B92C-ECB119457FBA}" type="slidenum">
               <a:rPr lang="en-US" smtClean="0"/>
-              <a:t>35</a:t>
+              <a:t>34</a:t>
             </a:fld>
             <a:endParaRPr lang="en-US" dirty="0"/>
           </a:p>
@@ -5578,7 +3413,7 @@
     </p:spTree>
     <p:extLst>
       <p:ext uri="{BB962C8B-B14F-4D97-AF65-F5344CB8AC3E}">
-        <p14:creationId xmlns:p14="http://schemas.microsoft.com/office/powerpoint/2010/main" val="3613756378"/>
+        <p14:creationId xmlns:p14="http://schemas.microsoft.com/office/powerpoint/2010/main" val="3335662565"/>
       </p:ext>
     </p:extLst>
   </p:cSld>
@@ -5633,6 +3468,1728 @@
           <a:lstStyle/>
           <a:p>
             <a:r>
+              <a:rPr lang="sk-SK" sz="1200" b="0" i="0" kern="1200" dirty="0">
+                <a:solidFill>
+                  <a:schemeClr val="tx1"/>
+                </a:solidFill>
+                <a:effectLst/>
+                <a:latin typeface="+mn-lt"/>
+                <a:ea typeface="+mn-ea"/>
+                <a:cs typeface="+mn-cs"/>
+              </a:rPr>
+              <a:t>WRED (</a:t>
+            </a:r>
+            <a:r>
+              <a:rPr lang="sk-SK" sz="1200" b="0" i="0" kern="1200" dirty="0" err="1">
+                <a:solidFill>
+                  <a:schemeClr val="tx1"/>
+                </a:solidFill>
+                <a:effectLst/>
+                <a:latin typeface="+mn-lt"/>
+                <a:ea typeface="+mn-ea"/>
+                <a:cs typeface="+mn-cs"/>
+              </a:rPr>
+              <a:t>Weighted</a:t>
+            </a:r>
+            <a:r>
+              <a:rPr lang="sk-SK" sz="1200" b="0" i="0" kern="1200" dirty="0">
+                <a:solidFill>
+                  <a:schemeClr val="tx1"/>
+                </a:solidFill>
+                <a:effectLst/>
+                <a:latin typeface="+mn-lt"/>
+                <a:ea typeface="+mn-ea"/>
+                <a:cs typeface="+mn-cs"/>
+              </a:rPr>
+              <a:t> </a:t>
+            </a:r>
+            <a:r>
+              <a:rPr lang="sk-SK" sz="1200" b="0" i="0" kern="1200" dirty="0" err="1">
+                <a:solidFill>
+                  <a:schemeClr val="tx1"/>
+                </a:solidFill>
+                <a:effectLst/>
+                <a:latin typeface="+mn-lt"/>
+                <a:ea typeface="+mn-ea"/>
+                <a:cs typeface="+mn-cs"/>
+              </a:rPr>
+              <a:t>Random</a:t>
+            </a:r>
+            <a:r>
+              <a:rPr lang="sk-SK" sz="1200" b="0" i="0" kern="1200" dirty="0">
+                <a:solidFill>
+                  <a:schemeClr val="tx1"/>
+                </a:solidFill>
+                <a:effectLst/>
+                <a:latin typeface="+mn-lt"/>
+                <a:ea typeface="+mn-ea"/>
+                <a:cs typeface="+mn-cs"/>
+              </a:rPr>
+              <a:t> </a:t>
+            </a:r>
+            <a:r>
+              <a:rPr lang="sk-SK" sz="1200" b="0" i="0" kern="1200" dirty="0" err="1">
+                <a:solidFill>
+                  <a:schemeClr val="tx1"/>
+                </a:solidFill>
+                <a:effectLst/>
+                <a:latin typeface="+mn-lt"/>
+                <a:ea typeface="+mn-ea"/>
+                <a:cs typeface="+mn-cs"/>
+              </a:rPr>
+              <a:t>Early</a:t>
+            </a:r>
+            <a:r>
+              <a:rPr lang="sk-SK" sz="1200" b="0" i="0" kern="1200" dirty="0">
+                <a:solidFill>
+                  <a:schemeClr val="tx1"/>
+                </a:solidFill>
+                <a:effectLst/>
+                <a:latin typeface="+mn-lt"/>
+                <a:ea typeface="+mn-ea"/>
+                <a:cs typeface="+mn-cs"/>
+              </a:rPr>
+              <a:t> </a:t>
+            </a:r>
+            <a:r>
+              <a:rPr lang="sk-SK" sz="1200" b="0" i="0" kern="1200" dirty="0" err="1">
+                <a:solidFill>
+                  <a:schemeClr val="tx1"/>
+                </a:solidFill>
+                <a:effectLst/>
+                <a:latin typeface="+mn-lt"/>
+                <a:ea typeface="+mn-ea"/>
+                <a:cs typeface="+mn-cs"/>
+              </a:rPr>
+              <a:t>Detection</a:t>
+            </a:r>
+            <a:r>
+              <a:rPr lang="sk-SK" sz="1200" b="0" i="0" kern="1200" dirty="0">
+                <a:solidFill>
+                  <a:schemeClr val="tx1"/>
+                </a:solidFill>
+                <a:effectLst/>
+                <a:latin typeface="+mn-lt"/>
+                <a:ea typeface="+mn-ea"/>
+                <a:cs typeface="+mn-cs"/>
+              </a:rPr>
+              <a:t>) </a:t>
+            </a:r>
+            <a:r>
+              <a:rPr lang="sk-SK" sz="1200" b="0" i="0" kern="1200" dirty="0" err="1">
+                <a:solidFill>
+                  <a:schemeClr val="tx1"/>
+                </a:solidFill>
+                <a:effectLst/>
+                <a:latin typeface="+mn-lt"/>
+                <a:ea typeface="+mn-ea"/>
+                <a:cs typeface="+mn-cs"/>
+              </a:rPr>
+              <a:t>makes</a:t>
+            </a:r>
+            <a:r>
+              <a:rPr lang="sk-SK" sz="1200" b="0" i="0" kern="1200" dirty="0">
+                <a:solidFill>
+                  <a:schemeClr val="tx1"/>
+                </a:solidFill>
+                <a:effectLst/>
+                <a:latin typeface="+mn-lt"/>
+                <a:ea typeface="+mn-ea"/>
+                <a:cs typeface="+mn-cs"/>
+              </a:rPr>
+              <a:t> </a:t>
+            </a:r>
+            <a:r>
+              <a:rPr lang="sk-SK" sz="1200" b="0" i="0" kern="1200" dirty="0" err="1">
+                <a:solidFill>
+                  <a:schemeClr val="tx1"/>
+                </a:solidFill>
+                <a:effectLst/>
+                <a:latin typeface="+mn-lt"/>
+                <a:ea typeface="+mn-ea"/>
+                <a:cs typeface="+mn-cs"/>
+              </a:rPr>
+              <a:t>early</a:t>
+            </a:r>
+            <a:r>
+              <a:rPr lang="sk-SK" sz="1200" b="0" i="0" kern="1200" dirty="0">
+                <a:solidFill>
+                  <a:schemeClr val="tx1"/>
+                </a:solidFill>
+                <a:effectLst/>
+                <a:latin typeface="+mn-lt"/>
+                <a:ea typeface="+mn-ea"/>
+                <a:cs typeface="+mn-cs"/>
+              </a:rPr>
+              <a:t> </a:t>
+            </a:r>
+            <a:r>
+              <a:rPr lang="sk-SK" sz="1200" b="0" i="0" kern="1200" dirty="0" err="1">
+                <a:solidFill>
+                  <a:schemeClr val="tx1"/>
+                </a:solidFill>
+                <a:effectLst/>
+                <a:latin typeface="+mn-lt"/>
+                <a:ea typeface="+mn-ea"/>
+                <a:cs typeface="+mn-cs"/>
+              </a:rPr>
+              <a:t>detection</a:t>
+            </a:r>
+            <a:r>
+              <a:rPr lang="sk-SK" sz="1200" b="0" i="0" kern="1200" dirty="0">
+                <a:solidFill>
+                  <a:schemeClr val="tx1"/>
+                </a:solidFill>
+                <a:effectLst/>
+                <a:latin typeface="+mn-lt"/>
+                <a:ea typeface="+mn-ea"/>
+                <a:cs typeface="+mn-cs"/>
+              </a:rPr>
+              <a:t> of </a:t>
+            </a:r>
+            <a:r>
+              <a:rPr lang="sk-SK" sz="1200" b="0" i="0" kern="1200" dirty="0" err="1">
+                <a:solidFill>
+                  <a:schemeClr val="tx1"/>
+                </a:solidFill>
+                <a:effectLst/>
+                <a:latin typeface="+mn-lt"/>
+                <a:ea typeface="+mn-ea"/>
+                <a:cs typeface="+mn-cs"/>
+              </a:rPr>
+              <a:t>congestion</a:t>
+            </a:r>
+            <a:r>
+              <a:rPr lang="sk-SK" sz="1200" b="0" i="0" kern="1200" dirty="0">
+                <a:solidFill>
+                  <a:schemeClr val="tx1"/>
+                </a:solidFill>
+                <a:effectLst/>
+                <a:latin typeface="+mn-lt"/>
+                <a:ea typeface="+mn-ea"/>
+                <a:cs typeface="+mn-cs"/>
+              </a:rPr>
+              <a:t> </a:t>
+            </a:r>
+            <a:r>
+              <a:rPr lang="sk-SK" sz="1200" b="0" i="0" kern="1200" dirty="0" err="1">
+                <a:solidFill>
+                  <a:schemeClr val="tx1"/>
+                </a:solidFill>
+                <a:effectLst/>
+                <a:latin typeface="+mn-lt"/>
+                <a:ea typeface="+mn-ea"/>
+                <a:cs typeface="+mn-cs"/>
+              </a:rPr>
+              <a:t>possible</a:t>
+            </a:r>
+            <a:r>
+              <a:rPr lang="sk-SK" sz="1200" b="0" i="0" kern="1200" dirty="0">
+                <a:solidFill>
+                  <a:schemeClr val="tx1"/>
+                </a:solidFill>
+                <a:effectLst/>
+                <a:latin typeface="+mn-lt"/>
+                <a:ea typeface="+mn-ea"/>
+                <a:cs typeface="+mn-cs"/>
+              </a:rPr>
+              <a:t> and </a:t>
+            </a:r>
+            <a:r>
+              <a:rPr lang="sk-SK" sz="1200" b="0" i="0" kern="1200" dirty="0" err="1">
+                <a:solidFill>
+                  <a:schemeClr val="tx1"/>
+                </a:solidFill>
+                <a:effectLst/>
+                <a:latin typeface="+mn-lt"/>
+                <a:ea typeface="+mn-ea"/>
+                <a:cs typeface="+mn-cs"/>
+              </a:rPr>
+              <a:t>provides</a:t>
+            </a:r>
+            <a:r>
+              <a:rPr lang="sk-SK" sz="1200" b="0" i="0" kern="1200" dirty="0">
+                <a:solidFill>
+                  <a:schemeClr val="tx1"/>
+                </a:solidFill>
+                <a:effectLst/>
+                <a:latin typeface="+mn-lt"/>
+                <a:ea typeface="+mn-ea"/>
+                <a:cs typeface="+mn-cs"/>
+              </a:rPr>
+              <a:t> a </a:t>
+            </a:r>
+            <a:r>
+              <a:rPr lang="sk-SK" sz="1200" b="0" i="0" kern="1200" dirty="0" err="1">
+                <a:solidFill>
+                  <a:schemeClr val="tx1"/>
+                </a:solidFill>
+                <a:effectLst/>
+                <a:latin typeface="+mn-lt"/>
+                <a:ea typeface="+mn-ea"/>
+                <a:cs typeface="+mn-cs"/>
+              </a:rPr>
+              <a:t>means</a:t>
+            </a:r>
+            <a:r>
+              <a:rPr lang="sk-SK" sz="1200" b="0" i="0" kern="1200" dirty="0">
+                <a:solidFill>
+                  <a:schemeClr val="tx1"/>
+                </a:solidFill>
+                <a:effectLst/>
+                <a:latin typeface="+mn-lt"/>
+                <a:ea typeface="+mn-ea"/>
+                <a:cs typeface="+mn-cs"/>
+              </a:rPr>
+              <a:t> </a:t>
+            </a:r>
+            <a:r>
+              <a:rPr lang="sk-SK" sz="1200" b="0" i="0" kern="1200" dirty="0" err="1">
+                <a:solidFill>
+                  <a:schemeClr val="tx1"/>
+                </a:solidFill>
+                <a:effectLst/>
+                <a:latin typeface="+mn-lt"/>
+                <a:ea typeface="+mn-ea"/>
+                <a:cs typeface="+mn-cs"/>
+              </a:rPr>
+              <a:t>for</a:t>
+            </a:r>
+            <a:r>
+              <a:rPr lang="sk-SK" sz="1200" b="0" i="0" kern="1200" dirty="0">
+                <a:solidFill>
+                  <a:schemeClr val="tx1"/>
+                </a:solidFill>
+                <a:effectLst/>
+                <a:latin typeface="+mn-lt"/>
+                <a:ea typeface="+mn-ea"/>
+                <a:cs typeface="+mn-cs"/>
+              </a:rPr>
+              <a:t> </a:t>
+            </a:r>
+            <a:r>
+              <a:rPr lang="sk-SK" sz="1200" b="0" i="0" kern="1200" dirty="0" err="1">
+                <a:solidFill>
+                  <a:schemeClr val="tx1"/>
+                </a:solidFill>
+                <a:effectLst/>
+                <a:latin typeface="+mn-lt"/>
+                <a:ea typeface="+mn-ea"/>
+                <a:cs typeface="+mn-cs"/>
+              </a:rPr>
+              <a:t>handling</a:t>
+            </a:r>
+            <a:r>
+              <a:rPr lang="sk-SK" sz="1200" b="0" i="0" kern="1200" dirty="0">
+                <a:solidFill>
+                  <a:schemeClr val="tx1"/>
+                </a:solidFill>
+                <a:effectLst/>
+                <a:latin typeface="+mn-lt"/>
+                <a:ea typeface="+mn-ea"/>
+                <a:cs typeface="+mn-cs"/>
+              </a:rPr>
+              <a:t> </a:t>
+            </a:r>
+            <a:r>
+              <a:rPr lang="sk-SK" sz="1200" b="0" i="0" kern="1200" dirty="0" err="1">
+                <a:solidFill>
+                  <a:schemeClr val="tx1"/>
+                </a:solidFill>
+                <a:effectLst/>
+                <a:latin typeface="+mn-lt"/>
+                <a:ea typeface="+mn-ea"/>
+                <a:cs typeface="+mn-cs"/>
+              </a:rPr>
+              <a:t>multiple</a:t>
+            </a:r>
+            <a:r>
+              <a:rPr lang="sk-SK" sz="1200" b="0" i="0" kern="1200" dirty="0">
+                <a:solidFill>
+                  <a:schemeClr val="tx1"/>
+                </a:solidFill>
+                <a:effectLst/>
+                <a:latin typeface="+mn-lt"/>
+                <a:ea typeface="+mn-ea"/>
+                <a:cs typeface="+mn-cs"/>
+              </a:rPr>
+              <a:t> </a:t>
+            </a:r>
+            <a:r>
+              <a:rPr lang="sk-SK" sz="1200" b="0" i="0" kern="1200" dirty="0" err="1">
+                <a:solidFill>
+                  <a:schemeClr val="tx1"/>
+                </a:solidFill>
+                <a:effectLst/>
+                <a:latin typeface="+mn-lt"/>
+                <a:ea typeface="+mn-ea"/>
+                <a:cs typeface="+mn-cs"/>
+              </a:rPr>
+              <a:t>classes</a:t>
+            </a:r>
+            <a:r>
+              <a:rPr lang="sk-SK" sz="1200" b="0" i="0" kern="1200" dirty="0">
+                <a:solidFill>
+                  <a:schemeClr val="tx1"/>
+                </a:solidFill>
+                <a:effectLst/>
+                <a:latin typeface="+mn-lt"/>
+                <a:ea typeface="+mn-ea"/>
+                <a:cs typeface="+mn-cs"/>
+              </a:rPr>
+              <a:t> of </a:t>
+            </a:r>
+            <a:r>
+              <a:rPr lang="sk-SK" sz="1200" b="0" i="0" kern="1200" dirty="0" err="1">
+                <a:solidFill>
+                  <a:schemeClr val="tx1"/>
+                </a:solidFill>
+                <a:effectLst/>
+                <a:latin typeface="+mn-lt"/>
+                <a:ea typeface="+mn-ea"/>
+                <a:cs typeface="+mn-cs"/>
+              </a:rPr>
+              <a:t>traffic</a:t>
+            </a:r>
+            <a:r>
+              <a:rPr lang="sk-SK" sz="1200" b="0" i="0" kern="1200" dirty="0">
+                <a:solidFill>
+                  <a:schemeClr val="tx1"/>
+                </a:solidFill>
+                <a:effectLst/>
+                <a:latin typeface="+mn-lt"/>
+                <a:ea typeface="+mn-ea"/>
+                <a:cs typeface="+mn-cs"/>
+              </a:rPr>
+              <a:t>. WRED </a:t>
+            </a:r>
+            <a:r>
+              <a:rPr lang="sk-SK" sz="1200" b="0" i="0" kern="1200" dirty="0" err="1">
+                <a:solidFill>
+                  <a:schemeClr val="tx1"/>
+                </a:solidFill>
+                <a:effectLst/>
+                <a:latin typeface="+mn-lt"/>
+                <a:ea typeface="+mn-ea"/>
+                <a:cs typeface="+mn-cs"/>
+              </a:rPr>
+              <a:t>can</a:t>
+            </a:r>
+            <a:r>
+              <a:rPr lang="sk-SK" sz="1200" b="0" i="0" kern="1200" dirty="0">
+                <a:solidFill>
+                  <a:schemeClr val="tx1"/>
+                </a:solidFill>
+                <a:effectLst/>
+                <a:latin typeface="+mn-lt"/>
+                <a:ea typeface="+mn-ea"/>
+                <a:cs typeface="+mn-cs"/>
+              </a:rPr>
+              <a:t> </a:t>
+            </a:r>
+            <a:r>
+              <a:rPr lang="sk-SK" sz="1200" b="0" i="0" kern="1200" dirty="0" err="1">
+                <a:solidFill>
+                  <a:schemeClr val="tx1"/>
+                </a:solidFill>
+                <a:effectLst/>
+                <a:latin typeface="+mn-lt"/>
+                <a:ea typeface="+mn-ea"/>
+                <a:cs typeface="+mn-cs"/>
+              </a:rPr>
+              <a:t>selectively</a:t>
+            </a:r>
+            <a:r>
+              <a:rPr lang="sk-SK" sz="1200" b="0" i="0" kern="1200" dirty="0">
+                <a:solidFill>
+                  <a:schemeClr val="tx1"/>
+                </a:solidFill>
+                <a:effectLst/>
+                <a:latin typeface="+mn-lt"/>
+                <a:ea typeface="+mn-ea"/>
+                <a:cs typeface="+mn-cs"/>
+              </a:rPr>
+              <a:t> </a:t>
+            </a:r>
+            <a:r>
+              <a:rPr lang="sk-SK" sz="1200" b="0" i="0" kern="1200" dirty="0" err="1">
+                <a:solidFill>
+                  <a:schemeClr val="tx1"/>
+                </a:solidFill>
+                <a:effectLst/>
+                <a:latin typeface="+mn-lt"/>
+                <a:ea typeface="+mn-ea"/>
+                <a:cs typeface="+mn-cs"/>
+              </a:rPr>
+              <a:t>discard</a:t>
+            </a:r>
+            <a:r>
+              <a:rPr lang="sk-SK" sz="1200" b="0" i="0" kern="1200" dirty="0">
+                <a:solidFill>
+                  <a:schemeClr val="tx1"/>
+                </a:solidFill>
+                <a:effectLst/>
+                <a:latin typeface="+mn-lt"/>
+                <a:ea typeface="+mn-ea"/>
+                <a:cs typeface="+mn-cs"/>
+              </a:rPr>
+              <a:t> </a:t>
+            </a:r>
+            <a:r>
+              <a:rPr lang="sk-SK" sz="1200" b="0" i="0" kern="1200" dirty="0" err="1">
+                <a:solidFill>
+                  <a:schemeClr val="tx1"/>
+                </a:solidFill>
+                <a:effectLst/>
+                <a:latin typeface="+mn-lt"/>
+                <a:ea typeface="+mn-ea"/>
+                <a:cs typeface="+mn-cs"/>
+              </a:rPr>
+              <a:t>lower</a:t>
+            </a:r>
+            <a:r>
+              <a:rPr lang="sk-SK" sz="1200" b="0" i="0" kern="1200" dirty="0">
+                <a:solidFill>
+                  <a:schemeClr val="tx1"/>
+                </a:solidFill>
+                <a:effectLst/>
+                <a:latin typeface="+mn-lt"/>
+                <a:ea typeface="+mn-ea"/>
+                <a:cs typeface="+mn-cs"/>
+              </a:rPr>
+              <a:t> priority </a:t>
+            </a:r>
+            <a:r>
+              <a:rPr lang="sk-SK" sz="1200" b="0" i="0" kern="1200" dirty="0" err="1">
+                <a:solidFill>
+                  <a:schemeClr val="tx1"/>
+                </a:solidFill>
+                <a:effectLst/>
+                <a:latin typeface="+mn-lt"/>
+                <a:ea typeface="+mn-ea"/>
+                <a:cs typeface="+mn-cs"/>
+              </a:rPr>
+              <a:t>traffic</a:t>
+            </a:r>
+            <a:r>
+              <a:rPr lang="sk-SK" sz="1200" b="0" i="0" kern="1200" dirty="0">
+                <a:solidFill>
+                  <a:schemeClr val="tx1"/>
+                </a:solidFill>
+                <a:effectLst/>
+                <a:latin typeface="+mn-lt"/>
+                <a:ea typeface="+mn-ea"/>
+                <a:cs typeface="+mn-cs"/>
+              </a:rPr>
+              <a:t> </a:t>
+            </a:r>
+            <a:r>
+              <a:rPr lang="sk-SK" sz="1200" b="0" i="0" kern="1200" dirty="0" err="1">
+                <a:solidFill>
+                  <a:schemeClr val="tx1"/>
+                </a:solidFill>
+                <a:effectLst/>
+                <a:latin typeface="+mn-lt"/>
+                <a:ea typeface="+mn-ea"/>
+                <a:cs typeface="+mn-cs"/>
+              </a:rPr>
+              <a:t>when</a:t>
+            </a:r>
+            <a:r>
+              <a:rPr lang="sk-SK" sz="1200" b="0" i="0" kern="1200" dirty="0">
+                <a:solidFill>
+                  <a:schemeClr val="tx1"/>
+                </a:solidFill>
+                <a:effectLst/>
+                <a:latin typeface="+mn-lt"/>
+                <a:ea typeface="+mn-ea"/>
+                <a:cs typeface="+mn-cs"/>
+              </a:rPr>
+              <a:t> </a:t>
+            </a:r>
+            <a:r>
+              <a:rPr lang="sk-SK" sz="1200" b="0" i="0" kern="1200" dirty="0" err="1">
+                <a:solidFill>
+                  <a:schemeClr val="tx1"/>
+                </a:solidFill>
+                <a:effectLst/>
+                <a:latin typeface="+mn-lt"/>
+                <a:ea typeface="+mn-ea"/>
+                <a:cs typeface="+mn-cs"/>
+              </a:rPr>
+              <a:t>the</a:t>
+            </a:r>
+            <a:r>
+              <a:rPr lang="sk-SK" sz="1200" b="0" i="0" kern="1200" dirty="0">
+                <a:solidFill>
+                  <a:schemeClr val="tx1"/>
+                </a:solidFill>
+                <a:effectLst/>
+                <a:latin typeface="+mn-lt"/>
+                <a:ea typeface="+mn-ea"/>
+                <a:cs typeface="+mn-cs"/>
+              </a:rPr>
+              <a:t> router </a:t>
+            </a:r>
+            <a:r>
+              <a:rPr lang="sk-SK" sz="1200" b="0" i="0" kern="1200" dirty="0" err="1">
+                <a:solidFill>
+                  <a:schemeClr val="tx1"/>
+                </a:solidFill>
+                <a:effectLst/>
+                <a:latin typeface="+mn-lt"/>
+                <a:ea typeface="+mn-ea"/>
+                <a:cs typeface="+mn-cs"/>
+              </a:rPr>
+              <a:t>begins</a:t>
+            </a:r>
+            <a:r>
+              <a:rPr lang="sk-SK" sz="1200" b="0" i="0" kern="1200" dirty="0">
+                <a:solidFill>
+                  <a:schemeClr val="tx1"/>
+                </a:solidFill>
+                <a:effectLst/>
+                <a:latin typeface="+mn-lt"/>
+                <a:ea typeface="+mn-ea"/>
+                <a:cs typeface="+mn-cs"/>
+              </a:rPr>
+              <a:t> to </a:t>
+            </a:r>
+            <a:r>
+              <a:rPr lang="sk-SK" sz="1200" b="0" i="0" kern="1200" dirty="0" err="1">
+                <a:solidFill>
+                  <a:schemeClr val="tx1"/>
+                </a:solidFill>
+                <a:effectLst/>
+                <a:latin typeface="+mn-lt"/>
+                <a:ea typeface="+mn-ea"/>
+                <a:cs typeface="+mn-cs"/>
+              </a:rPr>
+              <a:t>experience</a:t>
+            </a:r>
+            <a:r>
+              <a:rPr lang="sk-SK" sz="1200" b="0" i="0" kern="1200" dirty="0">
+                <a:solidFill>
+                  <a:schemeClr val="tx1"/>
+                </a:solidFill>
+                <a:effectLst/>
+                <a:latin typeface="+mn-lt"/>
+                <a:ea typeface="+mn-ea"/>
+                <a:cs typeface="+mn-cs"/>
+              </a:rPr>
+              <a:t> </a:t>
+            </a:r>
+            <a:r>
+              <a:rPr lang="sk-SK" sz="1200" b="0" i="0" kern="1200" dirty="0" err="1">
+                <a:solidFill>
+                  <a:schemeClr val="tx1"/>
+                </a:solidFill>
+                <a:effectLst/>
+                <a:latin typeface="+mn-lt"/>
+                <a:ea typeface="+mn-ea"/>
+                <a:cs typeface="+mn-cs"/>
+              </a:rPr>
+              <a:t>congestion</a:t>
+            </a:r>
+            <a:r>
+              <a:rPr lang="sk-SK" sz="1200" b="0" i="0" kern="1200" dirty="0">
+                <a:solidFill>
+                  <a:schemeClr val="tx1"/>
+                </a:solidFill>
+                <a:effectLst/>
+                <a:latin typeface="+mn-lt"/>
+                <a:ea typeface="+mn-ea"/>
+                <a:cs typeface="+mn-cs"/>
+              </a:rPr>
+              <a:t> and </a:t>
+            </a:r>
+            <a:r>
+              <a:rPr lang="sk-SK" sz="1200" b="0" i="0" kern="1200" dirty="0" err="1">
+                <a:solidFill>
+                  <a:schemeClr val="tx1"/>
+                </a:solidFill>
+                <a:effectLst/>
+                <a:latin typeface="+mn-lt"/>
+                <a:ea typeface="+mn-ea"/>
+                <a:cs typeface="+mn-cs"/>
+              </a:rPr>
+              <a:t>provide</a:t>
+            </a:r>
+            <a:r>
+              <a:rPr lang="sk-SK" sz="1200" b="0" i="0" kern="1200" dirty="0">
+                <a:solidFill>
+                  <a:schemeClr val="tx1"/>
+                </a:solidFill>
+                <a:effectLst/>
+                <a:latin typeface="+mn-lt"/>
+                <a:ea typeface="+mn-ea"/>
+                <a:cs typeface="+mn-cs"/>
+              </a:rPr>
+              <a:t> </a:t>
+            </a:r>
+            <a:r>
+              <a:rPr lang="sk-SK" sz="1200" b="0" i="0" kern="1200" dirty="0" err="1">
+                <a:solidFill>
+                  <a:schemeClr val="tx1"/>
+                </a:solidFill>
+                <a:effectLst/>
+                <a:latin typeface="+mn-lt"/>
+                <a:ea typeface="+mn-ea"/>
+                <a:cs typeface="+mn-cs"/>
+              </a:rPr>
+              <a:t>differentiated</a:t>
+            </a:r>
+            <a:r>
+              <a:rPr lang="sk-SK" sz="1200" b="0" i="0" kern="1200" dirty="0">
+                <a:solidFill>
+                  <a:schemeClr val="tx1"/>
+                </a:solidFill>
+                <a:effectLst/>
+                <a:latin typeface="+mn-lt"/>
+                <a:ea typeface="+mn-ea"/>
+                <a:cs typeface="+mn-cs"/>
+              </a:rPr>
+              <a:t> </a:t>
+            </a:r>
+            <a:r>
+              <a:rPr lang="sk-SK" sz="1200" b="0" i="0" kern="1200" dirty="0" err="1">
+                <a:solidFill>
+                  <a:schemeClr val="tx1"/>
+                </a:solidFill>
+                <a:effectLst/>
+                <a:latin typeface="+mn-lt"/>
+                <a:ea typeface="+mn-ea"/>
+                <a:cs typeface="+mn-cs"/>
+              </a:rPr>
+              <a:t>performance</a:t>
+            </a:r>
+            <a:r>
+              <a:rPr lang="sk-SK" sz="1200" b="0" i="0" kern="1200" dirty="0">
+                <a:solidFill>
+                  <a:schemeClr val="tx1"/>
+                </a:solidFill>
+                <a:effectLst/>
+                <a:latin typeface="+mn-lt"/>
+                <a:ea typeface="+mn-ea"/>
+                <a:cs typeface="+mn-cs"/>
+              </a:rPr>
+              <a:t> </a:t>
+            </a:r>
+            <a:r>
+              <a:rPr lang="sk-SK" sz="1200" b="0" i="0" kern="1200" dirty="0" err="1">
+                <a:solidFill>
+                  <a:schemeClr val="tx1"/>
+                </a:solidFill>
+                <a:effectLst/>
+                <a:latin typeface="+mn-lt"/>
+                <a:ea typeface="+mn-ea"/>
+                <a:cs typeface="+mn-cs"/>
+              </a:rPr>
+              <a:t>characteristics</a:t>
+            </a:r>
+            <a:r>
+              <a:rPr lang="sk-SK" sz="1200" b="0" i="0" kern="1200" dirty="0">
+                <a:solidFill>
+                  <a:schemeClr val="tx1"/>
+                </a:solidFill>
+                <a:effectLst/>
+                <a:latin typeface="+mn-lt"/>
+                <a:ea typeface="+mn-ea"/>
+                <a:cs typeface="+mn-cs"/>
+              </a:rPr>
+              <a:t> </a:t>
+            </a:r>
+            <a:r>
+              <a:rPr lang="sk-SK" sz="1200" b="0" i="0" kern="1200" dirty="0" err="1">
+                <a:solidFill>
+                  <a:schemeClr val="tx1"/>
+                </a:solidFill>
+                <a:effectLst/>
+                <a:latin typeface="+mn-lt"/>
+                <a:ea typeface="+mn-ea"/>
+                <a:cs typeface="+mn-cs"/>
+              </a:rPr>
+              <a:t>for</a:t>
+            </a:r>
+            <a:r>
+              <a:rPr lang="sk-SK" sz="1200" b="0" i="0" kern="1200" dirty="0">
+                <a:solidFill>
+                  <a:schemeClr val="tx1"/>
+                </a:solidFill>
+                <a:effectLst/>
+                <a:latin typeface="+mn-lt"/>
+                <a:ea typeface="+mn-ea"/>
+                <a:cs typeface="+mn-cs"/>
+              </a:rPr>
+              <a:t> </a:t>
+            </a:r>
+            <a:r>
+              <a:rPr lang="sk-SK" sz="1200" b="0" i="0" kern="1200" dirty="0" err="1">
+                <a:solidFill>
+                  <a:schemeClr val="tx1"/>
+                </a:solidFill>
+                <a:effectLst/>
+                <a:latin typeface="+mn-lt"/>
+                <a:ea typeface="+mn-ea"/>
+                <a:cs typeface="+mn-cs"/>
+              </a:rPr>
+              <a:t>different</a:t>
+            </a:r>
+            <a:r>
+              <a:rPr lang="sk-SK" sz="1200" b="0" i="0" kern="1200" dirty="0">
+                <a:solidFill>
+                  <a:schemeClr val="tx1"/>
+                </a:solidFill>
+                <a:effectLst/>
+                <a:latin typeface="+mn-lt"/>
+                <a:ea typeface="+mn-ea"/>
+                <a:cs typeface="+mn-cs"/>
+              </a:rPr>
+              <a:t> </a:t>
+            </a:r>
+            <a:r>
+              <a:rPr lang="sk-SK" sz="1200" b="0" i="0" kern="1200" dirty="0" err="1">
+                <a:solidFill>
+                  <a:schemeClr val="tx1"/>
+                </a:solidFill>
+                <a:effectLst/>
+                <a:latin typeface="+mn-lt"/>
+                <a:ea typeface="+mn-ea"/>
+                <a:cs typeface="+mn-cs"/>
+              </a:rPr>
+              <a:t>classes</a:t>
+            </a:r>
+            <a:r>
+              <a:rPr lang="sk-SK" sz="1200" b="0" i="0" kern="1200" dirty="0">
+                <a:solidFill>
+                  <a:schemeClr val="tx1"/>
+                </a:solidFill>
+                <a:effectLst/>
+                <a:latin typeface="+mn-lt"/>
+                <a:ea typeface="+mn-ea"/>
+                <a:cs typeface="+mn-cs"/>
+              </a:rPr>
+              <a:t> of </a:t>
+            </a:r>
+            <a:r>
+              <a:rPr lang="sk-SK" sz="1200" b="0" i="0" kern="1200" dirty="0" err="1">
+                <a:solidFill>
+                  <a:schemeClr val="tx1"/>
+                </a:solidFill>
+                <a:effectLst/>
+                <a:latin typeface="+mn-lt"/>
+                <a:ea typeface="+mn-ea"/>
+                <a:cs typeface="+mn-cs"/>
+              </a:rPr>
+              <a:t>service</a:t>
+            </a:r>
+            <a:r>
+              <a:rPr lang="sk-SK" sz="1200" b="0" i="0" kern="1200" dirty="0">
+                <a:solidFill>
+                  <a:schemeClr val="tx1"/>
+                </a:solidFill>
+                <a:effectLst/>
+                <a:latin typeface="+mn-lt"/>
+                <a:ea typeface="+mn-ea"/>
+                <a:cs typeface="+mn-cs"/>
+              </a:rPr>
+              <a:t>. </a:t>
+            </a:r>
+            <a:r>
+              <a:rPr lang="sk-SK" sz="1200" b="0" i="0" kern="1200" dirty="0" err="1">
+                <a:solidFill>
+                  <a:schemeClr val="tx1"/>
+                </a:solidFill>
+                <a:effectLst/>
+                <a:latin typeface="+mn-lt"/>
+                <a:ea typeface="+mn-ea"/>
+                <a:cs typeface="+mn-cs"/>
+              </a:rPr>
+              <a:t>It</a:t>
+            </a:r>
+            <a:r>
+              <a:rPr lang="sk-SK" sz="1200" b="0" i="0" kern="1200" dirty="0">
+                <a:solidFill>
+                  <a:schemeClr val="tx1"/>
+                </a:solidFill>
+                <a:effectLst/>
+                <a:latin typeface="+mn-lt"/>
+                <a:ea typeface="+mn-ea"/>
+                <a:cs typeface="+mn-cs"/>
+              </a:rPr>
+              <a:t> </a:t>
+            </a:r>
+            <a:r>
+              <a:rPr lang="sk-SK" sz="1200" b="0" i="0" kern="1200" dirty="0" err="1">
+                <a:solidFill>
+                  <a:schemeClr val="tx1"/>
+                </a:solidFill>
+                <a:effectLst/>
+                <a:latin typeface="+mn-lt"/>
+                <a:ea typeface="+mn-ea"/>
+                <a:cs typeface="+mn-cs"/>
+              </a:rPr>
+              <a:t>also</a:t>
+            </a:r>
+            <a:r>
+              <a:rPr lang="sk-SK" sz="1200" b="0" i="0" kern="1200" dirty="0">
+                <a:solidFill>
+                  <a:schemeClr val="tx1"/>
+                </a:solidFill>
+                <a:effectLst/>
+                <a:latin typeface="+mn-lt"/>
+                <a:ea typeface="+mn-ea"/>
+                <a:cs typeface="+mn-cs"/>
+              </a:rPr>
+              <a:t> </a:t>
+            </a:r>
+            <a:r>
+              <a:rPr lang="sk-SK" sz="1200" b="0" i="0" kern="1200" dirty="0" err="1">
+                <a:solidFill>
+                  <a:schemeClr val="tx1"/>
+                </a:solidFill>
+                <a:effectLst/>
+                <a:latin typeface="+mn-lt"/>
+                <a:ea typeface="+mn-ea"/>
+                <a:cs typeface="+mn-cs"/>
+              </a:rPr>
+              <a:t>protects</a:t>
+            </a:r>
+            <a:r>
+              <a:rPr lang="sk-SK" sz="1200" b="0" i="0" kern="1200" dirty="0">
+                <a:solidFill>
+                  <a:schemeClr val="tx1"/>
+                </a:solidFill>
+                <a:effectLst/>
+                <a:latin typeface="+mn-lt"/>
+                <a:ea typeface="+mn-ea"/>
+                <a:cs typeface="+mn-cs"/>
+              </a:rPr>
+              <a:t> </a:t>
+            </a:r>
+            <a:r>
+              <a:rPr lang="sk-SK" sz="1200" b="0" i="0" kern="1200" dirty="0" err="1">
+                <a:solidFill>
+                  <a:schemeClr val="tx1"/>
+                </a:solidFill>
+                <a:effectLst/>
+                <a:latin typeface="+mn-lt"/>
+                <a:ea typeface="+mn-ea"/>
+                <a:cs typeface="+mn-cs"/>
+              </a:rPr>
+              <a:t>against</a:t>
+            </a:r>
+            <a:r>
+              <a:rPr lang="sk-SK" sz="1200" b="0" i="0" kern="1200" dirty="0">
+                <a:solidFill>
+                  <a:schemeClr val="tx1"/>
+                </a:solidFill>
+                <a:effectLst/>
+                <a:latin typeface="+mn-lt"/>
+                <a:ea typeface="+mn-ea"/>
+                <a:cs typeface="+mn-cs"/>
+              </a:rPr>
+              <a:t> </a:t>
+            </a:r>
+            <a:r>
+              <a:rPr lang="sk-SK" sz="1200" b="0" i="0" kern="1200" dirty="0" err="1">
+                <a:solidFill>
+                  <a:schemeClr val="tx1"/>
+                </a:solidFill>
+                <a:effectLst/>
+                <a:latin typeface="+mn-lt"/>
+                <a:ea typeface="+mn-ea"/>
+                <a:cs typeface="+mn-cs"/>
+              </a:rPr>
+              <a:t>global</a:t>
+            </a:r>
+            <a:r>
+              <a:rPr lang="sk-SK" sz="1200" b="0" i="0" kern="1200" dirty="0">
+                <a:solidFill>
+                  <a:schemeClr val="tx1"/>
+                </a:solidFill>
+                <a:effectLst/>
+                <a:latin typeface="+mn-lt"/>
+                <a:ea typeface="+mn-ea"/>
+                <a:cs typeface="+mn-cs"/>
+              </a:rPr>
+              <a:t> </a:t>
+            </a:r>
+            <a:r>
+              <a:rPr lang="sk-SK" sz="1200" b="0" i="0" kern="1200" dirty="0" err="1">
+                <a:solidFill>
+                  <a:schemeClr val="tx1"/>
+                </a:solidFill>
+                <a:effectLst/>
+                <a:latin typeface="+mn-lt"/>
+                <a:ea typeface="+mn-ea"/>
+                <a:cs typeface="+mn-cs"/>
+              </a:rPr>
+              <a:t>synchronization</a:t>
+            </a:r>
+            <a:r>
+              <a:rPr lang="sk-SK" sz="1200" b="0" i="0" kern="1200" dirty="0">
+                <a:solidFill>
+                  <a:schemeClr val="tx1"/>
+                </a:solidFill>
+                <a:effectLst/>
+                <a:latin typeface="+mn-lt"/>
+                <a:ea typeface="+mn-ea"/>
+                <a:cs typeface="+mn-cs"/>
+              </a:rPr>
+              <a:t>. </a:t>
+            </a:r>
+            <a:r>
+              <a:rPr lang="sk-SK" sz="1200" b="0" i="0" kern="1200" dirty="0" err="1">
+                <a:solidFill>
+                  <a:schemeClr val="tx1"/>
+                </a:solidFill>
+                <a:effectLst/>
+                <a:latin typeface="+mn-lt"/>
+                <a:ea typeface="+mn-ea"/>
+                <a:cs typeface="+mn-cs"/>
+              </a:rPr>
+              <a:t>Global</a:t>
+            </a:r>
+            <a:r>
+              <a:rPr lang="sk-SK" sz="1200" b="0" i="0" kern="1200" dirty="0">
+                <a:solidFill>
+                  <a:schemeClr val="tx1"/>
+                </a:solidFill>
+                <a:effectLst/>
+                <a:latin typeface="+mn-lt"/>
+                <a:ea typeface="+mn-ea"/>
+                <a:cs typeface="+mn-cs"/>
+              </a:rPr>
+              <a:t> </a:t>
+            </a:r>
+            <a:r>
+              <a:rPr lang="sk-SK" sz="1200" b="0" i="0" kern="1200" dirty="0" err="1">
+                <a:solidFill>
+                  <a:schemeClr val="tx1"/>
+                </a:solidFill>
+                <a:effectLst/>
+                <a:latin typeface="+mn-lt"/>
+                <a:ea typeface="+mn-ea"/>
+                <a:cs typeface="+mn-cs"/>
+              </a:rPr>
+              <a:t>synchronization</a:t>
+            </a:r>
+            <a:r>
+              <a:rPr lang="sk-SK" sz="1200" b="0" i="0" kern="1200" dirty="0">
+                <a:solidFill>
+                  <a:schemeClr val="tx1"/>
+                </a:solidFill>
+                <a:effectLst/>
+                <a:latin typeface="+mn-lt"/>
+                <a:ea typeface="+mn-ea"/>
+                <a:cs typeface="+mn-cs"/>
+              </a:rPr>
+              <a:t> </a:t>
+            </a:r>
+            <a:r>
+              <a:rPr lang="sk-SK" sz="1200" b="0" i="0" kern="1200" dirty="0" err="1">
+                <a:solidFill>
+                  <a:schemeClr val="tx1"/>
+                </a:solidFill>
+                <a:effectLst/>
+                <a:latin typeface="+mn-lt"/>
+                <a:ea typeface="+mn-ea"/>
+                <a:cs typeface="+mn-cs"/>
+              </a:rPr>
+              <a:t>occurs</a:t>
+            </a:r>
+            <a:r>
+              <a:rPr lang="sk-SK" sz="1200" b="0" i="0" kern="1200" dirty="0">
+                <a:solidFill>
+                  <a:schemeClr val="tx1"/>
+                </a:solidFill>
+                <a:effectLst/>
+                <a:latin typeface="+mn-lt"/>
+                <a:ea typeface="+mn-ea"/>
+                <a:cs typeface="+mn-cs"/>
+              </a:rPr>
+              <a:t> as </a:t>
+            </a:r>
+            <a:r>
+              <a:rPr lang="sk-SK" sz="1200" b="0" i="0" kern="1200" dirty="0" err="1">
+                <a:solidFill>
+                  <a:schemeClr val="tx1"/>
+                </a:solidFill>
+                <a:effectLst/>
+                <a:latin typeface="+mn-lt"/>
+                <a:ea typeface="+mn-ea"/>
+                <a:cs typeface="+mn-cs"/>
+              </a:rPr>
+              <a:t>waves</a:t>
+            </a:r>
+            <a:r>
+              <a:rPr lang="sk-SK" sz="1200" b="0" i="0" kern="1200" dirty="0">
+                <a:solidFill>
+                  <a:schemeClr val="tx1"/>
+                </a:solidFill>
+                <a:effectLst/>
+                <a:latin typeface="+mn-lt"/>
+                <a:ea typeface="+mn-ea"/>
+                <a:cs typeface="+mn-cs"/>
+              </a:rPr>
+              <a:t> of </a:t>
+            </a:r>
+            <a:r>
+              <a:rPr lang="sk-SK" sz="1200" b="0" i="0" kern="1200" dirty="0" err="1">
+                <a:solidFill>
+                  <a:schemeClr val="tx1"/>
+                </a:solidFill>
+                <a:effectLst/>
+                <a:latin typeface="+mn-lt"/>
+                <a:ea typeface="+mn-ea"/>
+                <a:cs typeface="+mn-cs"/>
+              </a:rPr>
+              <a:t>congestion</a:t>
+            </a:r>
+            <a:r>
+              <a:rPr lang="sk-SK" sz="1200" b="0" i="0" kern="1200" dirty="0">
+                <a:solidFill>
+                  <a:schemeClr val="tx1"/>
+                </a:solidFill>
+                <a:effectLst/>
+                <a:latin typeface="+mn-lt"/>
+                <a:ea typeface="+mn-ea"/>
+                <a:cs typeface="+mn-cs"/>
+              </a:rPr>
+              <a:t> </a:t>
+            </a:r>
+            <a:r>
+              <a:rPr lang="sk-SK" sz="1200" b="0" i="0" kern="1200" dirty="0" err="1">
+                <a:solidFill>
+                  <a:schemeClr val="tx1"/>
+                </a:solidFill>
+                <a:effectLst/>
+                <a:latin typeface="+mn-lt"/>
+                <a:ea typeface="+mn-ea"/>
+                <a:cs typeface="+mn-cs"/>
+              </a:rPr>
+              <a:t>crest</a:t>
+            </a:r>
+            <a:r>
+              <a:rPr lang="sk-SK" sz="1200" b="0" i="0" kern="1200" dirty="0">
+                <a:solidFill>
+                  <a:schemeClr val="tx1"/>
+                </a:solidFill>
+                <a:effectLst/>
+                <a:latin typeface="+mn-lt"/>
+                <a:ea typeface="+mn-ea"/>
+                <a:cs typeface="+mn-cs"/>
+              </a:rPr>
+              <a:t>, </a:t>
+            </a:r>
+            <a:r>
+              <a:rPr lang="sk-SK" sz="1200" b="0" i="0" kern="1200" dirty="0" err="1">
+                <a:solidFill>
+                  <a:schemeClr val="tx1"/>
+                </a:solidFill>
+                <a:effectLst/>
+                <a:latin typeface="+mn-lt"/>
+                <a:ea typeface="+mn-ea"/>
+                <a:cs typeface="+mn-cs"/>
+              </a:rPr>
+              <a:t>only</a:t>
+            </a:r>
+            <a:r>
+              <a:rPr lang="sk-SK" sz="1200" b="0" i="0" kern="1200" dirty="0">
+                <a:solidFill>
+                  <a:schemeClr val="tx1"/>
+                </a:solidFill>
+                <a:effectLst/>
+                <a:latin typeface="+mn-lt"/>
+                <a:ea typeface="+mn-ea"/>
+                <a:cs typeface="+mn-cs"/>
+              </a:rPr>
+              <a:t> to </a:t>
+            </a:r>
+            <a:r>
+              <a:rPr lang="sk-SK" sz="1200" b="0" i="0" kern="1200" dirty="0" err="1">
+                <a:solidFill>
+                  <a:schemeClr val="tx1"/>
+                </a:solidFill>
+                <a:effectLst/>
+                <a:latin typeface="+mn-lt"/>
+                <a:ea typeface="+mn-ea"/>
+                <a:cs typeface="+mn-cs"/>
+              </a:rPr>
+              <a:t>be</a:t>
+            </a:r>
+            <a:r>
+              <a:rPr lang="sk-SK" sz="1200" b="0" i="0" kern="1200" dirty="0">
+                <a:solidFill>
+                  <a:schemeClr val="tx1"/>
+                </a:solidFill>
+                <a:effectLst/>
+                <a:latin typeface="+mn-lt"/>
+                <a:ea typeface="+mn-ea"/>
+                <a:cs typeface="+mn-cs"/>
+              </a:rPr>
+              <a:t> </a:t>
+            </a:r>
+            <a:r>
+              <a:rPr lang="sk-SK" sz="1200" b="0" i="0" kern="1200" dirty="0" err="1">
+                <a:solidFill>
+                  <a:schemeClr val="tx1"/>
+                </a:solidFill>
+                <a:effectLst/>
+                <a:latin typeface="+mn-lt"/>
+                <a:ea typeface="+mn-ea"/>
+                <a:cs typeface="+mn-cs"/>
+              </a:rPr>
+              <a:t>followed</a:t>
+            </a:r>
+            <a:r>
+              <a:rPr lang="sk-SK" sz="1200" b="0" i="0" kern="1200" dirty="0">
+                <a:solidFill>
+                  <a:schemeClr val="tx1"/>
+                </a:solidFill>
+                <a:effectLst/>
+                <a:latin typeface="+mn-lt"/>
+                <a:ea typeface="+mn-ea"/>
+                <a:cs typeface="+mn-cs"/>
+              </a:rPr>
+              <a:t> by </a:t>
+            </a:r>
+            <a:r>
+              <a:rPr lang="sk-SK" sz="1200" b="0" i="0" kern="1200" dirty="0" err="1">
+                <a:solidFill>
+                  <a:schemeClr val="tx1"/>
+                </a:solidFill>
+                <a:effectLst/>
+                <a:latin typeface="+mn-lt"/>
+                <a:ea typeface="+mn-ea"/>
+                <a:cs typeface="+mn-cs"/>
+              </a:rPr>
+              <a:t>periods</a:t>
+            </a:r>
+            <a:r>
+              <a:rPr lang="sk-SK" sz="1200" b="0" i="0" kern="1200" dirty="0">
+                <a:solidFill>
+                  <a:schemeClr val="tx1"/>
+                </a:solidFill>
+                <a:effectLst/>
+                <a:latin typeface="+mn-lt"/>
+                <a:ea typeface="+mn-ea"/>
+                <a:cs typeface="+mn-cs"/>
+              </a:rPr>
+              <a:t> of </a:t>
+            </a:r>
+            <a:r>
+              <a:rPr lang="sk-SK" sz="1200" b="0" i="0" kern="1200" dirty="0" err="1">
+                <a:solidFill>
+                  <a:schemeClr val="tx1"/>
+                </a:solidFill>
+                <a:effectLst/>
+                <a:latin typeface="+mn-lt"/>
+                <a:ea typeface="+mn-ea"/>
+                <a:cs typeface="+mn-cs"/>
+              </a:rPr>
+              <a:t>time</a:t>
+            </a:r>
+            <a:r>
+              <a:rPr lang="sk-SK" sz="1200" b="0" i="0" kern="1200" dirty="0">
+                <a:solidFill>
+                  <a:schemeClr val="tx1"/>
+                </a:solidFill>
+                <a:effectLst/>
+                <a:latin typeface="+mn-lt"/>
+                <a:ea typeface="+mn-ea"/>
+                <a:cs typeface="+mn-cs"/>
+              </a:rPr>
+              <a:t> </a:t>
+            </a:r>
+            <a:r>
+              <a:rPr lang="sk-SK" sz="1200" b="0" i="0" kern="1200" dirty="0" err="1">
+                <a:solidFill>
+                  <a:schemeClr val="tx1"/>
+                </a:solidFill>
+                <a:effectLst/>
+                <a:latin typeface="+mn-lt"/>
+                <a:ea typeface="+mn-ea"/>
+                <a:cs typeface="+mn-cs"/>
+              </a:rPr>
+              <a:t>during</a:t>
+            </a:r>
+            <a:r>
+              <a:rPr lang="sk-SK" sz="1200" b="0" i="0" kern="1200" dirty="0">
+                <a:solidFill>
+                  <a:schemeClr val="tx1"/>
+                </a:solidFill>
+                <a:effectLst/>
+                <a:latin typeface="+mn-lt"/>
+                <a:ea typeface="+mn-ea"/>
+                <a:cs typeface="+mn-cs"/>
+              </a:rPr>
+              <a:t> </a:t>
+            </a:r>
+            <a:r>
+              <a:rPr lang="sk-SK" sz="1200" b="0" i="0" kern="1200" dirty="0" err="1">
+                <a:solidFill>
+                  <a:schemeClr val="tx1"/>
+                </a:solidFill>
+                <a:effectLst/>
+                <a:latin typeface="+mn-lt"/>
+                <a:ea typeface="+mn-ea"/>
+                <a:cs typeface="+mn-cs"/>
+              </a:rPr>
+              <a:t>which</a:t>
+            </a:r>
+            <a:r>
+              <a:rPr lang="sk-SK" sz="1200" b="0" i="0" kern="1200" dirty="0">
+                <a:solidFill>
+                  <a:schemeClr val="tx1"/>
+                </a:solidFill>
+                <a:effectLst/>
+                <a:latin typeface="+mn-lt"/>
+                <a:ea typeface="+mn-ea"/>
+                <a:cs typeface="+mn-cs"/>
+              </a:rPr>
+              <a:t> </a:t>
+            </a:r>
+            <a:r>
+              <a:rPr lang="sk-SK" sz="1200" b="0" i="0" kern="1200" dirty="0" err="1">
+                <a:solidFill>
+                  <a:schemeClr val="tx1"/>
+                </a:solidFill>
+                <a:effectLst/>
+                <a:latin typeface="+mn-lt"/>
+                <a:ea typeface="+mn-ea"/>
+                <a:cs typeface="+mn-cs"/>
+              </a:rPr>
+              <a:t>the</a:t>
+            </a:r>
+            <a:r>
+              <a:rPr lang="sk-SK" sz="1200" b="0" i="0" kern="1200" dirty="0">
+                <a:solidFill>
+                  <a:schemeClr val="tx1"/>
+                </a:solidFill>
+                <a:effectLst/>
+                <a:latin typeface="+mn-lt"/>
+                <a:ea typeface="+mn-ea"/>
+                <a:cs typeface="+mn-cs"/>
+              </a:rPr>
+              <a:t> </a:t>
+            </a:r>
+            <a:r>
+              <a:rPr lang="sk-SK" sz="1200" b="0" i="0" kern="1200" dirty="0" err="1">
+                <a:solidFill>
+                  <a:schemeClr val="tx1"/>
+                </a:solidFill>
+                <a:effectLst/>
+                <a:latin typeface="+mn-lt"/>
+                <a:ea typeface="+mn-ea"/>
+                <a:cs typeface="+mn-cs"/>
+              </a:rPr>
+              <a:t>transmission</a:t>
+            </a:r>
+            <a:r>
+              <a:rPr lang="sk-SK" sz="1200" b="0" i="0" kern="1200" dirty="0">
+                <a:solidFill>
+                  <a:schemeClr val="tx1"/>
+                </a:solidFill>
+                <a:effectLst/>
+                <a:latin typeface="+mn-lt"/>
+                <a:ea typeface="+mn-ea"/>
+                <a:cs typeface="+mn-cs"/>
+              </a:rPr>
+              <a:t> </a:t>
+            </a:r>
+            <a:r>
+              <a:rPr lang="sk-SK" sz="1200" b="0" i="0" kern="1200" dirty="0" err="1">
+                <a:solidFill>
+                  <a:schemeClr val="tx1"/>
+                </a:solidFill>
+                <a:effectLst/>
+                <a:latin typeface="+mn-lt"/>
+                <a:ea typeface="+mn-ea"/>
+                <a:cs typeface="+mn-cs"/>
+              </a:rPr>
+              <a:t>link</a:t>
+            </a:r>
+            <a:r>
+              <a:rPr lang="sk-SK" sz="1200" b="0" i="0" kern="1200" dirty="0">
+                <a:solidFill>
+                  <a:schemeClr val="tx1"/>
+                </a:solidFill>
+                <a:effectLst/>
+                <a:latin typeface="+mn-lt"/>
+                <a:ea typeface="+mn-ea"/>
+                <a:cs typeface="+mn-cs"/>
+              </a:rPr>
+              <a:t> </a:t>
+            </a:r>
+            <a:r>
+              <a:rPr lang="sk-SK" sz="1200" b="0" i="0" kern="1200" dirty="0" err="1">
+                <a:solidFill>
+                  <a:schemeClr val="tx1"/>
+                </a:solidFill>
+                <a:effectLst/>
+                <a:latin typeface="+mn-lt"/>
+                <a:ea typeface="+mn-ea"/>
+                <a:cs typeface="+mn-cs"/>
+              </a:rPr>
+              <a:t>is</a:t>
+            </a:r>
+            <a:r>
+              <a:rPr lang="sk-SK" sz="1200" b="0" i="0" kern="1200" dirty="0">
+                <a:solidFill>
+                  <a:schemeClr val="tx1"/>
+                </a:solidFill>
+                <a:effectLst/>
+                <a:latin typeface="+mn-lt"/>
+                <a:ea typeface="+mn-ea"/>
+                <a:cs typeface="+mn-cs"/>
+              </a:rPr>
+              <a:t> </a:t>
+            </a:r>
+            <a:r>
+              <a:rPr lang="sk-SK" sz="1200" b="0" i="0" kern="1200" dirty="0" err="1">
+                <a:solidFill>
+                  <a:schemeClr val="tx1"/>
+                </a:solidFill>
+                <a:effectLst/>
+                <a:latin typeface="+mn-lt"/>
+                <a:ea typeface="+mn-ea"/>
+                <a:cs typeface="+mn-cs"/>
+              </a:rPr>
+              <a:t>not</a:t>
+            </a:r>
+            <a:r>
+              <a:rPr lang="sk-SK" sz="1200" b="0" i="0" kern="1200" dirty="0">
+                <a:solidFill>
+                  <a:schemeClr val="tx1"/>
+                </a:solidFill>
+                <a:effectLst/>
+                <a:latin typeface="+mn-lt"/>
+                <a:ea typeface="+mn-ea"/>
+                <a:cs typeface="+mn-cs"/>
+              </a:rPr>
+              <a:t> </a:t>
+            </a:r>
+            <a:r>
+              <a:rPr lang="sk-SK" sz="1200" b="0" i="0" kern="1200" dirty="0" err="1">
+                <a:solidFill>
+                  <a:schemeClr val="tx1"/>
+                </a:solidFill>
+                <a:effectLst/>
+                <a:latin typeface="+mn-lt"/>
+                <a:ea typeface="+mn-ea"/>
+                <a:cs typeface="+mn-cs"/>
+              </a:rPr>
+              <a:t>used</a:t>
+            </a:r>
+            <a:r>
+              <a:rPr lang="sk-SK" sz="1200" b="0" i="0" kern="1200" dirty="0">
+                <a:solidFill>
+                  <a:schemeClr val="tx1"/>
+                </a:solidFill>
+                <a:effectLst/>
+                <a:latin typeface="+mn-lt"/>
+                <a:ea typeface="+mn-ea"/>
+                <a:cs typeface="+mn-cs"/>
+              </a:rPr>
+              <a:t> to </a:t>
+            </a:r>
+            <a:r>
+              <a:rPr lang="sk-SK" sz="1200" b="0" i="0" kern="1200" dirty="0" err="1">
+                <a:solidFill>
+                  <a:schemeClr val="tx1"/>
+                </a:solidFill>
+                <a:effectLst/>
+                <a:latin typeface="+mn-lt"/>
+                <a:ea typeface="+mn-ea"/>
+                <a:cs typeface="+mn-cs"/>
+              </a:rPr>
+              <a:t>capacity</a:t>
+            </a:r>
+            <a:r>
+              <a:rPr lang="sk-SK" sz="1200" b="0" i="0" kern="1200" dirty="0">
+                <a:solidFill>
+                  <a:schemeClr val="tx1"/>
+                </a:solidFill>
+                <a:effectLst/>
+                <a:latin typeface="+mn-lt"/>
+                <a:ea typeface="+mn-ea"/>
+                <a:cs typeface="+mn-cs"/>
+              </a:rPr>
+              <a:t>. </a:t>
+            </a:r>
+            <a:r>
+              <a:rPr lang="sk-SK" sz="1200" b="0" i="0" kern="1200" dirty="0" err="1">
+                <a:solidFill>
+                  <a:schemeClr val="tx1"/>
+                </a:solidFill>
+                <a:effectLst/>
+                <a:latin typeface="+mn-lt"/>
+                <a:ea typeface="+mn-ea"/>
+                <a:cs typeface="+mn-cs"/>
+              </a:rPr>
+              <a:t>For</a:t>
+            </a:r>
+            <a:r>
+              <a:rPr lang="sk-SK" sz="1200" b="0" i="0" kern="1200" dirty="0">
+                <a:solidFill>
+                  <a:schemeClr val="tx1"/>
+                </a:solidFill>
+                <a:effectLst/>
+                <a:latin typeface="+mn-lt"/>
+                <a:ea typeface="+mn-ea"/>
+                <a:cs typeface="+mn-cs"/>
+              </a:rPr>
+              <a:t> </a:t>
+            </a:r>
+            <a:r>
+              <a:rPr lang="sk-SK" sz="1200" b="0" i="0" kern="1200" dirty="0" err="1">
+                <a:solidFill>
+                  <a:schemeClr val="tx1"/>
+                </a:solidFill>
+                <a:effectLst/>
+                <a:latin typeface="+mn-lt"/>
+                <a:ea typeface="+mn-ea"/>
+                <a:cs typeface="+mn-cs"/>
+              </a:rPr>
+              <a:t>these</a:t>
+            </a:r>
+            <a:r>
+              <a:rPr lang="sk-SK" sz="1200" b="0" i="0" kern="1200" dirty="0">
+                <a:solidFill>
+                  <a:schemeClr val="tx1"/>
+                </a:solidFill>
+                <a:effectLst/>
+                <a:latin typeface="+mn-lt"/>
+                <a:ea typeface="+mn-ea"/>
+                <a:cs typeface="+mn-cs"/>
+              </a:rPr>
+              <a:t> </a:t>
+            </a:r>
+            <a:r>
+              <a:rPr lang="sk-SK" sz="1200" b="0" i="0" kern="1200" dirty="0" err="1">
+                <a:solidFill>
+                  <a:schemeClr val="tx1"/>
+                </a:solidFill>
+                <a:effectLst/>
+                <a:latin typeface="+mn-lt"/>
+                <a:ea typeface="+mn-ea"/>
+                <a:cs typeface="+mn-cs"/>
+              </a:rPr>
+              <a:t>reasons</a:t>
+            </a:r>
+            <a:r>
+              <a:rPr lang="sk-SK" sz="1200" b="0" i="0" kern="1200" dirty="0">
+                <a:solidFill>
+                  <a:schemeClr val="tx1"/>
+                </a:solidFill>
+                <a:effectLst/>
+                <a:latin typeface="+mn-lt"/>
+                <a:ea typeface="+mn-ea"/>
+                <a:cs typeface="+mn-cs"/>
+              </a:rPr>
+              <a:t>, WRED </a:t>
+            </a:r>
+            <a:r>
+              <a:rPr lang="sk-SK" sz="1200" b="0" i="0" kern="1200" dirty="0" err="1">
+                <a:solidFill>
+                  <a:schemeClr val="tx1"/>
+                </a:solidFill>
+                <a:effectLst/>
+                <a:latin typeface="+mn-lt"/>
+                <a:ea typeface="+mn-ea"/>
+                <a:cs typeface="+mn-cs"/>
+              </a:rPr>
+              <a:t>is</a:t>
+            </a:r>
+            <a:r>
+              <a:rPr lang="sk-SK" sz="1200" b="0" i="0" kern="1200" dirty="0">
+                <a:solidFill>
+                  <a:schemeClr val="tx1"/>
+                </a:solidFill>
+                <a:effectLst/>
+                <a:latin typeface="+mn-lt"/>
+                <a:ea typeface="+mn-ea"/>
+                <a:cs typeface="+mn-cs"/>
+              </a:rPr>
+              <a:t> </a:t>
+            </a:r>
+            <a:r>
+              <a:rPr lang="sk-SK" sz="1200" b="0" i="0" kern="1200" dirty="0" err="1">
+                <a:solidFill>
+                  <a:schemeClr val="tx1"/>
+                </a:solidFill>
+                <a:effectLst/>
+                <a:latin typeface="+mn-lt"/>
+                <a:ea typeface="+mn-ea"/>
+                <a:cs typeface="+mn-cs"/>
+              </a:rPr>
+              <a:t>useful</a:t>
+            </a:r>
+            <a:r>
+              <a:rPr lang="sk-SK" sz="1200" b="0" i="0" kern="1200" dirty="0">
+                <a:solidFill>
+                  <a:schemeClr val="tx1"/>
+                </a:solidFill>
+                <a:effectLst/>
+                <a:latin typeface="+mn-lt"/>
+                <a:ea typeface="+mn-ea"/>
+                <a:cs typeface="+mn-cs"/>
+              </a:rPr>
+              <a:t> on </a:t>
+            </a:r>
+            <a:r>
+              <a:rPr lang="sk-SK" sz="1200" b="0" i="0" kern="1200" dirty="0" err="1">
+                <a:solidFill>
+                  <a:schemeClr val="tx1"/>
+                </a:solidFill>
+                <a:effectLst/>
+                <a:latin typeface="+mn-lt"/>
+                <a:ea typeface="+mn-ea"/>
+                <a:cs typeface="+mn-cs"/>
+              </a:rPr>
+              <a:t>any</a:t>
+            </a:r>
+            <a:r>
+              <a:rPr lang="sk-SK" sz="1200" b="0" i="0" kern="1200" dirty="0">
+                <a:solidFill>
+                  <a:schemeClr val="tx1"/>
+                </a:solidFill>
+                <a:effectLst/>
+                <a:latin typeface="+mn-lt"/>
+                <a:ea typeface="+mn-ea"/>
+                <a:cs typeface="+mn-cs"/>
+              </a:rPr>
+              <a:t> output interface or router </a:t>
+            </a:r>
+            <a:r>
+              <a:rPr lang="sk-SK" sz="1200" b="0" i="0" kern="1200" dirty="0" err="1">
+                <a:solidFill>
+                  <a:schemeClr val="tx1"/>
+                </a:solidFill>
+                <a:effectLst/>
+                <a:latin typeface="+mn-lt"/>
+                <a:ea typeface="+mn-ea"/>
+                <a:cs typeface="+mn-cs"/>
+              </a:rPr>
+              <a:t>where</a:t>
+            </a:r>
+            <a:r>
+              <a:rPr lang="sk-SK" sz="1200" b="0" i="0" kern="1200" dirty="0">
+                <a:solidFill>
+                  <a:schemeClr val="tx1"/>
+                </a:solidFill>
+                <a:effectLst/>
+                <a:latin typeface="+mn-lt"/>
+                <a:ea typeface="+mn-ea"/>
+                <a:cs typeface="+mn-cs"/>
+              </a:rPr>
+              <a:t> </a:t>
+            </a:r>
+            <a:r>
+              <a:rPr lang="sk-SK" sz="1200" b="0" i="0" kern="1200" dirty="0" err="1">
+                <a:solidFill>
+                  <a:schemeClr val="tx1"/>
+                </a:solidFill>
+                <a:effectLst/>
+                <a:latin typeface="+mn-lt"/>
+                <a:ea typeface="+mn-ea"/>
+                <a:cs typeface="+mn-cs"/>
+              </a:rPr>
+              <a:t>congestion</a:t>
+            </a:r>
+            <a:r>
+              <a:rPr lang="sk-SK" sz="1200" b="0" i="0" kern="1200" dirty="0">
+                <a:solidFill>
+                  <a:schemeClr val="tx1"/>
+                </a:solidFill>
+                <a:effectLst/>
+                <a:latin typeface="+mn-lt"/>
+                <a:ea typeface="+mn-ea"/>
+                <a:cs typeface="+mn-cs"/>
+              </a:rPr>
+              <a:t> </a:t>
+            </a:r>
+            <a:r>
+              <a:rPr lang="sk-SK" sz="1200" b="0" i="0" kern="1200" dirty="0" err="1">
+                <a:solidFill>
+                  <a:schemeClr val="tx1"/>
+                </a:solidFill>
+                <a:effectLst/>
+                <a:latin typeface="+mn-lt"/>
+                <a:ea typeface="+mn-ea"/>
+                <a:cs typeface="+mn-cs"/>
+              </a:rPr>
+              <a:t>is</a:t>
+            </a:r>
+            <a:r>
+              <a:rPr lang="sk-SK" sz="1200" b="0" i="0" kern="1200" dirty="0">
+                <a:solidFill>
+                  <a:schemeClr val="tx1"/>
+                </a:solidFill>
+                <a:effectLst/>
+                <a:latin typeface="+mn-lt"/>
+                <a:ea typeface="+mn-ea"/>
+                <a:cs typeface="+mn-cs"/>
+              </a:rPr>
+              <a:t> </a:t>
+            </a:r>
+            <a:r>
+              <a:rPr lang="sk-SK" sz="1200" b="0" i="0" kern="1200" dirty="0" err="1">
+                <a:solidFill>
+                  <a:schemeClr val="tx1"/>
+                </a:solidFill>
+                <a:effectLst/>
+                <a:latin typeface="+mn-lt"/>
+                <a:ea typeface="+mn-ea"/>
+                <a:cs typeface="+mn-cs"/>
+              </a:rPr>
+              <a:t>expected</a:t>
+            </a:r>
+            <a:r>
+              <a:rPr lang="sk-SK" sz="1200" b="0" i="0" kern="1200" dirty="0">
+                <a:solidFill>
+                  <a:schemeClr val="tx1"/>
+                </a:solidFill>
+                <a:effectLst/>
+                <a:latin typeface="+mn-lt"/>
+                <a:ea typeface="+mn-ea"/>
+                <a:cs typeface="+mn-cs"/>
+              </a:rPr>
+              <a:t> to </a:t>
+            </a:r>
+            <a:r>
+              <a:rPr lang="sk-SK" sz="1200" b="0" i="0" kern="1200" dirty="0" err="1">
+                <a:solidFill>
+                  <a:schemeClr val="tx1"/>
+                </a:solidFill>
+                <a:effectLst/>
+                <a:latin typeface="+mn-lt"/>
+                <a:ea typeface="+mn-ea"/>
+                <a:cs typeface="+mn-cs"/>
+              </a:rPr>
+              <a:t>occur</a:t>
+            </a:r>
+            <a:r>
+              <a:rPr lang="sk-SK" sz="1200" b="0" i="0" kern="1200" dirty="0">
+                <a:solidFill>
+                  <a:schemeClr val="tx1"/>
+                </a:solidFill>
+                <a:effectLst/>
+                <a:latin typeface="+mn-lt"/>
+                <a:ea typeface="+mn-ea"/>
+                <a:cs typeface="+mn-cs"/>
+              </a:rPr>
+              <a:t>.</a:t>
+            </a:r>
+            <a:endParaRPr lang="en-US" dirty="0"/>
+          </a:p>
+          <a:p>
+            <a:endParaRPr lang="en-US" dirty="0"/>
+          </a:p>
+          <a:p>
+            <a:r>
               <a:rPr lang="en-US" dirty="0"/>
               <a:t>9 - QoS Concepts</a:t>
             </a:r>
@@ -5646,7 +5203,7 @@
           <a:p>
             <a:r>
               <a:rPr lang="en-US" dirty="0"/>
-              <a:t>9.5.3 – QoS Tools (Cont.)</a:t>
+              <a:t>9.5.3 – QoS Tools</a:t>
             </a:r>
           </a:p>
         </p:txBody>
@@ -5668,7 +5225,7 @@
           <a:p>
             <a:fld id="{5641018C-6CAF-B84E-B92C-ECB119457FBA}" type="slidenum">
               <a:rPr lang="en-US" smtClean="0"/>
-              <a:t>36</a:t>
+              <a:t>35</a:t>
             </a:fld>
             <a:endParaRPr lang="en-US" dirty="0"/>
           </a:p>
@@ -5677,7 +5234,7 @@
     </p:spTree>
     <p:extLst>
       <p:ext uri="{BB962C8B-B14F-4D97-AF65-F5344CB8AC3E}">
-        <p14:creationId xmlns:p14="http://schemas.microsoft.com/office/powerpoint/2010/main" val="3718770974"/>
+        <p14:creationId xmlns:p14="http://schemas.microsoft.com/office/powerpoint/2010/main" val="3613756378"/>
       </p:ext>
     </p:extLst>
   </p:cSld>
@@ -5745,7 +5302,7 @@
           <a:p>
             <a:r>
               <a:rPr lang="en-US" dirty="0"/>
-              <a:t>9.5.4 – Classification and Marking</a:t>
+              <a:t>9.5.3 – QoS Tools (Cont.)</a:t>
             </a:r>
           </a:p>
         </p:txBody>
@@ -5767,7 +5324,7 @@
           <a:p>
             <a:fld id="{5641018C-6CAF-B84E-B92C-ECB119457FBA}" type="slidenum">
               <a:rPr lang="en-US" smtClean="0"/>
-              <a:t>37</a:t>
+              <a:t>36</a:t>
             </a:fld>
             <a:endParaRPr lang="en-US" dirty="0"/>
           </a:p>
@@ -5776,7 +5333,7 @@
     </p:spTree>
     <p:extLst>
       <p:ext uri="{BB962C8B-B14F-4D97-AF65-F5344CB8AC3E}">
-        <p14:creationId xmlns:p14="http://schemas.microsoft.com/office/powerpoint/2010/main" val="1242260331"/>
+        <p14:creationId xmlns:p14="http://schemas.microsoft.com/office/powerpoint/2010/main" val="3718770974"/>
       </p:ext>
     </p:extLst>
   </p:cSld>
@@ -5844,7 +5401,7 @@
           <a:p>
             <a:r>
               <a:rPr lang="en-US" dirty="0"/>
-              <a:t>9.5.4 – Classification and Marking (Cont.)</a:t>
+              <a:t>9.5.4 – Classification and Marking</a:t>
             </a:r>
           </a:p>
         </p:txBody>
@@ -5866,7 +5423,7 @@
           <a:p>
             <a:fld id="{5641018C-6CAF-B84E-B92C-ECB119457FBA}" type="slidenum">
               <a:rPr lang="en-US" smtClean="0"/>
-              <a:t>38</a:t>
+              <a:t>37</a:t>
             </a:fld>
             <a:endParaRPr lang="en-US" dirty="0"/>
           </a:p>
@@ -5875,7 +5432,7 @@
     </p:spTree>
     <p:extLst>
       <p:ext uri="{BB962C8B-B14F-4D97-AF65-F5344CB8AC3E}">
-        <p14:creationId xmlns:p14="http://schemas.microsoft.com/office/powerpoint/2010/main" val="1823551246"/>
+        <p14:creationId xmlns:p14="http://schemas.microsoft.com/office/powerpoint/2010/main" val="1242260331"/>
       </p:ext>
     </p:extLst>
   </p:cSld>
@@ -5943,7 +5500,7 @@
           <a:p>
             <a:r>
               <a:rPr lang="en-US" dirty="0"/>
-              <a:t>9.5.5 – Marking at Layer 2</a:t>
+              <a:t>9.5.4 – Classification and Marking (Cont.)</a:t>
             </a:r>
           </a:p>
         </p:txBody>
@@ -5965,7 +5522,7 @@
           <a:p>
             <a:fld id="{5641018C-6CAF-B84E-B92C-ECB119457FBA}" type="slidenum">
               <a:rPr lang="en-US" smtClean="0"/>
-              <a:t>39</a:t>
+              <a:t>38</a:t>
             </a:fld>
             <a:endParaRPr lang="en-US" dirty="0"/>
           </a:p>
@@ -5974,7 +5531,7 @@
     </p:spTree>
     <p:extLst>
       <p:ext uri="{BB962C8B-B14F-4D97-AF65-F5344CB8AC3E}">
-        <p14:creationId xmlns:p14="http://schemas.microsoft.com/office/powerpoint/2010/main" val="4119606"/>
+        <p14:creationId xmlns:p14="http://schemas.microsoft.com/office/powerpoint/2010/main" val="1823551246"/>
       </p:ext>
     </p:extLst>
   </p:cSld>
@@ -6042,7 +5599,7 @@
           <a:p>
             <a:r>
               <a:rPr lang="en-US" dirty="0"/>
-              <a:t>9.5.5 – Marking at Layer 2 (Cont.)</a:t>
+              <a:t>9.5.5 – Marking at Layer 2</a:t>
             </a:r>
           </a:p>
         </p:txBody>
@@ -6064,7 +5621,7 @@
           <a:p>
             <a:fld id="{5641018C-6CAF-B84E-B92C-ECB119457FBA}" type="slidenum">
               <a:rPr lang="en-US" smtClean="0"/>
-              <a:t>40</a:t>
+              <a:t>39</a:t>
             </a:fld>
             <a:endParaRPr lang="en-US" dirty="0"/>
           </a:p>
@@ -6073,7 +5630,7 @@
     </p:spTree>
     <p:extLst>
       <p:ext uri="{BB962C8B-B14F-4D97-AF65-F5344CB8AC3E}">
-        <p14:creationId xmlns:p14="http://schemas.microsoft.com/office/powerpoint/2010/main" val="893850786"/>
+        <p14:creationId xmlns:p14="http://schemas.microsoft.com/office/powerpoint/2010/main" val="4119606"/>
       </p:ext>
     </p:extLst>
   </p:cSld>
@@ -6141,7 +5698,7 @@
           <a:p>
             <a:r>
               <a:rPr lang="en-US" dirty="0"/>
-              <a:t>9.5.6 – Marking at Layer 3</a:t>
+              <a:t>9.5.5 – Marking at Layer 2 (Cont.)</a:t>
             </a:r>
           </a:p>
         </p:txBody>
@@ -6163,7 +5720,7 @@
           <a:p>
             <a:fld id="{5641018C-6CAF-B84E-B92C-ECB119457FBA}" type="slidenum">
               <a:rPr lang="en-US" smtClean="0"/>
-              <a:t>41</a:t>
+              <a:t>40</a:t>
             </a:fld>
             <a:endParaRPr lang="en-US" dirty="0"/>
           </a:p>
@@ -6172,7 +5729,7 @@
     </p:spTree>
     <p:extLst>
       <p:ext uri="{BB962C8B-B14F-4D97-AF65-F5344CB8AC3E}">
-        <p14:creationId xmlns:p14="http://schemas.microsoft.com/office/powerpoint/2010/main" val="914910061"/>
+        <p14:creationId xmlns:p14="http://schemas.microsoft.com/office/powerpoint/2010/main" val="893850786"/>
       </p:ext>
     </p:extLst>
   </p:cSld>
@@ -6240,7 +5797,7 @@
           <a:p>
             <a:r>
               <a:rPr lang="en-US" dirty="0"/>
-              <a:t>9.5.7 – Type of Service and Traffic Class Field</a:t>
+              <a:t>9.5.6 – Marking at Layer 3</a:t>
             </a:r>
           </a:p>
         </p:txBody>
@@ -6262,7 +5819,7 @@
           <a:p>
             <a:fld id="{5641018C-6CAF-B84E-B92C-ECB119457FBA}" type="slidenum">
               <a:rPr lang="en-US" smtClean="0"/>
-              <a:t>42</a:t>
+              <a:t>41</a:t>
             </a:fld>
             <a:endParaRPr lang="en-US" dirty="0"/>
           </a:p>
@@ -6271,7 +5828,7 @@
     </p:spTree>
     <p:extLst>
       <p:ext uri="{BB962C8B-B14F-4D97-AF65-F5344CB8AC3E}">
-        <p14:creationId xmlns:p14="http://schemas.microsoft.com/office/powerpoint/2010/main" val="1170062344"/>
+        <p14:creationId xmlns:p14="http://schemas.microsoft.com/office/powerpoint/2010/main" val="914910061"/>
       </p:ext>
     </p:extLst>
   </p:cSld>
@@ -6438,7 +5995,7 @@
           <a:p>
             <a:r>
               <a:rPr lang="en-US" dirty="0"/>
-              <a:t>9.5.8 – DSCP Values</a:t>
+              <a:t>9.5.7 – Type of Service and Traffic Class Field</a:t>
             </a:r>
           </a:p>
         </p:txBody>
@@ -6460,7 +6017,7 @@
           <a:p>
             <a:fld id="{5641018C-6CAF-B84E-B92C-ECB119457FBA}" type="slidenum">
               <a:rPr lang="en-US" smtClean="0"/>
-              <a:t>43</a:t>
+              <a:t>42</a:t>
             </a:fld>
             <a:endParaRPr lang="en-US" dirty="0"/>
           </a:p>
@@ -6469,7 +6026,7 @@
     </p:spTree>
     <p:extLst>
       <p:ext uri="{BB962C8B-B14F-4D97-AF65-F5344CB8AC3E}">
-        <p14:creationId xmlns:p14="http://schemas.microsoft.com/office/powerpoint/2010/main" val="3996942163"/>
+        <p14:creationId xmlns:p14="http://schemas.microsoft.com/office/powerpoint/2010/main" val="1170062344"/>
       </p:ext>
     </p:extLst>
   </p:cSld>
@@ -6537,7 +6094,7 @@
           <a:p>
             <a:r>
               <a:rPr lang="en-US" dirty="0"/>
-              <a:t>9.5.8 – DSCP Values (Cont.)</a:t>
+              <a:t>9.5.8 – DSCP Values</a:t>
             </a:r>
           </a:p>
         </p:txBody>
@@ -6559,7 +6116,7 @@
           <a:p>
             <a:fld id="{5641018C-6CAF-B84E-B92C-ECB119457FBA}" type="slidenum">
               <a:rPr lang="en-US" smtClean="0"/>
-              <a:t>44</a:t>
+              <a:t>43</a:t>
             </a:fld>
             <a:endParaRPr lang="en-US" dirty="0"/>
           </a:p>
@@ -6568,7 +6125,7 @@
     </p:spTree>
     <p:extLst>
       <p:ext uri="{BB962C8B-B14F-4D97-AF65-F5344CB8AC3E}">
-        <p14:creationId xmlns:p14="http://schemas.microsoft.com/office/powerpoint/2010/main" val="2866211152"/>
+        <p14:creationId xmlns:p14="http://schemas.microsoft.com/office/powerpoint/2010/main" val="3996942163"/>
       </p:ext>
     </p:extLst>
   </p:cSld>
@@ -6636,7 +6193,7 @@
           <a:p>
             <a:r>
               <a:rPr lang="en-US" dirty="0"/>
-              <a:t>9.5.9 – Class Selector Bits</a:t>
+              <a:t>9.5.8 – DSCP Values (Cont.)</a:t>
             </a:r>
           </a:p>
         </p:txBody>
@@ -6658,7 +6215,7 @@
           <a:p>
             <a:fld id="{5641018C-6CAF-B84E-B92C-ECB119457FBA}" type="slidenum">
               <a:rPr lang="en-US" smtClean="0"/>
-              <a:t>45</a:t>
+              <a:t>44</a:t>
             </a:fld>
             <a:endParaRPr lang="en-US" dirty="0"/>
           </a:p>
@@ -6667,7 +6224,7 @@
     </p:spTree>
     <p:extLst>
       <p:ext uri="{BB962C8B-B14F-4D97-AF65-F5344CB8AC3E}">
-        <p14:creationId xmlns:p14="http://schemas.microsoft.com/office/powerpoint/2010/main" val="1164385777"/>
+        <p14:creationId xmlns:p14="http://schemas.microsoft.com/office/powerpoint/2010/main" val="2866211152"/>
       </p:ext>
     </p:extLst>
   </p:cSld>
@@ -6735,7 +6292,7 @@
           <a:p>
             <a:r>
               <a:rPr lang="en-US" dirty="0"/>
-              <a:t>9.5.10 – Trust Boundaries</a:t>
+              <a:t>9.5.9 – Class Selector Bits</a:t>
             </a:r>
           </a:p>
         </p:txBody>
@@ -6757,7 +6314,7 @@
           <a:p>
             <a:fld id="{5641018C-6CAF-B84E-B92C-ECB119457FBA}" type="slidenum">
               <a:rPr lang="en-US" smtClean="0"/>
-              <a:t>46</a:t>
+              <a:t>45</a:t>
             </a:fld>
             <a:endParaRPr lang="en-US" dirty="0"/>
           </a:p>
@@ -6766,7 +6323,7 @@
     </p:spTree>
     <p:extLst>
       <p:ext uri="{BB962C8B-B14F-4D97-AF65-F5344CB8AC3E}">
-        <p14:creationId xmlns:p14="http://schemas.microsoft.com/office/powerpoint/2010/main" val="1830460908"/>
+        <p14:creationId xmlns:p14="http://schemas.microsoft.com/office/powerpoint/2010/main" val="1164385777"/>
       </p:ext>
     </p:extLst>
   </p:cSld>
@@ -6834,7 +6391,7 @@
           <a:p>
             <a:r>
               <a:rPr lang="en-US" dirty="0"/>
-              <a:t>9.5.11 – Congestion Avoidance</a:t>
+              <a:t>9.5.10 – Trust Boundaries</a:t>
             </a:r>
           </a:p>
         </p:txBody>
@@ -6856,7 +6413,7 @@
           <a:p>
             <a:fld id="{5641018C-6CAF-B84E-B92C-ECB119457FBA}" type="slidenum">
               <a:rPr lang="en-US" smtClean="0"/>
-              <a:t>47</a:t>
+              <a:t>46</a:t>
             </a:fld>
             <a:endParaRPr lang="en-US" dirty="0"/>
           </a:p>
@@ -6865,7 +6422,7 @@
     </p:spTree>
     <p:extLst>
       <p:ext uri="{BB962C8B-B14F-4D97-AF65-F5344CB8AC3E}">
-        <p14:creationId xmlns:p14="http://schemas.microsoft.com/office/powerpoint/2010/main" val="1560570667"/>
+        <p14:creationId xmlns:p14="http://schemas.microsoft.com/office/powerpoint/2010/main" val="1830460908"/>
       </p:ext>
     </p:extLst>
   </p:cSld>
@@ -6933,7 +6490,7 @@
           <a:p>
             <a:r>
               <a:rPr lang="en-US" dirty="0"/>
-              <a:t>9.5.12 – Shaping and Policing</a:t>
+              <a:t>9.5.11 – Congestion Avoidance</a:t>
             </a:r>
           </a:p>
         </p:txBody>
@@ -6955,7 +6512,7 @@
           <a:p>
             <a:fld id="{5641018C-6CAF-B84E-B92C-ECB119457FBA}" type="slidenum">
               <a:rPr lang="en-US" smtClean="0"/>
-              <a:t>48</a:t>
+              <a:t>47</a:t>
             </a:fld>
             <a:endParaRPr lang="en-US" dirty="0"/>
           </a:p>
@@ -6964,7 +6521,7 @@
     </p:spTree>
     <p:extLst>
       <p:ext uri="{BB962C8B-B14F-4D97-AF65-F5344CB8AC3E}">
-        <p14:creationId xmlns:p14="http://schemas.microsoft.com/office/powerpoint/2010/main" val="1458218258"/>
+        <p14:creationId xmlns:p14="http://schemas.microsoft.com/office/powerpoint/2010/main" val="1560570667"/>
       </p:ext>
     </p:extLst>
   </p:cSld>
@@ -7032,7 +6589,7 @@
           <a:p>
             <a:r>
               <a:rPr lang="en-US" dirty="0"/>
-              <a:t>9.5.12 – Shaping and Policing (Cont.)</a:t>
+              <a:t>9.5.12 – Shaping and Policing</a:t>
             </a:r>
           </a:p>
         </p:txBody>
@@ -7054,7 +6611,7 @@
           <a:p>
             <a:fld id="{5641018C-6CAF-B84E-B92C-ECB119457FBA}" type="slidenum">
               <a:rPr lang="en-US" smtClean="0"/>
-              <a:t>49</a:t>
+              <a:t>48</a:t>
             </a:fld>
             <a:endParaRPr lang="en-US" dirty="0"/>
           </a:p>
@@ -7063,7 +6620,7 @@
     </p:spTree>
     <p:extLst>
       <p:ext uri="{BB962C8B-B14F-4D97-AF65-F5344CB8AC3E}">
-        <p14:creationId xmlns:p14="http://schemas.microsoft.com/office/powerpoint/2010/main" val="1928511139"/>
+        <p14:creationId xmlns:p14="http://schemas.microsoft.com/office/powerpoint/2010/main" val="1458218258"/>
       </p:ext>
     </p:extLst>
   </p:cSld>
@@ -7131,13 +6688,7 @@
           <a:p>
             <a:r>
               <a:rPr lang="en-US" dirty="0"/>
-              <a:t>9.5.13 – QoS Policy Guidelines</a:t>
-            </a:r>
-          </a:p>
-          <a:p>
-            <a:r>
-              <a:rPr lang="en-US" dirty="0"/>
-              <a:t>9.5.14 – Check Your Understanding – QoS Implementation Techniques</a:t>
+              <a:t>9.5.12 – Shaping and Policing (Cont.)</a:t>
             </a:r>
           </a:p>
         </p:txBody>
@@ -7159,6 +6710,111 @@
           <a:p>
             <a:fld id="{5641018C-6CAF-B84E-B92C-ECB119457FBA}" type="slidenum">
               <a:rPr lang="en-US" smtClean="0"/>
+              <a:t>49</a:t>
+            </a:fld>
+            <a:endParaRPr lang="en-US" dirty="0"/>
+          </a:p>
+        </p:txBody>
+      </p:sp>
+    </p:spTree>
+    <p:extLst>
+      <p:ext uri="{BB962C8B-B14F-4D97-AF65-F5344CB8AC3E}">
+        <p14:creationId xmlns:p14="http://schemas.microsoft.com/office/powerpoint/2010/main" val="1928511139"/>
+      </p:ext>
+    </p:extLst>
+  </p:cSld>
+  <p:clrMapOvr>
+    <a:masterClrMapping/>
+  </p:clrMapOvr>
+</p:notes>
+</file>
+
+<file path=ppt/notesSlides/notesSlide48.xml><?xml version="1.0" encoding="utf-8"?>
+<p:notes xmlns:a="http://schemas.openxmlformats.org/drawingml/2006/main" xmlns:r="http://schemas.openxmlformats.org/officeDocument/2006/relationships" xmlns:p="http://schemas.openxmlformats.org/presentationml/2006/main">
+  <p:cSld>
+    <p:spTree>
+      <p:nvGrpSpPr>
+        <p:cNvPr id="1" name=""/>
+        <p:cNvGrpSpPr/>
+        <p:nvPr/>
+      </p:nvGrpSpPr>
+      <p:grpSpPr>
+        <a:xfrm>
+          <a:off x="0" y="0"/>
+          <a:ext cx="0" cy="0"/>
+          <a:chOff x="0" y="0"/>
+          <a:chExt cx="0" cy="0"/>
+        </a:xfrm>
+      </p:grpSpPr>
+      <p:sp>
+        <p:nvSpPr>
+          <p:cNvPr id="2" name="Slide Image Placeholder 1"/>
+          <p:cNvSpPr>
+            <a:spLocks noGrp="1" noRot="1" noChangeAspect="1"/>
+          </p:cNvSpPr>
+          <p:nvPr>
+            <p:ph type="sldImg"/>
+          </p:nvPr>
+        </p:nvSpPr>
+        <p:spPr/>
+      </p:sp>
+      <p:sp>
+        <p:nvSpPr>
+          <p:cNvPr id="3" name="Notes Placeholder 2"/>
+          <p:cNvSpPr>
+            <a:spLocks noGrp="1"/>
+          </p:cNvSpPr>
+          <p:nvPr>
+            <p:ph type="body" idx="1"/>
+          </p:nvPr>
+        </p:nvSpPr>
+        <p:spPr/>
+        <p:txBody>
+          <a:bodyPr/>
+          <a:lstStyle/>
+          <a:p>
+            <a:r>
+              <a:rPr lang="en-US" dirty="0"/>
+              <a:t>9 - QoS Concepts</a:t>
+            </a:r>
+          </a:p>
+          <a:p>
+            <a:r>
+              <a:rPr lang="en-US" dirty="0"/>
+              <a:t>9.5 – QoS Implementation Techniques</a:t>
+            </a:r>
+          </a:p>
+          <a:p>
+            <a:r>
+              <a:rPr lang="en-US" dirty="0"/>
+              <a:t>9.5.13 – QoS Policy Guidelines</a:t>
+            </a:r>
+          </a:p>
+          <a:p>
+            <a:r>
+              <a:rPr lang="en-US" dirty="0"/>
+              <a:t>9.5.14 – Check Your Understanding – QoS Implementation Techniques</a:t>
+            </a:r>
+          </a:p>
+        </p:txBody>
+      </p:sp>
+      <p:sp>
+        <p:nvSpPr>
+          <p:cNvPr id="4" name="Slide Number Placeholder 3"/>
+          <p:cNvSpPr>
+            <a:spLocks noGrp="1"/>
+          </p:cNvSpPr>
+          <p:nvPr>
+            <p:ph type="sldNum" sz="quarter" idx="5"/>
+          </p:nvPr>
+        </p:nvSpPr>
+        <p:spPr/>
+        <p:txBody>
+          <a:bodyPr/>
+          <a:lstStyle/>
+          <a:p>
+            <a:fld id="{5641018C-6CAF-B84E-B92C-ECB119457FBA}" type="slidenum">
+              <a:rPr lang="en-US" smtClean="0"/>
               <a:t>51</a:t>
             </a:fld>
             <a:endParaRPr lang="en-US" dirty="0"/>
@@ -7178,7 +6834,7 @@
 </p:notes>
 </file>
 
-<file path=ppt/notesSlides/notesSlide48.xml><?xml version="1.0" encoding="utf-8"?>
+<file path=ppt/notesSlides/notesSlide49.xml><?xml version="1.0" encoding="utf-8"?>
 <p:notes xmlns:a="http://schemas.openxmlformats.org/drawingml/2006/main" xmlns:r="http://schemas.openxmlformats.org/officeDocument/2006/relationships" xmlns:p="http://schemas.openxmlformats.org/presentationml/2006/main">
   <p:cSld>
     <p:spTree>
@@ -7683,7 +7339,7 @@
       </p:grpSpPr>
       <p:sp>
         <p:nvSpPr>
-          <p:cNvPr id="2" name="Slide Image Placeholder 1"/>
+          <p:cNvPr id="2" name="Zástupný objekt pre obrázok snímky 1"/>
           <p:cNvSpPr>
             <a:spLocks noGrp="1" noRot="1" noChangeAspect="1"/>
           </p:cNvSpPr>
@@ -7695,7 +7351,7 @@
       </p:sp>
       <p:sp>
         <p:nvSpPr>
-          <p:cNvPr id="3" name="Notes Placeholder 2"/>
+          <p:cNvPr id="3" name="Zástupný objekt pre poznámky 2"/>
           <p:cNvSpPr>
             <a:spLocks noGrp="1"/>
           </p:cNvSpPr>
@@ -7708,30 +7364,18 @@
           <a:bodyPr/>
           <a:lstStyle/>
           <a:p>
-            <a:r>
-              <a:rPr lang="en-US" dirty="0"/>
-              <a:t>9 - QoS Concepts</a:t>
-            </a:r>
-          </a:p>
-          <a:p>
-            <a:r>
-              <a:rPr lang="en-US" dirty="0"/>
-              <a:t>9.2 – Traffic Characteristics</a:t>
-            </a:r>
-          </a:p>
-          <a:p>
-            <a:endParaRPr lang="en-US" dirty="0"/>
+            <a:endParaRPr lang="sk-SK" dirty="0"/>
           </a:p>
         </p:txBody>
       </p:sp>
       <p:sp>
         <p:nvSpPr>
-          <p:cNvPr id="4" name="Slide Number Placeholder 3"/>
+          <p:cNvPr id="4" name="Zástupný objekt pre číslo snímky 3"/>
           <p:cNvSpPr>
             <a:spLocks noGrp="1"/>
           </p:cNvSpPr>
           <p:nvPr>
-            <p:ph type="sldNum" sz="quarter" idx="10"/>
+            <p:ph type="sldNum" sz="quarter" idx="5"/>
           </p:nvPr>
         </p:nvSpPr>
         <p:spPr/>
@@ -7741,7 +7385,7 @@
           <a:p>
             <a:fld id="{5641018C-6CAF-B84E-B92C-ECB119457FBA}" type="slidenum">
               <a:rPr lang="en-US" smtClean="0"/>
-              <a:t>10</a:t>
+              <a:t>9</a:t>
             </a:fld>
             <a:endParaRPr lang="en-US" dirty="0"/>
           </a:p>
@@ -7750,7 +7394,7 @@
     </p:spTree>
     <p:extLst>
       <p:ext uri="{BB962C8B-B14F-4D97-AF65-F5344CB8AC3E}">
-        <p14:creationId xmlns:p14="http://schemas.microsoft.com/office/powerpoint/2010/main" val="3963291078"/>
+        <p14:creationId xmlns:p14="http://schemas.microsoft.com/office/powerpoint/2010/main" val="3443101051"/>
       </p:ext>
     </p:extLst>
   </p:cSld>
@@ -31304,13 +30948,13 @@
           <p:nvPr>
             <p:extLst>
               <p:ext uri="{D42A27DB-BD31-4B8C-83A1-F6EECF244321}">
-                <p14:modId xmlns:p14="http://schemas.microsoft.com/office/powerpoint/2010/main" val="4132998969"/>
+                <p14:modId xmlns:p14="http://schemas.microsoft.com/office/powerpoint/2010/main" val="1841625517"/>
               </p:ext>
             </p:extLst>
           </p:nvPr>
         </p:nvGraphicFramePr>
         <p:xfrm>
-          <a:off x="1894061" y="3386890"/>
+          <a:off x="1894061" y="3247993"/>
           <a:ext cx="5355878" cy="1514794"/>
         </p:xfrm>
         <a:graphic>
@@ -31591,6 +31235,185 @@
                 <a:extLst>
                   <a:ext uri="{0D108BD9-81ED-4DB2-BD59-A6C34878D82A}">
                     <a16:rowId xmlns:a16="http://schemas.microsoft.com/office/drawing/2014/main" val="3849654457"/>
+                  </a:ext>
+                </a:extLst>
+              </a:tr>
+            </a:tbl>
+          </a:graphicData>
+        </a:graphic>
+      </p:graphicFrame>
+      <p:graphicFrame>
+        <p:nvGraphicFramePr>
+          <p:cNvPr id="5" name="Tabuľka 4">
+            <a:extLst>
+              <a:ext uri="{FF2B5EF4-FFF2-40B4-BE49-F238E27FC236}">
+                <a16:creationId xmlns:a16="http://schemas.microsoft.com/office/drawing/2014/main" id="{377E5E56-F50E-7078-5180-C34BB8A89EBC}"/>
+              </a:ext>
+            </a:extLst>
+          </p:cNvPr>
+          <p:cNvGraphicFramePr>
+            <a:graphicFrameLocks noGrp="1"/>
+          </p:cNvGraphicFramePr>
+          <p:nvPr>
+            <p:extLst>
+              <p:ext uri="{D42A27DB-BD31-4B8C-83A1-F6EECF244321}">
+                <p14:modId xmlns:p14="http://schemas.microsoft.com/office/powerpoint/2010/main" val="1129535627"/>
+              </p:ext>
+            </p:extLst>
+          </p:nvPr>
+        </p:nvGraphicFramePr>
+        <p:xfrm>
+          <a:off x="1808545" y="4771757"/>
+          <a:ext cx="5526910" cy="365760"/>
+        </p:xfrm>
+        <a:graphic>
+          <a:graphicData uri="http://schemas.openxmlformats.org/drawingml/2006/table">
+            <a:tbl>
+              <a:tblPr>
+                <a:tableStyleId>{5C22544A-7EE6-4342-B048-85BDC9FD1C3A}</a:tableStyleId>
+              </a:tblPr>
+              <a:tblGrid>
+                <a:gridCol w="1105382">
+                  <a:extLst>
+                    <a:ext uri="{9D8B030D-6E8A-4147-A177-3AD203B41FA5}">
+                      <a16:colId xmlns:a16="http://schemas.microsoft.com/office/drawing/2014/main" val="1934222890"/>
+                    </a:ext>
+                  </a:extLst>
+                </a:gridCol>
+                <a:gridCol w="1105382">
+                  <a:extLst>
+                    <a:ext uri="{9D8B030D-6E8A-4147-A177-3AD203B41FA5}">
+                      <a16:colId xmlns:a16="http://schemas.microsoft.com/office/drawing/2014/main" val="2814369715"/>
+                    </a:ext>
+                  </a:extLst>
+                </a:gridCol>
+                <a:gridCol w="1105382">
+                  <a:extLst>
+                    <a:ext uri="{9D8B030D-6E8A-4147-A177-3AD203B41FA5}">
+                      <a16:colId xmlns:a16="http://schemas.microsoft.com/office/drawing/2014/main" val="3413501852"/>
+                    </a:ext>
+                  </a:extLst>
+                </a:gridCol>
+                <a:gridCol w="1105382">
+                  <a:extLst>
+                    <a:ext uri="{9D8B030D-6E8A-4147-A177-3AD203B41FA5}">
+                      <a16:colId xmlns:a16="http://schemas.microsoft.com/office/drawing/2014/main" val="3063179247"/>
+                    </a:ext>
+                  </a:extLst>
+                </a:gridCol>
+                <a:gridCol w="1105382">
+                  <a:extLst>
+                    <a:ext uri="{9D8B030D-6E8A-4147-A177-3AD203B41FA5}">
+                      <a16:colId xmlns:a16="http://schemas.microsoft.com/office/drawing/2014/main" val="1284209300"/>
+                    </a:ext>
+                  </a:extLst>
+                </a:gridCol>
+              </a:tblGrid>
+              <a:tr h="0">
+                <a:tc>
+                  <a:txBody>
+                    <a:bodyPr/>
+                    <a:lstStyle/>
+                    <a:p>
+                      <a:pPr>
+                        <a:buNone/>
+                      </a:pPr>
+                      <a:r>
+                        <a:rPr lang="sk-SK" sz="900" b="1" dirty="0"/>
+                        <a:t>4K </a:t>
+                      </a:r>
+                      <a:r>
+                        <a:rPr lang="sk-SK" sz="900" b="1" dirty="0" err="1"/>
+                        <a:t>from</a:t>
+                      </a:r>
+                      <a:r>
+                        <a:rPr lang="sk-SK" sz="900" b="1" dirty="0"/>
+                        <a:t> </a:t>
+                      </a:r>
+                      <a:r>
+                        <a:rPr lang="sk-SK" sz="900" b="1" dirty="0" err="1"/>
+                        <a:t>camera</a:t>
+                      </a:r>
+                      <a:r>
+                        <a:rPr lang="sk-SK" sz="900" b="1" dirty="0"/>
+                        <a:t> or </a:t>
+                      </a:r>
+                      <a:r>
+                        <a:rPr lang="sk-SK" sz="900" b="1" dirty="0" err="1"/>
+                        <a:t>drone</a:t>
+                      </a:r>
+                      <a:endParaRPr lang="sk-SK" sz="900" b="1" dirty="0"/>
+                    </a:p>
+                  </a:txBody>
+                  <a:tcPr anchor="ctr"/>
+                </a:tc>
+                <a:tc>
+                  <a:txBody>
+                    <a:bodyPr/>
+                    <a:lstStyle/>
+                    <a:p>
+                      <a:pPr>
+                        <a:buNone/>
+                      </a:pPr>
+                      <a:r>
+                        <a:rPr lang="sk-SK" sz="900" b="1" dirty="0"/>
+                        <a:t>H.264/HEVC</a:t>
+                      </a:r>
+                    </a:p>
+                  </a:txBody>
+                  <a:tcPr anchor="ctr"/>
+                </a:tc>
+                <a:tc>
+                  <a:txBody>
+                    <a:bodyPr/>
+                    <a:lstStyle/>
+                    <a:p>
+                      <a:pPr>
+                        <a:buNone/>
+                      </a:pPr>
+                      <a:r>
+                        <a:rPr lang="sk-SK" sz="900" b="1" dirty="0"/>
+                        <a:t>Min. 50 Mb/s</a:t>
+                      </a:r>
+                    </a:p>
+                  </a:txBody>
+                  <a:tcPr anchor="ctr"/>
+                </a:tc>
+                <a:tc>
+                  <a:txBody>
+                    <a:bodyPr/>
+                    <a:lstStyle/>
+                    <a:p>
+                      <a:pPr>
+                        <a:buNone/>
+                      </a:pPr>
+                      <a:r>
+                        <a:rPr lang="sk-SK" sz="900" b="1" dirty="0"/>
+                        <a:t>Typ. 100 Mb/s</a:t>
+                      </a:r>
+                    </a:p>
+                  </a:txBody>
+                  <a:tcPr anchor="ctr"/>
+                </a:tc>
+                <a:tc>
+                  <a:txBody>
+                    <a:bodyPr/>
+                    <a:lstStyle/>
+                    <a:p>
+                      <a:pPr>
+                        <a:buNone/>
+                      </a:pPr>
+                      <a:r>
+                        <a:rPr lang="sk-SK" sz="900" b="1" dirty="0"/>
+                        <a:t>Max. 150 až 400 Mb/s</a:t>
+                      </a:r>
+                    </a:p>
+                  </a:txBody>
+                  <a:tcPr anchor="ctr"/>
+                </a:tc>
+                <a:extLst>
+                  <a:ext uri="{0D108BD9-81ED-4DB2-BD59-A6C34878D82A}">
+                    <a16:rowId xmlns:a16="http://schemas.microsoft.com/office/drawing/2014/main" val="3207000045"/>
                   </a:ext>
                 </a:extLst>
               </a:tr>
@@ -41373,6 +41196,123 @@
           </a:p>
         </p:txBody>
       </p:sp>
+      <p:graphicFrame>
+        <p:nvGraphicFramePr>
+          <p:cNvPr id="8" name="Tabuľka 7">
+            <a:extLst>
+              <a:ext uri="{FF2B5EF4-FFF2-40B4-BE49-F238E27FC236}">
+                <a16:creationId xmlns:a16="http://schemas.microsoft.com/office/drawing/2014/main" id="{30F9716F-6786-419A-8579-620C72D96BD8}"/>
+              </a:ext>
+            </a:extLst>
+          </p:cNvPr>
+          <p:cNvGraphicFramePr>
+            <a:graphicFrameLocks noGrp="1"/>
+          </p:cNvGraphicFramePr>
+          <p:nvPr>
+            <p:extLst>
+              <p:ext uri="{D42A27DB-BD31-4B8C-83A1-F6EECF244321}">
+                <p14:modId xmlns:p14="http://schemas.microsoft.com/office/powerpoint/2010/main" val="1949432806"/>
+              </p:ext>
+            </p:extLst>
+          </p:nvPr>
+        </p:nvGraphicFramePr>
+        <p:xfrm>
+          <a:off x="0" y="4669244"/>
+          <a:ext cx="4813187" cy="396240"/>
+        </p:xfrm>
+        <a:graphic>
+          <a:graphicData uri="http://schemas.openxmlformats.org/drawingml/2006/table">
+            <a:tbl>
+              <a:tblPr>
+                <a:tableStyleId>{5C22544A-7EE6-4342-B048-85BDC9FD1C3A}</a:tableStyleId>
+              </a:tblPr>
+              <a:tblGrid>
+                <a:gridCol w="789861">
+                  <a:extLst>
+                    <a:ext uri="{9D8B030D-6E8A-4147-A177-3AD203B41FA5}">
+                      <a16:colId xmlns:a16="http://schemas.microsoft.com/office/drawing/2014/main" val="1042805125"/>
+                    </a:ext>
+                  </a:extLst>
+                </a:gridCol>
+                <a:gridCol w="644967">
+                  <a:extLst>
+                    <a:ext uri="{9D8B030D-6E8A-4147-A177-3AD203B41FA5}">
+                      <a16:colId xmlns:a16="http://schemas.microsoft.com/office/drawing/2014/main" val="1533144728"/>
+                    </a:ext>
+                  </a:extLst>
+                </a:gridCol>
+                <a:gridCol w="3378359">
+                  <a:extLst>
+                    <a:ext uri="{9D8B030D-6E8A-4147-A177-3AD203B41FA5}">
+                      <a16:colId xmlns:a16="http://schemas.microsoft.com/office/drawing/2014/main" val="1513137977"/>
+                    </a:ext>
+                  </a:extLst>
+                </a:gridCol>
+              </a:tblGrid>
+              <a:tr h="0">
+                <a:tc>
+                  <a:txBody>
+                    <a:bodyPr/>
+                    <a:lstStyle/>
+                    <a:p>
+                      <a:pPr>
+                        <a:buNone/>
+                      </a:pPr>
+                      <a:r>
+                        <a:rPr lang="sk-SK" sz="1000"/>
+                        <a:t>TPID</a:t>
+                      </a:r>
+                    </a:p>
+                  </a:txBody>
+                  <a:tcPr anchor="ctr"/>
+                </a:tc>
+                <a:tc>
+                  <a:txBody>
+                    <a:bodyPr/>
+                    <a:lstStyle/>
+                    <a:p>
+                      <a:pPr>
+                        <a:buNone/>
+                      </a:pPr>
+                      <a:r>
+                        <a:rPr lang="sk-SK" sz="1000" dirty="0"/>
+                        <a:t>16 bitov</a:t>
+                      </a:r>
+                    </a:p>
+                  </a:txBody>
+                  <a:tcPr anchor="ctr"/>
+                </a:tc>
+                <a:tc>
+                  <a:txBody>
+                    <a:bodyPr/>
+                    <a:lstStyle/>
+                    <a:p>
+                      <a:pPr>
+                        <a:buNone/>
+                      </a:pPr>
+                      <a:r>
+                        <a:rPr lang="sk-SK" sz="1000" dirty="0"/>
+                        <a:t>Pevná hodnota 0x8100, označuje rámec ako 802.1Q. Na tomto mieste by inak bol </a:t>
+                      </a:r>
+                      <a:r>
+                        <a:rPr lang="sk-SK" sz="1000" dirty="0" err="1"/>
+                        <a:t>EtherType</a:t>
+                      </a:r>
+                      <a:endParaRPr lang="sk-SK" sz="1000" dirty="0"/>
+                    </a:p>
+                  </a:txBody>
+                  <a:tcPr anchor="ctr"/>
+                </a:tc>
+                <a:extLst>
+                  <a:ext uri="{0D108BD9-81ED-4DB2-BD59-A6C34878D82A}">
+                    <a16:rowId xmlns:a16="http://schemas.microsoft.com/office/drawing/2014/main" val="1314529495"/>
+                  </a:ext>
+                </a:extLst>
+              </a:tr>
+            </a:tbl>
+          </a:graphicData>
+        </a:graphic>
+      </p:graphicFrame>
     </p:spTree>
     <p:extLst>
       <p:ext uri="{BB962C8B-B14F-4D97-AF65-F5344CB8AC3E}">
@@ -44400,7 +44340,23 @@
                   <a:srgbClr val="000000"/>
                 </a:solidFill>
               </a:rPr>
-              <a:t>Network congestion causes delay. An interface experiences congestion when it is presented with more traffic than it can handle. Network congestion points are ideal candidates for QoS mechanisms.</a:t>
+              <a:t>Network congestion causes delay. An interface experiences congestion when it is presented with more traffic than it can handle. </a:t>
+            </a:r>
+            <a:r>
+              <a:rPr lang="en-US" sz="1400" u="sng" dirty="0">
+                <a:solidFill>
+                  <a:srgbClr val="000000"/>
+                </a:solidFill>
+              </a:rPr>
+              <a:t>Network congestion points are ideal candidates for QoS mechanisms</a:t>
+            </a:r>
+            <a:r>
+              <a:rPr lang="en-US" sz="1400" dirty="0">
+                <a:solidFill>
+                  <a:srgbClr val="000000"/>
+                </a:solidFill>
+              </a:rPr>
+              <a:t>.</a:t>
             </a:r>
           </a:p>
           <a:p>
@@ -45551,8 +45507,8 @@
           <a:chExt cx="0" cy="0"/>
         </a:xfrm>
       </p:grpSpPr>
-      <mc:AlternateContent xmlns:mc="http://schemas.openxmlformats.org/markup-compatibility/2006">
-        <mc:Choice xmlns:we="http://schemas.microsoft.com/office/webextensions/webextension/2010/11" xmlns:pca="http://schemas.microsoft.com/office/powerpoint/2013/contentapp" Requires="we pca">
+      <mc:AlternateContent xmlns:mc="http://schemas.openxmlformats.org/markup-compatibility/2006" xmlns:we="http://schemas.microsoft.com/office/webextensions/webextension/2010/11" xmlns:pca="http://schemas.microsoft.com/office/powerpoint/2013/contentapp">
+        <mc:Choice Requires="we pca">
           <p:graphicFrame>
             <p:nvGraphicFramePr>
               <p:cNvPr id="4" name="Zástupný objekt pre obsah 3">
@@ -45585,7 +45541,7 @@
             </a:graphic>
           </p:graphicFrame>
         </mc:Choice>
-        <mc:Fallback>
+        <mc:Fallback xmlns="">
           <p:pic>
             <p:nvPicPr>
               <p:cNvPr id="4" name="Zástupný objekt pre obsah 3">
@@ -46621,7 +46577,7 @@
             </p:xfrm>
             <a:graphic>
               <a:graphicData uri="http://schemas.microsoft.com/office/webextensions/webextension/2010/11">
-                <we:webextensionref xmlns:we="http://schemas.microsoft.com/office/webextensions/webextension/2010/11" xmlns:r="http://schemas.openxmlformats.org/officeDocument/2006/relationships" r:id="rId2"/>
+                <we:webextensionref xmlns:we="http://schemas.microsoft.com/office/webextensions/webextension/2010/11" xmlns:r="http://schemas.openxmlformats.org/officeDocument/2006/relationships" r:id="rId3"/>
               </a:graphicData>
             </a:graphic>
           </p:graphicFrame>
@@ -46642,7 +46598,7 @@
               <p:nvPr/>
             </p:nvPicPr>
             <p:blipFill>
-              <a:blip r:embed="rId3"/>
+              <a:blip r:embed="rId4"/>
               <a:stretch>
                 <a:fillRect/>
               </a:stretch>
